--- a/urok21/Урок21_презентация.pptx
+++ b/urok21/Урок21_презентация.pptx
@@ -10,9 +10,11 @@
     <p:sldId id="258" r:id="rId4"/>
     <p:sldId id="259" r:id="rId5"/>
     <p:sldId id="260" r:id="rId6"/>
+    <p:sldId id="261" r:id="rId7"/>
+    <p:sldId id="262" r:id="rId8"/>
   </p:sldIdLst>
   <p:notesMasterIdLst>
-    <p:notesMasterId r:id="rId7"/>
+    <p:notesMasterId r:id="rId9"/>
   </p:notesMasterIdLst>
   <p:sldSz cx="12191695" cy="6858000"/>
   <p:notesSz cx="6858000" cy="12191695"/>
@@ -900,6 +902,182 @@
 </p:notes>
 </file>
 
+<file path=ppt/notesSlides/notesSlide6.xml><?xml version="1.0" encoding="utf-8"?>
+<p:notes xmlns:a="http://schemas.openxmlformats.org/drawingml/2006/main" xmlns:r="http://schemas.openxmlformats.org/officeDocument/2006/relationships" xmlns:p="http://schemas.openxmlformats.org/presentationml/2006/main">
+  <p:cSld>
+    <p:spTree>
+      <p:nvGrpSpPr>
+        <p:cNvPr id="1" name=""/>
+        <p:cNvGrpSpPr/>
+        <p:nvPr/>
+      </p:nvGrpSpPr>
+      <p:grpSpPr>
+        <a:xfrm>
+          <a:off x="0" y="0"/>
+          <a:ext cx="0" cy="0"/>
+          <a:chOff x="0" y="0"/>
+          <a:chExt cx="0" cy="0"/>
+        </a:xfrm>
+      </p:grpSpPr>
+      <p:sp>
+        <p:nvSpPr>
+          <p:cNvPr id="2" name="Slide Image Placeholder 1"/>
+          <p:cNvSpPr>
+            <a:spLocks noGrp="1" noRot="1" noChangeAspect="1"/>
+          </p:cNvSpPr>
+          <p:nvPr>
+            <p:ph type="sldImg"/>
+          </p:nvPr>
+        </p:nvSpPr>
+        <p:spPr/>
+      </p:sp>
+      <p:sp>
+        <p:nvSpPr>
+          <p:cNvPr id="3" name="Notes Placeholder 2"/>
+          <p:cNvSpPr>
+            <a:spLocks noGrp="1"/>
+          </p:cNvSpPr>
+          <p:nvPr>
+            <p:ph type="body" idx="1"/>
+          </p:nvPr>
+        </p:nvSpPr>
+        <p:spPr/>
+        <p:txBody>
+          <a:bodyPr/>
+          <a:lstStyle/>
+          <a:p>
+            <a:r>
+              <a:rPr lang="en-US" dirty="0"/>
+              <a:t/>
+            </a:r>
+            <a:endParaRPr lang="en-US" dirty="0"/>
+          </a:p>
+        </p:txBody>
+      </p:sp>
+      <p:sp>
+        <p:nvSpPr>
+          <p:cNvPr id="4" name="Slide Number Placeholder 3"/>
+          <p:cNvSpPr>
+            <a:spLocks noGrp="1"/>
+          </p:cNvSpPr>
+          <p:nvPr>
+            <p:ph type="sldNum" sz="quarter" idx="10"/>
+          </p:nvPr>
+        </p:nvSpPr>
+        <p:spPr/>
+        <p:txBody>
+          <a:bodyPr/>
+          <a:lstStyle/>
+          <a:p>
+            <a:fld id="{F7021451-1387-4CA6-816F-3879F97B5CBC}" type="slidenum">
+              <a:rPr lang="en-US"/>
+              <a:t>6</a:t>
+            </a:fld>
+            <a:endParaRPr lang="en-US"/>
+          </a:p>
+        </p:txBody>
+      </p:sp>
+    </p:spTree>
+    <p:extLst>
+      <p:ext uri="{BB962C8B-B14F-4D97-AF65-F5344CB8AC3E}">
+        <p14:creationId xmlns:p14="http://schemas.microsoft.com/office/powerpoint/2010/main" val="1024086991"/>
+      </p:ext>
+    </p:extLst>
+  </p:cSld>
+  <p:clrMapOvr>
+    <a:masterClrMapping/>
+  </p:clrMapOvr>
+</p:notes>
+</file>
+
+<file path=ppt/notesSlides/notesSlide7.xml><?xml version="1.0" encoding="utf-8"?>
+<p:notes xmlns:a="http://schemas.openxmlformats.org/drawingml/2006/main" xmlns:r="http://schemas.openxmlformats.org/officeDocument/2006/relationships" xmlns:p="http://schemas.openxmlformats.org/presentationml/2006/main">
+  <p:cSld>
+    <p:spTree>
+      <p:nvGrpSpPr>
+        <p:cNvPr id="1" name=""/>
+        <p:cNvGrpSpPr/>
+        <p:nvPr/>
+      </p:nvGrpSpPr>
+      <p:grpSpPr>
+        <a:xfrm>
+          <a:off x="0" y="0"/>
+          <a:ext cx="0" cy="0"/>
+          <a:chOff x="0" y="0"/>
+          <a:chExt cx="0" cy="0"/>
+        </a:xfrm>
+      </p:grpSpPr>
+      <p:sp>
+        <p:nvSpPr>
+          <p:cNvPr id="2" name="Slide Image Placeholder 1"/>
+          <p:cNvSpPr>
+            <a:spLocks noGrp="1" noRot="1" noChangeAspect="1"/>
+          </p:cNvSpPr>
+          <p:nvPr>
+            <p:ph type="sldImg"/>
+          </p:nvPr>
+        </p:nvSpPr>
+        <p:spPr/>
+      </p:sp>
+      <p:sp>
+        <p:nvSpPr>
+          <p:cNvPr id="3" name="Notes Placeholder 2"/>
+          <p:cNvSpPr>
+            <a:spLocks noGrp="1"/>
+          </p:cNvSpPr>
+          <p:nvPr>
+            <p:ph type="body" idx="1"/>
+          </p:nvPr>
+        </p:nvSpPr>
+        <p:spPr/>
+        <p:txBody>
+          <a:bodyPr/>
+          <a:lstStyle/>
+          <a:p>
+            <a:r>
+              <a:rPr lang="en-US" dirty="0"/>
+              <a:t/>
+            </a:r>
+            <a:endParaRPr lang="en-US" dirty="0"/>
+          </a:p>
+        </p:txBody>
+      </p:sp>
+      <p:sp>
+        <p:nvSpPr>
+          <p:cNvPr id="4" name="Slide Number Placeholder 3"/>
+          <p:cNvSpPr>
+            <a:spLocks noGrp="1"/>
+          </p:cNvSpPr>
+          <p:nvPr>
+            <p:ph type="sldNum" sz="quarter" idx="10"/>
+          </p:nvPr>
+        </p:nvSpPr>
+        <p:spPr/>
+        <p:txBody>
+          <a:bodyPr/>
+          <a:lstStyle/>
+          <a:p>
+            <a:fld id="{F7021451-1387-4CA6-816F-3879F97B5CBC}" type="slidenum">
+              <a:rPr lang="en-US"/>
+              <a:t>7</a:t>
+            </a:fld>
+            <a:endParaRPr lang="en-US"/>
+          </a:p>
+        </p:txBody>
+      </p:sp>
+    </p:spTree>
+    <p:extLst>
+      <p:ext uri="{BB962C8B-B14F-4D97-AF65-F5344CB8AC3E}">
+        <p14:creationId xmlns:p14="http://schemas.microsoft.com/office/powerpoint/2010/main" val="1024086991"/>
+      </p:ext>
+    </p:extLst>
+  </p:cSld>
+  <p:clrMapOvr>
+    <a:masterClrMapping/>
+  </p:clrMapOvr>
+</p:notes>
+</file>
+
 <file path=ppt/slideLayouts/slideLayout1.xml><?xml version="1.0" encoding="utf-8"?>
 <p:sldLayout xmlns:a="http://schemas.openxmlformats.org/drawingml/2006/main" xmlns:r="http://schemas.openxmlformats.org/officeDocument/2006/relationships" xmlns:p="http://schemas.openxmlformats.org/presentationml/2006/main" preserve="1">
   <p:cSld name="DEFAULT">
@@ -1233,18 +1411,197 @@
       </p:grpSpPr>
       <p:sp>
         <p:nvSpPr>
-          <p:cNvPr id="2" name="Shape 0"/>
-          <p:cNvSpPr/>
-          <p:nvPr/>
-        </p:nvSpPr>
-        <p:spPr>
-          <a:xfrm>
-            <a:off x="9509760" y="1554480"/>
-            <a:ext cx="2011680" cy="502920"/>
+          <p:cNvPr id="2" name="Text 0"/>
+          <p:cNvSpPr/>
+          <p:nvPr/>
+        </p:nvSpPr>
+        <p:spPr>
+          <a:xfrm>
+            <a:off x="640080" y="502920"/>
+            <a:ext cx="10058400" cy="365760"/>
+          </a:xfrm>
+          <a:prstGeom prst="rect">
+            <a:avLst/>
+          </a:prstGeom>
+          <a:noFill/>
+          <a:ln/>
+        </p:spPr>
+        <p:txBody>
+          <a:bodyPr wrap="square" rtlCol="0" anchor="ctr"/>
+          <a:lstStyle/>
+          <a:p>
+            <a:pPr indent="0" marL="0">
+              <a:buNone/>
+            </a:pPr>
+            <a:r>
+              <a:rPr lang="en-US" sz="1300" b="1" spc="300" kern="0" dirty="0">
+                <a:solidFill>
+                  <a:srgbClr val="27D3EE"/>
+                </a:solidFill>
+                <a:latin typeface="Calibri" pitchFamily="34" charset="0"/>
+                <a:ea typeface="Calibri" pitchFamily="34" charset="-122"/>
+                <a:cs typeface="Calibri" pitchFamily="34" charset="-120"/>
+              </a:rPr>
+              <a:t>ФАЗА 4 · НЕДЕЛЯ 11 · ФИНАЛЬНЫЙ ПРОЕКТ</a:t>
+            </a:r>
+            <a:endParaRPr lang="en-US" sz="1300" dirty="0"/>
+          </a:p>
+        </p:txBody>
+      </p:sp>
+      <p:sp>
+        <p:nvSpPr>
+          <p:cNvPr id="3" name="Text 1"/>
+          <p:cNvSpPr/>
+          <p:nvPr/>
+        </p:nvSpPr>
+        <p:spPr>
+          <a:xfrm>
+            <a:off x="640080" y="1280160"/>
+            <a:ext cx="7315200" cy="1828800"/>
+          </a:xfrm>
+          <a:prstGeom prst="rect">
+            <a:avLst/>
+          </a:prstGeom>
+          <a:noFill/>
+          <a:ln/>
+        </p:spPr>
+        <p:txBody>
+          <a:bodyPr wrap="square" rtlCol="0" anchor="ctr"/>
+          <a:lstStyle/>
+          <a:p>
+            <a:pPr indent="0" marL="0">
+              <a:lnSpc>
+                <a:spcPct val="100000"/>
+              </a:lnSpc>
+              <a:buNone/>
+            </a:pPr>
+            <a:r>
+              <a:rPr lang="en-US" sz="5200" b="1" dirty="0">
+                <a:solidFill>
+                  <a:srgbClr val="FFFFFF"/>
+                </a:solidFill>
+                <a:latin typeface="Calibri" pitchFamily="34" charset="0"/>
+                <a:ea typeface="Calibri" pitchFamily="34" charset="-122"/>
+                <a:cs typeface="Calibri" pitchFamily="34" charset="-120"/>
+              </a:rPr>
+              <a:t>Финальный проект:</a:t>
+            </a:r>
+            <a:endParaRPr lang="en-US" sz="5200" dirty="0"/>
+          </a:p>
+          <a:p>
+            <a:pPr indent="0" marL="0">
+              <a:lnSpc>
+                <a:spcPct val="100000"/>
+              </a:lnSpc>
+              <a:buNone/>
+            </a:pPr>
+            <a:r>
+              <a:rPr lang="en-US" sz="5200" b="1" dirty="0">
+                <a:solidFill>
+                  <a:srgbClr val="FFFFFF"/>
+                </a:solidFill>
+                <a:latin typeface="Calibri" pitchFamily="34" charset="0"/>
+                <a:ea typeface="Calibri" pitchFamily="34" charset="-122"/>
+                <a:cs typeface="Calibri" pitchFamily="34" charset="-120"/>
+              </a:rPr>
+              <a:t>питч и старт</a:t>
+            </a:r>
+            <a:endParaRPr lang="en-US" sz="5200" dirty="0"/>
+          </a:p>
+        </p:txBody>
+      </p:sp>
+      <p:sp>
+        <p:nvSpPr>
+          <p:cNvPr id="4" name="Text 2"/>
+          <p:cNvSpPr/>
+          <p:nvPr/>
+        </p:nvSpPr>
+        <p:spPr>
+          <a:xfrm>
+            <a:off x="640080" y="3566160"/>
+            <a:ext cx="7315200" cy="548640"/>
+          </a:xfrm>
+          <a:prstGeom prst="rect">
+            <a:avLst/>
+          </a:prstGeom>
+          <a:noFill/>
+          <a:ln/>
+        </p:spPr>
+        <p:txBody>
+          <a:bodyPr wrap="square" rtlCol="0" anchor="ctr"/>
+          <a:lstStyle/>
+          <a:p>
+            <a:pPr indent="0" marL="0">
+              <a:buNone/>
+            </a:pPr>
+            <a:r>
+              <a:rPr lang="en-US" sz="2200" dirty="0">
+                <a:solidFill>
+                  <a:srgbClr val="D9D4F2"/>
+                </a:solidFill>
+                <a:latin typeface="Calibri" pitchFamily="34" charset="0"/>
+                <a:ea typeface="Calibri" pitchFamily="34" charset="-122"/>
+                <a:cs typeface="Calibri" pitchFamily="34" charset="-120"/>
+              </a:rPr>
+              <a:t>Твоя идея — от задачи до модели</a:t>
+            </a:r>
+            <a:endParaRPr lang="en-US" sz="2200" dirty="0"/>
+          </a:p>
+        </p:txBody>
+      </p:sp>
+      <p:sp>
+        <p:nvSpPr>
+          <p:cNvPr id="5" name="Text 3"/>
+          <p:cNvSpPr/>
+          <p:nvPr/>
+        </p:nvSpPr>
+        <p:spPr>
+          <a:xfrm>
+            <a:off x="640080" y="4480560"/>
+            <a:ext cx="8229600" cy="457200"/>
+          </a:xfrm>
+          <a:prstGeom prst="rect">
+            <a:avLst/>
+          </a:prstGeom>
+          <a:noFill/>
+          <a:ln/>
+        </p:spPr>
+        <p:txBody>
+          <a:bodyPr wrap="square" rtlCol="0" anchor="ctr"/>
+          <a:lstStyle/>
+          <a:p>
+            <a:pPr indent="0" marL="0">
+              <a:buNone/>
+            </a:pPr>
+            <a:r>
+              <a:rPr lang="en-US" sz="1500" dirty="0">
+                <a:solidFill>
+                  <a:srgbClr val="9E96C8"/>
+                </a:solidFill>
+                <a:latin typeface="Calibri" pitchFamily="34" charset="0"/>
+                <a:ea typeface="Calibri" pitchFamily="34" charset="-122"/>
+                <a:cs typeface="Calibri" pitchFamily="34" charset="-120"/>
+              </a:rPr>
+              <a:t>Урок 21 · 90 минут · то, что покажешь родителям и в портфолио</a:t>
+            </a:r>
+            <a:endParaRPr lang="en-US" sz="1500" dirty="0"/>
+          </a:p>
+        </p:txBody>
+      </p:sp>
+      <p:sp>
+        <p:nvSpPr>
+          <p:cNvPr id="6" name="Shape 4"/>
+          <p:cNvSpPr/>
+          <p:nvPr/>
+        </p:nvSpPr>
+        <p:spPr>
+          <a:xfrm>
+            <a:off x="8961120" y="3291840"/>
+            <a:ext cx="1554480" cy="292608"/>
           </a:xfrm>
           <a:prstGeom prst="roundRect">
             <a:avLst>
-              <a:gd name="adj" fmla="val 14545"/>
+              <a:gd name="adj" fmla="val 37500"/>
             </a:avLst>
           </a:prstGeom>
           <a:solidFill>
@@ -1255,18 +1612,18 @@
       </p:sp>
       <p:sp>
         <p:nvSpPr>
-          <p:cNvPr id="3" name="Shape 1"/>
-          <p:cNvSpPr/>
-          <p:nvPr/>
-        </p:nvSpPr>
-        <p:spPr>
-          <a:xfrm>
-            <a:off x="9372600" y="2212848"/>
-            <a:ext cx="2286000" cy="502920"/>
+          <p:cNvPr id="7" name="Shape 5"/>
+          <p:cNvSpPr/>
+          <p:nvPr/>
+        </p:nvSpPr>
+        <p:spPr>
+          <a:xfrm>
+            <a:off x="8778240" y="3657600"/>
+            <a:ext cx="1920240" cy="292608"/>
           </a:xfrm>
           <a:prstGeom prst="roundRect">
             <a:avLst>
-              <a:gd name="adj" fmla="val 14545"/>
+              <a:gd name="adj" fmla="val 37500"/>
             </a:avLst>
           </a:prstGeom>
           <a:solidFill>
@@ -1277,18 +1634,18 @@
       </p:sp>
       <p:sp>
         <p:nvSpPr>
-          <p:cNvPr id="4" name="Shape 2"/>
-          <p:cNvSpPr/>
-          <p:nvPr/>
-        </p:nvSpPr>
-        <p:spPr>
-          <a:xfrm>
-            <a:off x="9235440" y="2871216"/>
-            <a:ext cx="2560320" cy="502920"/>
+          <p:cNvPr id="8" name="Shape 6"/>
+          <p:cNvSpPr/>
+          <p:nvPr/>
+        </p:nvSpPr>
+        <p:spPr>
+          <a:xfrm>
+            <a:off x="8778240" y="4023360"/>
+            <a:ext cx="1920240" cy="292608"/>
           </a:xfrm>
           <a:prstGeom prst="roundRect">
             <a:avLst>
-              <a:gd name="adj" fmla="val 14545"/>
+              <a:gd name="adj" fmla="val 37500"/>
             </a:avLst>
           </a:prstGeom>
           <a:solidFill>
@@ -1299,204 +1656,25 @@
       </p:sp>
       <p:sp>
         <p:nvSpPr>
-          <p:cNvPr id="5" name="Shape 3"/>
-          <p:cNvSpPr/>
-          <p:nvPr/>
-        </p:nvSpPr>
-        <p:spPr>
-          <a:xfrm>
-            <a:off x="9098280" y="3529584"/>
-            <a:ext cx="2834640" cy="502920"/>
+          <p:cNvPr id="9" name="Shape 7"/>
+          <p:cNvSpPr/>
+          <p:nvPr/>
+        </p:nvSpPr>
+        <p:spPr>
+          <a:xfrm>
+            <a:off x="8869680" y="4389120"/>
+            <a:ext cx="1737360" cy="292608"/>
           </a:xfrm>
           <a:prstGeom prst="roundRect">
             <a:avLst>
-              <a:gd name="adj" fmla="val 14545"/>
+              <a:gd name="adj" fmla="val 37500"/>
             </a:avLst>
           </a:prstGeom>
           <a:solidFill>
-            <a:srgbClr val="3A3466"/>
-          </a:solidFill>
-          <a:ln/>
-        </p:spPr>
-      </p:sp>
-      <p:sp>
-        <p:nvSpPr>
-          <p:cNvPr id="6" name="Text 4"/>
-          <p:cNvSpPr/>
-          <p:nvPr/>
-        </p:nvSpPr>
-        <p:spPr>
-          <a:xfrm>
-            <a:off x="594360" y="1554480"/>
-            <a:ext cx="7955280" cy="365760"/>
-          </a:xfrm>
-          <a:prstGeom prst="rect">
-            <a:avLst/>
-          </a:prstGeom>
-          <a:noFill/>
-          <a:ln/>
-        </p:spPr>
-        <p:txBody>
-          <a:bodyPr wrap="square" rtlCol="0" anchor="t"/>
-          <a:lstStyle/>
-          <a:p>
-            <a:pPr indent="0" marL="0">
-              <a:buNone/>
-            </a:pPr>
-            <a:r>
-              <a:rPr lang="en-US" sz="1400" b="1" spc="200" kern="0" dirty="0">
-                <a:solidFill>
-                  <a:srgbClr val="27D3EE"/>
-                </a:solidFill>
-                <a:latin typeface="Calibri" pitchFamily="34" charset="0"/>
-                <a:ea typeface="Calibri" pitchFamily="34" charset="-122"/>
-                <a:cs typeface="Calibri" pitchFamily="34" charset="-120"/>
-              </a:rPr>
-              <a:t>ФАЗА 6 · НЕДЕЛЯ 11 · ФИНАЛЬНЫЙ ПРОЕКТ</a:t>
-            </a:r>
-            <a:endParaRPr lang="en-US" sz="1400" dirty="0"/>
-          </a:p>
-        </p:txBody>
-      </p:sp>
-      <p:sp>
-        <p:nvSpPr>
-          <p:cNvPr id="7" name="Text 5"/>
-          <p:cNvSpPr/>
-          <p:nvPr/>
-        </p:nvSpPr>
-        <p:spPr>
-          <a:xfrm>
-            <a:off x="594360" y="2011680"/>
-            <a:ext cx="7863840" cy="1737360"/>
-          </a:xfrm>
-          <a:prstGeom prst="rect">
-            <a:avLst/>
-          </a:prstGeom>
-          <a:noFill/>
-          <a:ln/>
-        </p:spPr>
-        <p:txBody>
-          <a:bodyPr wrap="square" rtlCol="0" anchor="t"/>
-          <a:lstStyle/>
-          <a:p>
-            <a:pPr indent="0" marL="0">
-              <a:lnSpc>
-                <a:spcPct val="95000"/>
-              </a:lnSpc>
-              <a:buNone/>
-            </a:pPr>
-            <a:r>
-              <a:rPr lang="en-US" sz="4400" b="1" dirty="0">
-                <a:solidFill>
-                  <a:srgbClr val="FFFFFF"/>
-                </a:solidFill>
-                <a:latin typeface="Calibri" pitchFamily="34" charset="0"/>
-                <a:ea typeface="Calibri" pitchFamily="34" charset="-122"/>
-                <a:cs typeface="Calibri" pitchFamily="34" charset="-120"/>
-              </a:rPr>
-              <a:t>Финальный проект:</a:t>
-            </a:r>
-            <a:endParaRPr lang="en-US" sz="4400" dirty="0"/>
-          </a:p>
-          <a:p>
-            <a:pPr indent="0" marL="0">
-              <a:lnSpc>
-                <a:spcPct val="95000"/>
-              </a:lnSpc>
-              <a:buNone/>
-            </a:pPr>
-            <a:r>
-              <a:rPr lang="en-US" sz="4400" b="1" dirty="0">
-                <a:solidFill>
-                  <a:srgbClr val="FFFFFF"/>
-                </a:solidFill>
-                <a:latin typeface="Calibri" pitchFamily="34" charset="0"/>
-                <a:ea typeface="Calibri" pitchFamily="34" charset="-122"/>
-                <a:cs typeface="Calibri" pitchFamily="34" charset="-120"/>
-              </a:rPr>
-              <a:t>питч и старт</a:t>
-            </a:r>
-            <a:endParaRPr lang="en-US" sz="4400" dirty="0"/>
-          </a:p>
-        </p:txBody>
-      </p:sp>
-      <p:sp>
-        <p:nvSpPr>
-          <p:cNvPr id="8" name="Text 6"/>
-          <p:cNvSpPr/>
-          <p:nvPr/>
-        </p:nvSpPr>
-        <p:spPr>
-          <a:xfrm>
-            <a:off x="594360" y="3886200"/>
-            <a:ext cx="8229600" cy="548640"/>
-          </a:xfrm>
-          <a:prstGeom prst="rect">
-            <a:avLst/>
-          </a:prstGeom>
-          <a:noFill/>
-          <a:ln/>
-        </p:spPr>
-        <p:txBody>
-          <a:bodyPr wrap="square" rtlCol="0" anchor="t"/>
-          <a:lstStyle/>
-          <a:p>
-            <a:pPr indent="0" marL="0">
-              <a:buNone/>
-            </a:pPr>
-            <a:r>
-              <a:rPr lang="en-US" sz="2400" dirty="0">
-                <a:solidFill>
-                  <a:srgbClr val="D9D4F2"/>
-                </a:solidFill>
-                <a:latin typeface="Calibri" pitchFamily="34" charset="0"/>
-                <a:ea typeface="Calibri" pitchFamily="34" charset="-122"/>
-                <a:cs typeface="Calibri" pitchFamily="34" charset="-120"/>
-              </a:rPr>
-              <a:t>Твоя идея — от задачи до модели</a:t>
-            </a:r>
-            <a:endParaRPr lang="en-US" sz="2400" dirty="0"/>
-          </a:p>
-        </p:txBody>
-      </p:sp>
-      <p:sp>
-        <p:nvSpPr>
-          <p:cNvPr id="9" name="Text 7"/>
-          <p:cNvSpPr/>
-          <p:nvPr/>
-        </p:nvSpPr>
-        <p:spPr>
-          <a:xfrm>
-            <a:off x="594360" y="4754880"/>
-            <a:ext cx="8229600" cy="365760"/>
-          </a:xfrm>
-          <a:prstGeom prst="rect">
-            <a:avLst/>
-          </a:prstGeom>
-          <a:noFill/>
-          <a:ln/>
-        </p:spPr>
-        <p:txBody>
-          <a:bodyPr wrap="square" rtlCol="0" anchor="t"/>
-          <a:lstStyle/>
-          <a:p>
-            <a:pPr indent="0" marL="0">
-              <a:buNone/>
-            </a:pPr>
-            <a:r>
-              <a:rPr lang="en-US" sz="1500" dirty="0">
-                <a:solidFill>
-                  <a:srgbClr val="9E96C8"/>
-                </a:solidFill>
-                <a:latin typeface="Calibri" pitchFamily="34" charset="0"/>
-                <a:ea typeface="Calibri" pitchFamily="34" charset="-122"/>
-                <a:cs typeface="Calibri" pitchFamily="34" charset="-120"/>
-              </a:rPr>
-              <a:t>Урок 21 · 90 минут · то, что покажешь родителям и в портфолио</a:t>
-            </a:r>
-            <a:endParaRPr lang="en-US" sz="1500" dirty="0"/>
-          </a:p>
-        </p:txBody>
+            <a:srgbClr val="2C2552"/>
+          </a:solidFill>
+          <a:ln/>
+        </p:spPr>
       </p:sp>
     </p:spTree>
   </p:cSld>
@@ -1538,24 +1716,24 @@
         </p:nvSpPr>
         <p:spPr>
           <a:xfrm>
-            <a:off x="594360" y="457200"/>
-            <a:ext cx="11002975" cy="320040"/>
-          </a:xfrm>
-          <a:prstGeom prst="rect">
-            <a:avLst/>
-          </a:prstGeom>
-          <a:noFill/>
-          <a:ln/>
-        </p:spPr>
-        <p:txBody>
-          <a:bodyPr wrap="square" rtlCol="0" anchor="t"/>
+            <a:off x="640080" y="502920"/>
+            <a:ext cx="10058400" cy="365760"/>
+          </a:xfrm>
+          <a:prstGeom prst="rect">
+            <a:avLst/>
+          </a:prstGeom>
+          <a:noFill/>
+          <a:ln/>
+        </p:spPr>
+        <p:txBody>
+          <a:bodyPr wrap="square" rtlCol="0" anchor="ctr"/>
           <a:lstStyle/>
           <a:p>
             <a:pPr indent="0" marL="0">
               <a:buNone/>
             </a:pPr>
             <a:r>
-              <a:rPr lang="en-US" sz="1300" b="1" spc="200" kern="0" dirty="0">
+              <a:rPr lang="en-US" sz="1300" b="1" spc="300" kern="0" dirty="0">
                 <a:solidFill>
                   <a:srgbClr val="27D3EE"/>
                 </a:solidFill>
@@ -1563,38 +1741,62 @@
                 <a:ea typeface="Calibri" pitchFamily="34" charset="-122"/>
                 <a:cs typeface="Calibri" pitchFamily="34" charset="-120"/>
               </a:rPr>
-              <a:t>ВОВЛЕЧЕНИЕ · 0–10 МИН</a:t>
+              <a:t>ВОВЛЕЧЕНИЕ · 0–2 МИН</a:t>
             </a:r>
             <a:endParaRPr lang="en-US" sz="1300" dirty="0"/>
           </a:p>
         </p:txBody>
       </p:sp>
-      <p:sp>
-        <p:nvSpPr>
-          <p:cNvPr id="3" name="Text 1"/>
-          <p:cNvSpPr/>
-          <p:nvPr/>
-        </p:nvSpPr>
-        <p:spPr>
-          <a:xfrm>
-            <a:off x="594360" y="749808"/>
-            <a:ext cx="11002975" cy="822960"/>
-          </a:xfrm>
-          <a:prstGeom prst="rect">
-            <a:avLst/>
-          </a:prstGeom>
-          <a:noFill/>
-          <a:ln/>
-        </p:spPr>
-        <p:txBody>
-          <a:bodyPr wrap="square" rtlCol="0" anchor="t"/>
+      <p:pic>
+        <p:nvPicPr>
+          <p:cNvPr id="3" name="Image 0" descr="preencoded.png">    </p:cNvPr>
+          <p:cNvPicPr>
+            <a:picLocks noChangeAspect="1"/>
+          </p:cNvPicPr>
+          <p:nvPr/>
+        </p:nvPicPr>
+        <p:blipFill>
+          <a:blip r:embed="rId1"/>
+          <a:stretch>
+            <a:fillRect/>
+          </a:stretch>
+        </p:blipFill>
+        <p:spPr>
+          <a:xfrm>
+            <a:off x="640080" y="1188720"/>
+            <a:ext cx="914400" cy="914400"/>
+          </a:xfrm>
+          <a:prstGeom prst="rect">
+            <a:avLst/>
+          </a:prstGeom>
+        </p:spPr>
+      </p:pic>
+      <p:sp>
+        <p:nvSpPr>
+          <p:cNvPr id="4" name="Text 1"/>
+          <p:cNvSpPr/>
+          <p:nvPr/>
+        </p:nvSpPr>
+        <p:spPr>
+          <a:xfrm>
+            <a:off x="640080" y="2286000"/>
+            <a:ext cx="10972800" cy="1280160"/>
+          </a:xfrm>
+          <a:prstGeom prst="rect">
+            <a:avLst/>
+          </a:prstGeom>
+          <a:noFill/>
+          <a:ln/>
+        </p:spPr>
+        <p:txBody>
+          <a:bodyPr wrap="square" rtlCol="0" anchor="ctr"/>
           <a:lstStyle/>
           <a:p>
             <a:pPr indent="0" marL="0">
               <a:buNone/>
             </a:pPr>
             <a:r>
-              <a:rPr lang="en-US" sz="3000" b="1" dirty="0">
+              <a:rPr lang="en-US" sz="4600" b="1" dirty="0">
                 <a:solidFill>
                   <a:srgbClr val="FFFFFF"/>
                 </a:solidFill>
@@ -1602,44 +1804,88 @@
                 <a:ea typeface="Calibri" pitchFamily="34" charset="-122"/>
                 <a:cs typeface="Calibri" pitchFamily="34" charset="-120"/>
               </a:rPr>
-              <a:t>Каким бывает проект</a:t>
-            </a:r>
-            <a:endParaRPr lang="en-US" sz="3000" dirty="0"/>
-          </a:p>
-        </p:txBody>
-      </p:sp>
-      <p:sp>
-        <p:nvSpPr>
-          <p:cNvPr id="4" name="Shape 2"/>
-          <p:cNvSpPr/>
-          <p:nvPr/>
-        </p:nvSpPr>
-        <p:spPr>
-          <a:xfrm>
-            <a:off x="594360" y="2286000"/>
-            <a:ext cx="2476424" cy="2743200"/>
+              <a:t>Что бы ты хотел создать сам?</a:t>
+            </a:r>
+            <a:endParaRPr lang="en-US" sz="4600" dirty="0"/>
+          </a:p>
+        </p:txBody>
+      </p:sp>
+      <p:sp>
+        <p:nvSpPr>
+          <p:cNvPr id="5" name="Text 2"/>
+          <p:cNvSpPr/>
+          <p:nvPr/>
+        </p:nvSpPr>
+        <p:spPr>
+          <a:xfrm>
+            <a:off x="658368" y="3611880"/>
+            <a:ext cx="10972800" cy="548640"/>
+          </a:xfrm>
+          <a:prstGeom prst="rect">
+            <a:avLst/>
+          </a:prstGeom>
+          <a:noFill/>
+          <a:ln/>
+        </p:spPr>
+        <p:txBody>
+          <a:bodyPr wrap="square" rtlCol="0" anchor="ctr"/>
+          <a:lstStyle/>
+          <a:p>
+            <a:pPr indent="0" marL="0">
+              <a:buNone/>
+            </a:pPr>
+            <a:r>
+              <a:rPr lang="en-US" sz="2200" b="1" dirty="0">
+                <a:solidFill>
+                  <a:srgbClr val="27D3EE"/>
+                </a:solidFill>
+                <a:latin typeface="Calibri" pitchFamily="34" charset="0"/>
+                <a:ea typeface="Calibri" pitchFamily="34" charset="-122"/>
+                <a:cs typeface="Calibri" pitchFamily="34" charset="-120"/>
+              </a:rPr>
+              <a:t>Это то, что ты покажешь родителям на Demo Day.</a:t>
+            </a:r>
+            <a:endParaRPr lang="en-US" sz="2200" dirty="0"/>
+          </a:p>
+        </p:txBody>
+      </p:sp>
+      <p:sp>
+        <p:nvSpPr>
+          <p:cNvPr id="6" name="Shape 3"/>
+          <p:cNvSpPr/>
+          <p:nvPr/>
+        </p:nvSpPr>
+        <p:spPr>
+          <a:xfrm>
+            <a:off x="640080" y="4526280"/>
+            <a:ext cx="10881360" cy="1371600"/>
           </a:xfrm>
           <a:prstGeom prst="roundRect">
             <a:avLst>
-              <a:gd name="adj" fmla="val 4431"/>
+              <a:gd name="adj" fmla="val 8000"/>
             </a:avLst>
           </a:prstGeom>
           <a:solidFill>
             <a:srgbClr val="241E42"/>
           </a:solidFill>
-          <a:ln/>
-        </p:spPr>
-      </p:sp>
-      <p:sp>
-        <p:nvSpPr>
-          <p:cNvPr id="5" name="Text 3"/>
-          <p:cNvSpPr/>
-          <p:nvPr/>
-        </p:nvSpPr>
-        <p:spPr>
-          <a:xfrm>
-            <a:off x="594360" y="2560320"/>
-            <a:ext cx="2476424" cy="822960"/>
+          <a:ln w="19050">
+            <a:solidFill>
+              <a:srgbClr val="8B7DF5"/>
+            </a:solidFill>
+            <a:prstDash val="solid"/>
+          </a:ln>
+        </p:spPr>
+      </p:sp>
+      <p:sp>
+        <p:nvSpPr>
+          <p:cNvPr id="7" name="Text 4"/>
+          <p:cNvSpPr/>
+          <p:nvPr/>
+        </p:nvSpPr>
+        <p:spPr>
+          <a:xfrm>
+            <a:off x="914400" y="4709160"/>
+            <a:ext cx="10332720" cy="1005840"/>
           </a:xfrm>
           <a:prstGeom prst="rect">
             <a:avLst/>
@@ -1651,11 +1897,35 @@
           <a:bodyPr wrap="square" rtlCol="0" anchor="t"/>
           <a:lstStyle/>
           <a:p>
-            <a:pPr algn="ctr" indent="0" marL="0">
-              <a:buNone/>
-            </a:pPr>
-            <a:r>
-              <a:rPr lang="en-US" sz="4000" dirty="0">
+            <a:pPr indent="0" marL="0">
+              <a:lnSpc>
+                <a:spcPct val="110000"/>
+              </a:lnSpc>
+              <a:buNone/>
+            </a:pPr>
+            <a:r>
+              <a:rPr lang="en-US" sz="2000" b="1" dirty="0">
+                <a:solidFill>
+                  <a:srgbClr val="FFFFFF"/>
+                </a:solidFill>
+                <a:latin typeface="Calibri" pitchFamily="34" charset="0"/>
+                <a:ea typeface="Calibri" pitchFamily="34" charset="-122"/>
+                <a:cs typeface="Calibri" pitchFamily="34" charset="-120"/>
+              </a:rPr>
+              <a:t>🧠  Мозговой штурм · 2 минуты
+</a:t>
+            </a:r>
+            <a:endParaRPr lang="en-US" sz="2000" dirty="0"/>
+          </a:p>
+          <a:p>
+            <a:pPr indent="0" marL="0">
+              <a:lnSpc>
+                <a:spcPct val="110000"/>
+              </a:lnSpc>
+              <a:buNone/>
+            </a:pPr>
+            <a:r>
+              <a:rPr lang="en-US" sz="1600" dirty="0">
                 <a:solidFill>
                   <a:srgbClr val="D9D4F2"/>
                 </a:solidFill>
@@ -1663,577 +1933,31 @@
                 <a:ea typeface="Calibri" pitchFamily="34" charset="-122"/>
                 <a:cs typeface="Calibri" pitchFamily="34" charset="-120"/>
               </a:rPr>
-              <a:t>🎭</a:t>
-            </a:r>
-            <a:endParaRPr lang="en-US" sz="4000" dirty="0"/>
-          </a:p>
-        </p:txBody>
-      </p:sp>
-      <p:sp>
-        <p:nvSpPr>
-          <p:cNvPr id="6" name="Text 4"/>
-          <p:cNvSpPr/>
-          <p:nvPr/>
-        </p:nvSpPr>
-        <p:spPr>
-          <a:xfrm>
-            <a:off x="731520" y="3520440"/>
-            <a:ext cx="2202104" cy="731520"/>
-          </a:xfrm>
-          <a:prstGeom prst="rect">
-            <a:avLst/>
-          </a:prstGeom>
-          <a:noFill/>
-          <a:ln/>
-        </p:spPr>
-        <p:txBody>
-          <a:bodyPr wrap="square" rtlCol="0" anchor="t"/>
-          <a:lstStyle/>
-          <a:p>
-            <a:pPr algn="ctr" indent="0" marL="0">
-              <a:lnSpc>
-                <a:spcPct val="100000"/>
-              </a:lnSpc>
-              <a:buNone/>
-            </a:pPr>
-            <a:r>
-              <a:rPr lang="en-US" sz="1600" b="1" dirty="0">
-                <a:solidFill>
-                  <a:srgbClr val="FFFFFF"/>
-                </a:solidFill>
-                <a:latin typeface="Calibri" pitchFamily="34" charset="0"/>
-                <a:ea typeface="Calibri" pitchFamily="34" charset="-122"/>
-                <a:cs typeface="Calibri" pitchFamily="34" charset="-120"/>
-              </a:rPr>
-              <a:t>Детектор настроения</a:t>
-            </a:r>
-            <a:endParaRPr lang="en-US" sz="1600" dirty="0"/>
-          </a:p>
-        </p:txBody>
-      </p:sp>
-      <p:sp>
-        <p:nvSpPr>
-          <p:cNvPr id="7" name="Text 5"/>
-          <p:cNvSpPr/>
-          <p:nvPr/>
-        </p:nvSpPr>
-        <p:spPr>
-          <a:xfrm>
-            <a:off x="731520" y="4297680"/>
-            <a:ext cx="2202104" cy="548640"/>
-          </a:xfrm>
-          <a:prstGeom prst="rect">
-            <a:avLst/>
-          </a:prstGeom>
-          <a:noFill/>
-          <a:ln/>
-        </p:spPr>
-        <p:txBody>
-          <a:bodyPr wrap="square" rtlCol="0" anchor="t"/>
-          <a:lstStyle/>
-          <a:p>
-            <a:pPr algn="ctr" indent="0" marL="0">
-              <a:buNone/>
-            </a:pPr>
-            <a:r>
-              <a:rPr lang="en-US" sz="1300" dirty="0">
-                <a:solidFill>
-                  <a:srgbClr val="9E96C8"/>
-                </a:solidFill>
-                <a:latin typeface="Calibri" pitchFamily="34" charset="0"/>
-                <a:ea typeface="Calibri" pitchFamily="34" charset="-122"/>
-                <a:cs typeface="Calibri" pitchFamily="34" charset="-120"/>
-              </a:rPr>
-              <a:t>по тексту</a:t>
-            </a:r>
-            <a:endParaRPr lang="en-US" sz="1300" dirty="0"/>
-          </a:p>
-        </p:txBody>
-      </p:sp>
-      <p:sp>
-        <p:nvSpPr>
-          <p:cNvPr id="8" name="Shape 6"/>
-          <p:cNvSpPr/>
-          <p:nvPr/>
-        </p:nvSpPr>
-        <p:spPr>
-          <a:xfrm>
-            <a:off x="3436544" y="2286000"/>
-            <a:ext cx="2476424" cy="2743200"/>
-          </a:xfrm>
-          <a:prstGeom prst="roundRect">
-            <a:avLst>
-              <a:gd name="adj" fmla="val 4431"/>
-            </a:avLst>
-          </a:prstGeom>
-          <a:solidFill>
-            <a:srgbClr val="2C2552"/>
-          </a:solidFill>
-          <a:ln/>
-        </p:spPr>
-      </p:sp>
-      <p:sp>
-        <p:nvSpPr>
-          <p:cNvPr id="9" name="Text 7"/>
-          <p:cNvSpPr/>
-          <p:nvPr/>
-        </p:nvSpPr>
-        <p:spPr>
-          <a:xfrm>
-            <a:off x="3436544" y="2560320"/>
-            <a:ext cx="2476424" cy="822960"/>
-          </a:xfrm>
-          <a:prstGeom prst="rect">
-            <a:avLst/>
-          </a:prstGeom>
-          <a:noFill/>
-          <a:ln/>
-        </p:spPr>
-        <p:txBody>
-          <a:bodyPr wrap="square" rtlCol="0" anchor="t"/>
-          <a:lstStyle/>
-          <a:p>
-            <a:pPr algn="ctr" indent="0" marL="0">
-              <a:buNone/>
-            </a:pPr>
-            <a:r>
-              <a:rPr lang="en-US" sz="4000" dirty="0">
-                <a:solidFill>
-                  <a:srgbClr val="D9D4F2"/>
-                </a:solidFill>
-                <a:latin typeface="Calibri" pitchFamily="34" charset="0"/>
-                <a:ea typeface="Calibri" pitchFamily="34" charset="-122"/>
-                <a:cs typeface="Calibri" pitchFamily="34" charset="-120"/>
-              </a:rPr>
-              <a:t>📈</a:t>
-            </a:r>
-            <a:endParaRPr lang="en-US" sz="4000" dirty="0"/>
-          </a:p>
-        </p:txBody>
-      </p:sp>
-      <p:sp>
-        <p:nvSpPr>
-          <p:cNvPr id="10" name="Text 8"/>
-          <p:cNvSpPr/>
-          <p:nvPr/>
-        </p:nvSpPr>
-        <p:spPr>
-          <a:xfrm>
-            <a:off x="3573704" y="3520440"/>
-            <a:ext cx="2202104" cy="731520"/>
-          </a:xfrm>
-          <a:prstGeom prst="rect">
-            <a:avLst/>
-          </a:prstGeom>
-          <a:noFill/>
-          <a:ln/>
-        </p:spPr>
-        <p:txBody>
-          <a:bodyPr wrap="square" rtlCol="0" anchor="t"/>
-          <a:lstStyle/>
-          <a:p>
-            <a:pPr algn="ctr" indent="0" marL="0">
-              <a:lnSpc>
-                <a:spcPct val="100000"/>
-              </a:lnSpc>
-              <a:buNone/>
-            </a:pPr>
-            <a:r>
-              <a:rPr lang="en-US" sz="1600" b="1" dirty="0">
-                <a:solidFill>
-                  <a:srgbClr val="FFFFFF"/>
-                </a:solidFill>
-                <a:latin typeface="Calibri" pitchFamily="34" charset="0"/>
-                <a:ea typeface="Calibri" pitchFamily="34" charset="-122"/>
-                <a:cs typeface="Calibri" pitchFamily="34" charset="-120"/>
-              </a:rPr>
-              <a:t>Предсказание оценки</a:t>
-            </a:r>
-            <a:endParaRPr lang="en-US" sz="1600" dirty="0"/>
-          </a:p>
-        </p:txBody>
-      </p:sp>
-      <p:sp>
-        <p:nvSpPr>
-          <p:cNvPr id="11" name="Text 9"/>
-          <p:cNvSpPr/>
-          <p:nvPr/>
-        </p:nvSpPr>
-        <p:spPr>
-          <a:xfrm>
-            <a:off x="3573704" y="4297680"/>
-            <a:ext cx="2202104" cy="548640"/>
-          </a:xfrm>
-          <a:prstGeom prst="rect">
-            <a:avLst/>
-          </a:prstGeom>
-          <a:noFill/>
-          <a:ln/>
-        </p:spPr>
-        <p:txBody>
-          <a:bodyPr wrap="square" rtlCol="0" anchor="t"/>
-          <a:lstStyle/>
-          <a:p>
-            <a:pPr algn="ctr" indent="0" marL="0">
-              <a:buNone/>
-            </a:pPr>
-            <a:r>
-              <a:rPr lang="en-US" sz="1300" dirty="0">
-                <a:solidFill>
-                  <a:srgbClr val="9E96C8"/>
-                </a:solidFill>
-                <a:latin typeface="Calibri" pitchFamily="34" charset="0"/>
-                <a:ea typeface="Calibri" pitchFamily="34" charset="-122"/>
-                <a:cs typeface="Calibri" pitchFamily="34" charset="-120"/>
-              </a:rPr>
-              <a:t>по часам учёбы</a:t>
-            </a:r>
-            <a:endParaRPr lang="en-US" sz="1300" dirty="0"/>
-          </a:p>
-        </p:txBody>
-      </p:sp>
-      <p:sp>
-        <p:nvSpPr>
-          <p:cNvPr id="12" name="Shape 10"/>
-          <p:cNvSpPr/>
-          <p:nvPr/>
-        </p:nvSpPr>
-        <p:spPr>
-          <a:xfrm>
-            <a:off x="6278728" y="2286000"/>
-            <a:ext cx="2476424" cy="2743200"/>
-          </a:xfrm>
-          <a:prstGeom prst="roundRect">
-            <a:avLst>
-              <a:gd name="adj" fmla="val 4431"/>
-            </a:avLst>
-          </a:prstGeom>
-          <a:solidFill>
-            <a:srgbClr val="241E42"/>
-          </a:solidFill>
-          <a:ln/>
-        </p:spPr>
-      </p:sp>
-      <p:sp>
-        <p:nvSpPr>
-          <p:cNvPr id="13" name="Text 11"/>
-          <p:cNvSpPr/>
-          <p:nvPr/>
-        </p:nvSpPr>
-        <p:spPr>
-          <a:xfrm>
-            <a:off x="6278728" y="2560320"/>
-            <a:ext cx="2476424" cy="822960"/>
-          </a:xfrm>
-          <a:prstGeom prst="rect">
-            <a:avLst/>
-          </a:prstGeom>
-          <a:noFill/>
-          <a:ln/>
-        </p:spPr>
-        <p:txBody>
-          <a:bodyPr wrap="square" rtlCol="0" anchor="t"/>
-          <a:lstStyle/>
-          <a:p>
-            <a:pPr algn="ctr" indent="0" marL="0">
-              <a:buNone/>
-            </a:pPr>
-            <a:r>
-              <a:rPr lang="en-US" sz="4000" dirty="0">
-                <a:solidFill>
-                  <a:srgbClr val="D9D4F2"/>
-                </a:solidFill>
-                <a:latin typeface="Calibri" pitchFamily="34" charset="0"/>
-                <a:ea typeface="Calibri" pitchFamily="34" charset="-122"/>
-                <a:cs typeface="Calibri" pitchFamily="34" charset="-120"/>
-              </a:rPr>
-              <a:t>🎬</a:t>
-            </a:r>
-            <a:endParaRPr lang="en-US" sz="4000" dirty="0"/>
-          </a:p>
-        </p:txBody>
-      </p:sp>
-      <p:sp>
-        <p:nvSpPr>
-          <p:cNvPr id="14" name="Text 12"/>
-          <p:cNvSpPr/>
-          <p:nvPr/>
-        </p:nvSpPr>
-        <p:spPr>
-          <a:xfrm>
-            <a:off x="6415888" y="3520440"/>
-            <a:ext cx="2202104" cy="731520"/>
-          </a:xfrm>
-          <a:prstGeom prst="rect">
-            <a:avLst/>
-          </a:prstGeom>
-          <a:noFill/>
-          <a:ln/>
-        </p:spPr>
-        <p:txBody>
-          <a:bodyPr wrap="square" rtlCol="0" anchor="t"/>
-          <a:lstStyle/>
-          <a:p>
-            <a:pPr algn="ctr" indent="0" marL="0">
-              <a:lnSpc>
-                <a:spcPct val="100000"/>
-              </a:lnSpc>
-              <a:buNone/>
-            </a:pPr>
-            <a:r>
-              <a:rPr lang="en-US" sz="1600" b="1" dirty="0">
-                <a:solidFill>
-                  <a:srgbClr val="FFFFFF"/>
-                </a:solidFill>
-                <a:latin typeface="Calibri" pitchFamily="34" charset="0"/>
-                <a:ea typeface="Calibri" pitchFamily="34" charset="-122"/>
-                <a:cs typeface="Calibri" pitchFamily="34" charset="-120"/>
-              </a:rPr>
-              <a:t>Рекомендатор</a:t>
-            </a:r>
-            <a:endParaRPr lang="en-US" sz="1600" dirty="0"/>
-          </a:p>
-        </p:txBody>
-      </p:sp>
-      <p:sp>
-        <p:nvSpPr>
-          <p:cNvPr id="15" name="Text 13"/>
-          <p:cNvSpPr/>
-          <p:nvPr/>
-        </p:nvSpPr>
-        <p:spPr>
-          <a:xfrm>
-            <a:off x="6415888" y="4297680"/>
-            <a:ext cx="2202104" cy="548640"/>
-          </a:xfrm>
-          <a:prstGeom prst="rect">
-            <a:avLst/>
-          </a:prstGeom>
-          <a:noFill/>
-          <a:ln/>
-        </p:spPr>
-        <p:txBody>
-          <a:bodyPr wrap="square" rtlCol="0" anchor="t"/>
-          <a:lstStyle/>
-          <a:p>
-            <a:pPr algn="ctr" indent="0" marL="0">
-              <a:buNone/>
-            </a:pPr>
-            <a:r>
-              <a:rPr lang="en-US" sz="1300" dirty="0">
-                <a:solidFill>
-                  <a:srgbClr val="9E96C8"/>
-                </a:solidFill>
-                <a:latin typeface="Calibri" pitchFamily="34" charset="0"/>
-                <a:ea typeface="Calibri" pitchFamily="34" charset="-122"/>
-                <a:cs typeface="Calibri" pitchFamily="34" charset="-120"/>
-              </a:rPr>
-              <a:t>фильмов/игр</a:t>
-            </a:r>
-            <a:endParaRPr lang="en-US" sz="1300" dirty="0"/>
-          </a:p>
-        </p:txBody>
-      </p:sp>
-      <p:sp>
-        <p:nvSpPr>
-          <p:cNvPr id="16" name="Shape 14"/>
-          <p:cNvSpPr/>
-          <p:nvPr/>
-        </p:nvSpPr>
-        <p:spPr>
-          <a:xfrm>
-            <a:off x="9120911" y="2286000"/>
-            <a:ext cx="2476424" cy="2743200"/>
-          </a:xfrm>
-          <a:prstGeom prst="roundRect">
-            <a:avLst>
-              <a:gd name="adj" fmla="val 4431"/>
-            </a:avLst>
-          </a:prstGeom>
-          <a:solidFill>
-            <a:srgbClr val="2C2552"/>
-          </a:solidFill>
-          <a:ln/>
-        </p:spPr>
-      </p:sp>
-      <p:sp>
-        <p:nvSpPr>
-          <p:cNvPr id="17" name="Text 15"/>
-          <p:cNvSpPr/>
-          <p:nvPr/>
-        </p:nvSpPr>
-        <p:spPr>
-          <a:xfrm>
-            <a:off x="9120911" y="2560320"/>
-            <a:ext cx="2476424" cy="822960"/>
-          </a:xfrm>
-          <a:prstGeom prst="rect">
-            <a:avLst/>
-          </a:prstGeom>
-          <a:noFill/>
-          <a:ln/>
-        </p:spPr>
-        <p:txBody>
-          <a:bodyPr wrap="square" rtlCol="0" anchor="t"/>
-          <a:lstStyle/>
-          <a:p>
-            <a:pPr algn="ctr" indent="0" marL="0">
-              <a:buNone/>
-            </a:pPr>
-            <a:r>
-              <a:rPr lang="en-US" sz="4000" dirty="0">
-                <a:solidFill>
-                  <a:srgbClr val="D9D4F2"/>
-                </a:solidFill>
-                <a:latin typeface="Calibri" pitchFamily="34" charset="0"/>
-                <a:ea typeface="Calibri" pitchFamily="34" charset="-122"/>
-                <a:cs typeface="Calibri" pitchFamily="34" charset="-120"/>
-              </a:rPr>
-              <a:t>🎮</a:t>
-            </a:r>
-            <a:endParaRPr lang="en-US" sz="4000" dirty="0"/>
-          </a:p>
-        </p:txBody>
-      </p:sp>
-      <p:sp>
-        <p:nvSpPr>
-          <p:cNvPr id="18" name="Text 16"/>
-          <p:cNvSpPr/>
-          <p:nvPr/>
-        </p:nvSpPr>
-        <p:spPr>
-          <a:xfrm>
-            <a:off x="9258071" y="3520440"/>
-            <a:ext cx="2202104" cy="731520"/>
-          </a:xfrm>
-          <a:prstGeom prst="rect">
-            <a:avLst/>
-          </a:prstGeom>
-          <a:noFill/>
-          <a:ln/>
-        </p:spPr>
-        <p:txBody>
-          <a:bodyPr wrap="square" rtlCol="0" anchor="t"/>
-          <a:lstStyle/>
-          <a:p>
-            <a:pPr algn="ctr" indent="0" marL="0">
-              <a:lnSpc>
-                <a:spcPct val="100000"/>
-              </a:lnSpc>
-              <a:buNone/>
-            </a:pPr>
-            <a:r>
-              <a:rPr lang="en-US" sz="1600" b="1" dirty="0">
-                <a:solidFill>
-                  <a:srgbClr val="FFFFFF"/>
-                </a:solidFill>
-                <a:latin typeface="Calibri" pitchFamily="34" charset="0"/>
-                <a:ea typeface="Calibri" pitchFamily="34" charset="-122"/>
-                <a:cs typeface="Calibri" pitchFamily="34" charset="-120"/>
-              </a:rPr>
-              <a:t>Игровая статистика</a:t>
-            </a:r>
-            <a:endParaRPr lang="en-US" sz="1600" dirty="0"/>
-          </a:p>
-        </p:txBody>
-      </p:sp>
-      <p:sp>
-        <p:nvSpPr>
-          <p:cNvPr id="19" name="Text 17"/>
-          <p:cNvSpPr/>
-          <p:nvPr/>
-        </p:nvSpPr>
-        <p:spPr>
-          <a:xfrm>
-            <a:off x="9258071" y="4297680"/>
-            <a:ext cx="2202104" cy="548640"/>
-          </a:xfrm>
-          <a:prstGeom prst="rect">
-            <a:avLst/>
-          </a:prstGeom>
-          <a:noFill/>
-          <a:ln/>
-        </p:spPr>
-        <p:txBody>
-          <a:bodyPr wrap="square" rtlCol="0" anchor="t"/>
-          <a:lstStyle/>
-          <a:p>
-            <a:pPr algn="ctr" indent="0" marL="0">
-              <a:buNone/>
-            </a:pPr>
-            <a:r>
-              <a:rPr lang="en-US" sz="1300" dirty="0">
-                <a:solidFill>
-                  <a:srgbClr val="9E96C8"/>
-                </a:solidFill>
-                <a:latin typeface="Calibri" pitchFamily="34" charset="0"/>
-                <a:ea typeface="Calibri" pitchFamily="34" charset="-122"/>
-                <a:cs typeface="Calibri" pitchFamily="34" charset="-120"/>
-              </a:rPr>
-              <a:t>анализ и прогноз</a:t>
-            </a:r>
-            <a:endParaRPr lang="en-US" sz="1300" dirty="0"/>
-          </a:p>
-        </p:txBody>
-      </p:sp>
-      <p:sp>
-        <p:nvSpPr>
-          <p:cNvPr id="20" name="Text 18"/>
-          <p:cNvSpPr/>
-          <p:nvPr/>
-        </p:nvSpPr>
-        <p:spPr>
-          <a:xfrm>
-            <a:off x="594360" y="5303520"/>
-            <a:ext cx="11002975" cy="457200"/>
-          </a:xfrm>
-          <a:prstGeom prst="rect">
-            <a:avLst/>
-          </a:prstGeom>
-          <a:noFill/>
-          <a:ln/>
-        </p:spPr>
-        <p:txBody>
-          <a:bodyPr wrap="square" rtlCol="0" anchor="t"/>
-          <a:lstStyle/>
-          <a:p>
-            <a:pPr algn="ctr" indent="0" marL="0">
-              <a:buNone/>
-            </a:pPr>
-            <a:r>
-              <a:rPr lang="en-US" sz="1700" i="1" dirty="0">
-                <a:solidFill>
-                  <a:srgbClr val="2DD4BF"/>
-                </a:solidFill>
-                <a:latin typeface="Calibri" pitchFamily="34" charset="0"/>
-                <a:ea typeface="Calibri" pitchFamily="34" charset="-122"/>
-                <a:cs typeface="Calibri" pitchFamily="34" charset="-120"/>
-              </a:rPr>
-              <a:t>Не сложное — а понятное, честное и работающее.</a:t>
-            </a:r>
-            <a:endParaRPr lang="en-US" sz="1700" dirty="0"/>
-          </a:p>
-        </p:txBody>
-      </p:sp>
-      <p:sp>
-        <p:nvSpPr>
-          <p:cNvPr id="21" name="Text 19"/>
-          <p:cNvSpPr/>
-          <p:nvPr/>
-        </p:nvSpPr>
-        <p:spPr>
-          <a:xfrm>
-            <a:off x="10271455" y="6355080"/>
-            <a:ext cx="1371600" cy="274320"/>
-          </a:xfrm>
-          <a:prstGeom prst="rect">
-            <a:avLst/>
-          </a:prstGeom>
-          <a:noFill/>
-          <a:ln/>
-        </p:spPr>
-        <p:txBody>
-          <a:bodyPr wrap="square" rtlCol="0" anchor="t"/>
+              <a:t>Запиши 3 идеи: что было бы круто уметь предсказывать или определять автоматически?</a:t>
+            </a:r>
+            <a:endParaRPr lang="en-US" sz="2000" dirty="0"/>
+          </a:p>
+        </p:txBody>
+      </p:sp>
+      <p:sp>
+        <p:nvSpPr>
+          <p:cNvPr id="8" name="Text 5"/>
+          <p:cNvSpPr/>
+          <p:nvPr/>
+        </p:nvSpPr>
+        <p:spPr>
+          <a:xfrm>
+            <a:off x="10698480" y="6309360"/>
+            <a:ext cx="1188720" cy="274320"/>
+          </a:xfrm>
+          <a:prstGeom prst="rect">
+            <a:avLst/>
+          </a:prstGeom>
+          <a:noFill/>
+          <a:ln/>
+        </p:spPr>
+        <p:txBody>
+          <a:bodyPr wrap="square" rtlCol="0" anchor="ctr"/>
           <a:lstStyle/>
           <a:p>
             <a:pPr algn="r" indent="0" marL="0">
@@ -2294,24 +2018,24 @@
         </p:nvSpPr>
         <p:spPr>
           <a:xfrm>
-            <a:off x="594360" y="457200"/>
-            <a:ext cx="11002975" cy="320040"/>
-          </a:xfrm>
-          <a:prstGeom prst="rect">
-            <a:avLst/>
-          </a:prstGeom>
-          <a:noFill/>
-          <a:ln/>
-        </p:spPr>
-        <p:txBody>
-          <a:bodyPr wrap="square" rtlCol="0" anchor="t"/>
+            <a:off x="640080" y="502920"/>
+            <a:ext cx="10058400" cy="365760"/>
+          </a:xfrm>
+          <a:prstGeom prst="rect">
+            <a:avLst/>
+          </a:prstGeom>
+          <a:noFill/>
+          <a:ln/>
+        </p:spPr>
+        <p:txBody>
+          <a:bodyPr wrap="square" rtlCol="0" anchor="ctr"/>
           <a:lstStyle/>
           <a:p>
             <a:pPr indent="0" marL="0">
               <a:buNone/>
             </a:pPr>
             <a:r>
-              <a:rPr lang="en-US" sz="1300" b="1" spc="200" kern="0" dirty="0">
+              <a:rPr lang="en-US" sz="1300" b="1" spc="300" kern="0" dirty="0">
                 <a:solidFill>
                   <a:srgbClr val="27D3EE"/>
                 </a:solidFill>
@@ -2319,7 +2043,7 @@
                 <a:ea typeface="Calibri" pitchFamily="34" charset="-122"/>
                 <a:cs typeface="Calibri" pitchFamily="34" charset="-120"/>
               </a:rPr>
-              <a:t>КАК ВЫБРАТЬ</a:t>
+              <a:t>0–10 МИН</a:t>
             </a:r>
             <a:endParaRPr lang="en-US" sz="1300" dirty="0"/>
           </a:p>
@@ -2333,24 +2057,24 @@
         </p:nvSpPr>
         <p:spPr>
           <a:xfrm>
-            <a:off x="594360" y="749808"/>
-            <a:ext cx="11002975" cy="822960"/>
-          </a:xfrm>
-          <a:prstGeom prst="rect">
-            <a:avLst/>
-          </a:prstGeom>
-          <a:noFill/>
-          <a:ln/>
-        </p:spPr>
-        <p:txBody>
-          <a:bodyPr wrap="square" rtlCol="0" anchor="t"/>
+            <a:off x="640080" y="868680"/>
+            <a:ext cx="10058400" cy="640080"/>
+          </a:xfrm>
+          <a:prstGeom prst="rect">
+            <a:avLst/>
+          </a:prstGeom>
+          <a:noFill/>
+          <a:ln/>
+        </p:spPr>
+        <p:txBody>
+          <a:bodyPr wrap="square" rtlCol="0" anchor="ctr"/>
           <a:lstStyle/>
           <a:p>
             <a:pPr indent="0" marL="0">
               <a:buNone/>
             </a:pPr>
             <a:r>
-              <a:rPr lang="en-US" sz="3000" b="1" dirty="0">
+              <a:rPr lang="en-US" sz="3200" b="1" dirty="0">
                 <a:solidFill>
                   <a:srgbClr val="FFFFFF"/>
                 </a:solidFill>
@@ -2358,9 +2082,9 @@
                 <a:ea typeface="Calibri" pitchFamily="34" charset="-122"/>
                 <a:cs typeface="Calibri" pitchFamily="34" charset="-120"/>
               </a:rPr>
-              <a:t>Признаки реализуемой задачи</a:t>
-            </a:r>
-            <a:endParaRPr lang="en-US" sz="3000" dirty="0"/>
+              <a:t>Каким бывает проект</a:t>
+            </a:r>
+            <a:endParaRPr lang="en-US" sz="3200" dirty="0"/>
           </a:p>
         </p:txBody>
       </p:sp>
@@ -2372,12 +2096,12 @@
         </p:nvSpPr>
         <p:spPr>
           <a:xfrm>
-            <a:off x="594360" y="2286000"/>
-            <a:ext cx="2476424" cy="2743200"/>
+            <a:off x="640080" y="1828800"/>
+            <a:ext cx="2606040" cy="3108960"/>
           </a:xfrm>
           <a:prstGeom prst="roundRect">
             <a:avLst>
-              <a:gd name="adj" fmla="val 4431"/>
+              <a:gd name="adj" fmla="val 4211"/>
             </a:avLst>
           </a:prstGeom>
           <a:solidFill>
@@ -2394,28 +2118,91 @@
         </p:nvSpPr>
         <p:spPr>
           <a:xfrm>
-            <a:off x="1466812" y="2606040"/>
-            <a:ext cx="731520" cy="731520"/>
+            <a:off x="1394460" y="2148840"/>
+            <a:ext cx="1097280" cy="1097280"/>
           </a:xfrm>
           <a:prstGeom prst="ellipse">
             <a:avLst/>
           </a:prstGeom>
           <a:solidFill>
-            <a:srgbClr val="5B4FC4"/>
-          </a:solidFill>
-          <a:ln/>
-        </p:spPr>
-      </p:sp>
-      <p:sp>
-        <p:nvSpPr>
-          <p:cNvPr id="6" name="Text 4"/>
-          <p:cNvSpPr/>
-          <p:nvPr/>
-        </p:nvSpPr>
-        <p:spPr>
-          <a:xfrm>
-            <a:off x="1466812" y="2606040"/>
-            <a:ext cx="731520" cy="731520"/>
+            <a:srgbClr val="2C2552"/>
+          </a:solidFill>
+          <a:ln/>
+        </p:spPr>
+      </p:sp>
+      <p:pic>
+        <p:nvPicPr>
+          <p:cNvPr id="6" name="Image 0" descr="preencoded.png">    </p:cNvPr>
+          <p:cNvPicPr>
+            <a:picLocks noChangeAspect="1"/>
+          </p:cNvPicPr>
+          <p:nvPr/>
+        </p:nvPicPr>
+        <p:blipFill>
+          <a:blip r:embed="rId1"/>
+          <a:stretch>
+            <a:fillRect/>
+          </a:stretch>
+        </p:blipFill>
+        <p:spPr>
+          <a:xfrm>
+            <a:off x="1595628" y="2350008"/>
+            <a:ext cx="694944" cy="694944"/>
+          </a:xfrm>
+          <a:prstGeom prst="rect">
+            <a:avLst/>
+          </a:prstGeom>
+        </p:spPr>
+      </p:pic>
+      <p:sp>
+        <p:nvSpPr>
+          <p:cNvPr id="7" name="Text 4"/>
+          <p:cNvSpPr/>
+          <p:nvPr/>
+        </p:nvSpPr>
+        <p:spPr>
+          <a:xfrm>
+            <a:off x="777240" y="3520440"/>
+            <a:ext cx="2331720" cy="731520"/>
+          </a:xfrm>
+          <a:prstGeom prst="rect">
+            <a:avLst/>
+          </a:prstGeom>
+          <a:noFill/>
+          <a:ln/>
+        </p:spPr>
+        <p:txBody>
+          <a:bodyPr wrap="square" rtlCol="0" anchor="t"/>
+          <a:lstStyle/>
+          <a:p>
+            <a:pPr algn="ctr" indent="0" marL="0">
+              <a:buNone/>
+            </a:pPr>
+            <a:r>
+              <a:rPr lang="en-US" sz="1800" b="1" dirty="0">
+                <a:solidFill>
+                  <a:srgbClr val="FFFFFF"/>
+                </a:solidFill>
+                <a:latin typeface="Calibri" pitchFamily="34" charset="0"/>
+                <a:ea typeface="Calibri" pitchFamily="34" charset="-122"/>
+                <a:cs typeface="Calibri" pitchFamily="34" charset="-120"/>
+              </a:rPr>
+              <a:t>Детектор настроения</a:t>
+            </a:r>
+            <a:endParaRPr lang="en-US" sz="1800" dirty="0"/>
+          </a:p>
+        </p:txBody>
+      </p:sp>
+      <p:sp>
+        <p:nvSpPr>
+          <p:cNvPr id="8" name="Text 5"/>
+          <p:cNvSpPr/>
+          <p:nvPr/>
+        </p:nvSpPr>
+        <p:spPr>
+          <a:xfrm>
+            <a:off x="777240" y="4251960"/>
+            <a:ext cx="2331720" cy="457200"/>
           </a:xfrm>
           <a:prstGeom prst="rect">
             <a:avLst/>
@@ -2431,135 +2218,34 @@
               <a:buNone/>
             </a:pPr>
             <a:r>
-              <a:rPr lang="en-US" sz="2400" b="1" dirty="0">
-                <a:solidFill>
-                  <a:srgbClr val="FFFFFF"/>
-                </a:solidFill>
-                <a:latin typeface="Calibri" pitchFamily="34" charset="0"/>
-                <a:ea typeface="Calibri" pitchFamily="34" charset="-122"/>
-                <a:cs typeface="Calibri" pitchFamily="34" charset="-120"/>
-              </a:rPr>
-              <a:t>1</a:t>
-            </a:r>
-            <a:endParaRPr lang="en-US" sz="2400" dirty="0"/>
-          </a:p>
-        </p:txBody>
-      </p:sp>
-      <p:sp>
-        <p:nvSpPr>
-          <p:cNvPr id="7" name="Text 5"/>
-          <p:cNvSpPr/>
-          <p:nvPr/>
-        </p:nvSpPr>
-        <p:spPr>
-          <a:xfrm>
-            <a:off x="685800" y="3566160"/>
-            <a:ext cx="2293544" cy="457200"/>
-          </a:xfrm>
-          <a:prstGeom prst="rect">
-            <a:avLst/>
-          </a:prstGeom>
-          <a:noFill/>
-          <a:ln/>
-        </p:spPr>
-        <p:txBody>
-          <a:bodyPr wrap="square" rtlCol="0" anchor="t"/>
-          <a:lstStyle/>
-          <a:p>
-            <a:pPr algn="ctr" indent="0" marL="0">
-              <a:buNone/>
-            </a:pPr>
-            <a:r>
-              <a:rPr lang="en-US" sz="1700" b="1" dirty="0">
-                <a:solidFill>
-                  <a:srgbClr val="FFFFFF"/>
-                </a:solidFill>
-                <a:latin typeface="Calibri" pitchFamily="34" charset="0"/>
-                <a:ea typeface="Calibri" pitchFamily="34" charset="-122"/>
-                <a:cs typeface="Calibri" pitchFamily="34" charset="-120"/>
-              </a:rPr>
-              <a:t>Задача</a:t>
-            </a:r>
-            <a:endParaRPr lang="en-US" sz="1700" dirty="0"/>
-          </a:p>
-        </p:txBody>
-      </p:sp>
-      <p:sp>
-        <p:nvSpPr>
-          <p:cNvPr id="8" name="Text 6"/>
-          <p:cNvSpPr/>
-          <p:nvPr/>
-        </p:nvSpPr>
-        <p:spPr>
-          <a:xfrm>
-            <a:off x="731520" y="4069080"/>
-            <a:ext cx="2202104" cy="914400"/>
-          </a:xfrm>
-          <a:prstGeom prst="rect">
-            <a:avLst/>
-          </a:prstGeom>
-          <a:noFill/>
-          <a:ln/>
-        </p:spPr>
-        <p:txBody>
-          <a:bodyPr wrap="square" rtlCol="0" anchor="t"/>
-          <a:lstStyle/>
-          <a:p>
-            <a:pPr algn="ctr" indent="0" marL="0">
-              <a:lnSpc>
-                <a:spcPct val="110000"/>
-              </a:lnSpc>
-              <a:buNone/>
-            </a:pPr>
-            <a:r>
-              <a:rPr lang="en-US" sz="1300" dirty="0">
-                <a:solidFill>
-                  <a:srgbClr val="D9D4F2"/>
-                </a:solidFill>
-                <a:latin typeface="Calibri" pitchFamily="34" charset="0"/>
-                <a:ea typeface="Calibri" pitchFamily="34" charset="-122"/>
-                <a:cs typeface="Calibri" pitchFamily="34" charset="-120"/>
-              </a:rPr>
-              <a:t>классификация</a:t>
-            </a:r>
-            <a:endParaRPr lang="en-US" sz="1300" dirty="0"/>
-          </a:p>
-          <a:p>
-            <a:pPr algn="ctr" indent="0" marL="0">
-              <a:lnSpc>
-                <a:spcPct val="110000"/>
-              </a:lnSpc>
-              <a:buNone/>
-            </a:pPr>
-            <a:r>
-              <a:rPr lang="en-US" sz="1300" dirty="0">
-                <a:solidFill>
-                  <a:srgbClr val="D9D4F2"/>
-                </a:solidFill>
-                <a:latin typeface="Calibri" pitchFamily="34" charset="0"/>
-                <a:ea typeface="Calibri" pitchFamily="34" charset="-122"/>
-                <a:cs typeface="Calibri" pitchFamily="34" charset="-120"/>
-              </a:rPr>
-              <a:t>или регрессия</a:t>
-            </a:r>
-            <a:endParaRPr lang="en-US" sz="1300" dirty="0"/>
-          </a:p>
-        </p:txBody>
-      </p:sp>
-      <p:sp>
-        <p:nvSpPr>
-          <p:cNvPr id="9" name="Shape 7"/>
-          <p:cNvSpPr/>
-          <p:nvPr/>
-        </p:nvSpPr>
-        <p:spPr>
-          <a:xfrm>
-            <a:off x="3436544" y="2286000"/>
-            <a:ext cx="2476424" cy="2743200"/>
+              <a:rPr lang="en-US" sz="1400" dirty="0">
+                <a:solidFill>
+                  <a:srgbClr val="9E96C8"/>
+                </a:solidFill>
+                <a:latin typeface="Calibri" pitchFamily="34" charset="0"/>
+                <a:ea typeface="Calibri" pitchFamily="34" charset="-122"/>
+                <a:cs typeface="Calibri" pitchFamily="34" charset="-120"/>
+              </a:rPr>
+              <a:t>по тексту</a:t>
+            </a:r>
+            <a:endParaRPr lang="en-US" sz="1400" dirty="0"/>
+          </a:p>
+        </p:txBody>
+      </p:sp>
+      <p:sp>
+        <p:nvSpPr>
+          <p:cNvPr id="9" name="Shape 6"/>
+          <p:cNvSpPr/>
+          <p:nvPr/>
+        </p:nvSpPr>
+        <p:spPr>
+          <a:xfrm>
+            <a:off x="3502152" y="1828800"/>
+            <a:ext cx="2606040" cy="3108960"/>
           </a:xfrm>
           <a:prstGeom prst="roundRect">
             <a:avLst>
-              <a:gd name="adj" fmla="val 4431"/>
+              <a:gd name="adj" fmla="val 4211"/>
             </a:avLst>
           </a:prstGeom>
           <a:solidFill>
@@ -2570,34 +2256,97 @@
       </p:sp>
       <p:sp>
         <p:nvSpPr>
-          <p:cNvPr id="10" name="Shape 8"/>
-          <p:cNvSpPr/>
-          <p:nvPr/>
-        </p:nvSpPr>
-        <p:spPr>
-          <a:xfrm>
-            <a:off x="4308996" y="2606040"/>
-            <a:ext cx="731520" cy="731520"/>
+          <p:cNvPr id="10" name="Shape 7"/>
+          <p:cNvSpPr/>
+          <p:nvPr/>
+        </p:nvSpPr>
+        <p:spPr>
+          <a:xfrm>
+            <a:off x="4256532" y="2148840"/>
+            <a:ext cx="1097280" cy="1097280"/>
           </a:xfrm>
           <a:prstGeom prst="ellipse">
             <a:avLst/>
           </a:prstGeom>
           <a:solidFill>
-            <a:srgbClr val="8B7DF5"/>
-          </a:solidFill>
-          <a:ln/>
-        </p:spPr>
-      </p:sp>
-      <p:sp>
-        <p:nvSpPr>
-          <p:cNvPr id="11" name="Text 9"/>
-          <p:cNvSpPr/>
-          <p:nvPr/>
-        </p:nvSpPr>
-        <p:spPr>
-          <a:xfrm>
-            <a:off x="4308996" y="2606040"/>
-            <a:ext cx="731520" cy="731520"/>
+            <a:srgbClr val="2C2552"/>
+          </a:solidFill>
+          <a:ln/>
+        </p:spPr>
+      </p:sp>
+      <p:pic>
+        <p:nvPicPr>
+          <p:cNvPr id="11" name="Image 1" descr="preencoded.png">    </p:cNvPr>
+          <p:cNvPicPr>
+            <a:picLocks noChangeAspect="1"/>
+          </p:cNvPicPr>
+          <p:nvPr/>
+        </p:nvPicPr>
+        <p:blipFill>
+          <a:blip r:embed="rId2"/>
+          <a:stretch>
+            <a:fillRect/>
+          </a:stretch>
+        </p:blipFill>
+        <p:spPr>
+          <a:xfrm>
+            <a:off x="4457700" y="2350008"/>
+            <a:ext cx="694944" cy="694944"/>
+          </a:xfrm>
+          <a:prstGeom prst="rect">
+            <a:avLst/>
+          </a:prstGeom>
+        </p:spPr>
+      </p:pic>
+      <p:sp>
+        <p:nvSpPr>
+          <p:cNvPr id="12" name="Text 8"/>
+          <p:cNvSpPr/>
+          <p:nvPr/>
+        </p:nvSpPr>
+        <p:spPr>
+          <a:xfrm>
+            <a:off x="3639312" y="3520440"/>
+            <a:ext cx="2331720" cy="731520"/>
+          </a:xfrm>
+          <a:prstGeom prst="rect">
+            <a:avLst/>
+          </a:prstGeom>
+          <a:noFill/>
+          <a:ln/>
+        </p:spPr>
+        <p:txBody>
+          <a:bodyPr wrap="square" rtlCol="0" anchor="t"/>
+          <a:lstStyle/>
+          <a:p>
+            <a:pPr algn="ctr" indent="0" marL="0">
+              <a:buNone/>
+            </a:pPr>
+            <a:r>
+              <a:rPr lang="en-US" sz="1800" b="1" dirty="0">
+                <a:solidFill>
+                  <a:srgbClr val="FFFFFF"/>
+                </a:solidFill>
+                <a:latin typeface="Calibri" pitchFamily="34" charset="0"/>
+                <a:ea typeface="Calibri" pitchFamily="34" charset="-122"/>
+                <a:cs typeface="Calibri" pitchFamily="34" charset="-120"/>
+              </a:rPr>
+              <a:t>Предсказание оценки</a:t>
+            </a:r>
+            <a:endParaRPr lang="en-US" sz="1800" dirty="0"/>
+          </a:p>
+        </p:txBody>
+      </p:sp>
+      <p:sp>
+        <p:nvSpPr>
+          <p:cNvPr id="13" name="Text 9"/>
+          <p:cNvSpPr/>
+          <p:nvPr/>
+        </p:nvSpPr>
+        <p:spPr>
+          <a:xfrm>
+            <a:off x="3639312" y="4251960"/>
+            <a:ext cx="2331720" cy="457200"/>
           </a:xfrm>
           <a:prstGeom prst="rect">
             <a:avLst/>
@@ -2613,135 +2362,34 @@
               <a:buNone/>
             </a:pPr>
             <a:r>
-              <a:rPr lang="en-US" sz="2400" b="1" dirty="0">
-                <a:solidFill>
-                  <a:srgbClr val="FFFFFF"/>
-                </a:solidFill>
-                <a:latin typeface="Calibri" pitchFamily="34" charset="0"/>
-                <a:ea typeface="Calibri" pitchFamily="34" charset="-122"/>
-                <a:cs typeface="Calibri" pitchFamily="34" charset="-120"/>
-              </a:rPr>
-              <a:t>2</a:t>
-            </a:r>
-            <a:endParaRPr lang="en-US" sz="2400" dirty="0"/>
-          </a:p>
-        </p:txBody>
-      </p:sp>
-      <p:sp>
-        <p:nvSpPr>
-          <p:cNvPr id="12" name="Text 10"/>
-          <p:cNvSpPr/>
-          <p:nvPr/>
-        </p:nvSpPr>
-        <p:spPr>
-          <a:xfrm>
-            <a:off x="3527984" y="3566160"/>
-            <a:ext cx="2293544" cy="457200"/>
-          </a:xfrm>
-          <a:prstGeom prst="rect">
-            <a:avLst/>
-          </a:prstGeom>
-          <a:noFill/>
-          <a:ln/>
-        </p:spPr>
-        <p:txBody>
-          <a:bodyPr wrap="square" rtlCol="0" anchor="t"/>
-          <a:lstStyle/>
-          <a:p>
-            <a:pPr algn="ctr" indent="0" marL="0">
-              <a:buNone/>
-            </a:pPr>
-            <a:r>
-              <a:rPr lang="en-US" sz="1700" b="1" dirty="0">
-                <a:solidFill>
-                  <a:srgbClr val="FFFFFF"/>
-                </a:solidFill>
-                <a:latin typeface="Calibri" pitchFamily="34" charset="0"/>
-                <a:ea typeface="Calibri" pitchFamily="34" charset="-122"/>
-                <a:cs typeface="Calibri" pitchFamily="34" charset="-120"/>
-              </a:rPr>
-              <a:t>Данные</a:t>
-            </a:r>
-            <a:endParaRPr lang="en-US" sz="1700" dirty="0"/>
-          </a:p>
-        </p:txBody>
-      </p:sp>
-      <p:sp>
-        <p:nvSpPr>
-          <p:cNvPr id="13" name="Text 11"/>
-          <p:cNvSpPr/>
-          <p:nvPr/>
-        </p:nvSpPr>
-        <p:spPr>
-          <a:xfrm>
-            <a:off x="3573704" y="4069080"/>
-            <a:ext cx="2202104" cy="914400"/>
-          </a:xfrm>
-          <a:prstGeom prst="rect">
-            <a:avLst/>
-          </a:prstGeom>
-          <a:noFill/>
-          <a:ln/>
-        </p:spPr>
-        <p:txBody>
-          <a:bodyPr wrap="square" rtlCol="0" anchor="t"/>
-          <a:lstStyle/>
-          <a:p>
-            <a:pPr algn="ctr" indent="0" marL="0">
-              <a:lnSpc>
-                <a:spcPct val="110000"/>
-              </a:lnSpc>
-              <a:buNone/>
-            </a:pPr>
-            <a:r>
-              <a:rPr lang="en-US" sz="1300" dirty="0">
-                <a:solidFill>
-                  <a:srgbClr val="D9D4F2"/>
-                </a:solidFill>
-                <a:latin typeface="Calibri" pitchFamily="34" charset="0"/>
-                <a:ea typeface="Calibri" pitchFamily="34" charset="-122"/>
-                <a:cs typeface="Calibri" pitchFamily="34" charset="-120"/>
-              </a:rPr>
-              <a:t>реально достать,</a:t>
-            </a:r>
-            <a:endParaRPr lang="en-US" sz="1300" dirty="0"/>
-          </a:p>
-          <a:p>
-            <a:pPr algn="ctr" indent="0" marL="0">
-              <a:lnSpc>
-                <a:spcPct val="110000"/>
-              </a:lnSpc>
-              <a:buNone/>
-            </a:pPr>
-            <a:r>
-              <a:rPr lang="en-US" sz="1300" dirty="0">
-                <a:solidFill>
-                  <a:srgbClr val="D9D4F2"/>
-                </a:solidFill>
-                <a:latin typeface="Calibri" pitchFamily="34" charset="0"/>
-                <a:ea typeface="Calibri" pitchFamily="34" charset="-122"/>
-                <a:cs typeface="Calibri" pitchFamily="34" charset="-120"/>
-              </a:rPr>
-              <a:t>достаточно</a:t>
-            </a:r>
-            <a:endParaRPr lang="en-US" sz="1300" dirty="0"/>
-          </a:p>
-        </p:txBody>
-      </p:sp>
-      <p:sp>
-        <p:nvSpPr>
-          <p:cNvPr id="14" name="Shape 12"/>
-          <p:cNvSpPr/>
-          <p:nvPr/>
-        </p:nvSpPr>
-        <p:spPr>
-          <a:xfrm>
-            <a:off x="6278728" y="2286000"/>
-            <a:ext cx="2476424" cy="2743200"/>
+              <a:rPr lang="en-US" sz="1400" dirty="0">
+                <a:solidFill>
+                  <a:srgbClr val="9E96C8"/>
+                </a:solidFill>
+                <a:latin typeface="Calibri" pitchFamily="34" charset="0"/>
+                <a:ea typeface="Calibri" pitchFamily="34" charset="-122"/>
+                <a:cs typeface="Calibri" pitchFamily="34" charset="-120"/>
+              </a:rPr>
+              <a:t>по часам учёбы</a:t>
+            </a:r>
+            <a:endParaRPr lang="en-US" sz="1400" dirty="0"/>
+          </a:p>
+        </p:txBody>
+      </p:sp>
+      <p:sp>
+        <p:nvSpPr>
+          <p:cNvPr id="14" name="Shape 10"/>
+          <p:cNvSpPr/>
+          <p:nvPr/>
+        </p:nvSpPr>
+        <p:spPr>
+          <a:xfrm>
+            <a:off x="6364224" y="1828800"/>
+            <a:ext cx="2606040" cy="3108960"/>
           </a:xfrm>
           <a:prstGeom prst="roundRect">
             <a:avLst>
-              <a:gd name="adj" fmla="val 4431"/>
+              <a:gd name="adj" fmla="val 4211"/>
             </a:avLst>
           </a:prstGeom>
           <a:solidFill>
@@ -2752,34 +2400,97 @@
       </p:sp>
       <p:sp>
         <p:nvSpPr>
-          <p:cNvPr id="15" name="Shape 13"/>
-          <p:cNvSpPr/>
-          <p:nvPr/>
-        </p:nvSpPr>
-        <p:spPr>
-          <a:xfrm>
-            <a:off x="7151179" y="2606040"/>
-            <a:ext cx="731520" cy="731520"/>
+          <p:cNvPr id="15" name="Shape 11"/>
+          <p:cNvSpPr/>
+          <p:nvPr/>
+        </p:nvSpPr>
+        <p:spPr>
+          <a:xfrm>
+            <a:off x="7118604" y="2148840"/>
+            <a:ext cx="1097280" cy="1097280"/>
           </a:xfrm>
           <a:prstGeom prst="ellipse">
             <a:avLst/>
           </a:prstGeom>
           <a:solidFill>
-            <a:srgbClr val="27D3EE"/>
-          </a:solidFill>
-          <a:ln/>
-        </p:spPr>
-      </p:sp>
-      <p:sp>
-        <p:nvSpPr>
-          <p:cNvPr id="16" name="Text 14"/>
-          <p:cNvSpPr/>
-          <p:nvPr/>
-        </p:nvSpPr>
-        <p:spPr>
-          <a:xfrm>
-            <a:off x="7151179" y="2606040"/>
-            <a:ext cx="731520" cy="731520"/>
+            <a:srgbClr val="2C2552"/>
+          </a:solidFill>
+          <a:ln/>
+        </p:spPr>
+      </p:sp>
+      <p:pic>
+        <p:nvPicPr>
+          <p:cNvPr id="16" name="Image 2" descr="preencoded.png">    </p:cNvPr>
+          <p:cNvPicPr>
+            <a:picLocks noChangeAspect="1"/>
+          </p:cNvPicPr>
+          <p:nvPr/>
+        </p:nvPicPr>
+        <p:blipFill>
+          <a:blip r:embed="rId3"/>
+          <a:stretch>
+            <a:fillRect/>
+          </a:stretch>
+        </p:blipFill>
+        <p:spPr>
+          <a:xfrm>
+            <a:off x="7319772" y="2350008"/>
+            <a:ext cx="694944" cy="694944"/>
+          </a:xfrm>
+          <a:prstGeom prst="rect">
+            <a:avLst/>
+          </a:prstGeom>
+        </p:spPr>
+      </p:pic>
+      <p:sp>
+        <p:nvSpPr>
+          <p:cNvPr id="17" name="Text 12"/>
+          <p:cNvSpPr/>
+          <p:nvPr/>
+        </p:nvSpPr>
+        <p:spPr>
+          <a:xfrm>
+            <a:off x="6501384" y="3520440"/>
+            <a:ext cx="2331720" cy="731520"/>
+          </a:xfrm>
+          <a:prstGeom prst="rect">
+            <a:avLst/>
+          </a:prstGeom>
+          <a:noFill/>
+          <a:ln/>
+        </p:spPr>
+        <p:txBody>
+          <a:bodyPr wrap="square" rtlCol="0" anchor="t"/>
+          <a:lstStyle/>
+          <a:p>
+            <a:pPr algn="ctr" indent="0" marL="0">
+              <a:buNone/>
+            </a:pPr>
+            <a:r>
+              <a:rPr lang="en-US" sz="1800" b="1" dirty="0">
+                <a:solidFill>
+                  <a:srgbClr val="FFFFFF"/>
+                </a:solidFill>
+                <a:latin typeface="Calibri" pitchFamily="34" charset="0"/>
+                <a:ea typeface="Calibri" pitchFamily="34" charset="-122"/>
+                <a:cs typeface="Calibri" pitchFamily="34" charset="-120"/>
+              </a:rPr>
+              <a:t>Рекомендатор</a:t>
+            </a:r>
+            <a:endParaRPr lang="en-US" sz="1800" dirty="0"/>
+          </a:p>
+        </p:txBody>
+      </p:sp>
+      <p:sp>
+        <p:nvSpPr>
+          <p:cNvPr id="18" name="Text 13"/>
+          <p:cNvSpPr/>
+          <p:nvPr/>
+        </p:nvSpPr>
+        <p:spPr>
+          <a:xfrm>
+            <a:off x="6501384" y="4251960"/>
+            <a:ext cx="2331720" cy="457200"/>
           </a:xfrm>
           <a:prstGeom prst="rect">
             <a:avLst/>
@@ -2795,135 +2506,34 @@
               <a:buNone/>
             </a:pPr>
             <a:r>
-              <a:rPr lang="en-US" sz="2400" b="1" dirty="0">
-                <a:solidFill>
-                  <a:srgbClr val="17132E"/>
-                </a:solidFill>
-                <a:latin typeface="Calibri" pitchFamily="34" charset="0"/>
-                <a:ea typeface="Calibri" pitchFamily="34" charset="-122"/>
-                <a:cs typeface="Calibri" pitchFamily="34" charset="-120"/>
-              </a:rPr>
-              <a:t>3</a:t>
-            </a:r>
-            <a:endParaRPr lang="en-US" sz="2400" dirty="0"/>
-          </a:p>
-        </p:txBody>
-      </p:sp>
-      <p:sp>
-        <p:nvSpPr>
-          <p:cNvPr id="17" name="Text 15"/>
-          <p:cNvSpPr/>
-          <p:nvPr/>
-        </p:nvSpPr>
-        <p:spPr>
-          <a:xfrm>
-            <a:off x="6370168" y="3566160"/>
-            <a:ext cx="2293544" cy="457200"/>
-          </a:xfrm>
-          <a:prstGeom prst="rect">
-            <a:avLst/>
-          </a:prstGeom>
-          <a:noFill/>
-          <a:ln/>
-        </p:spPr>
-        <p:txBody>
-          <a:bodyPr wrap="square" rtlCol="0" anchor="t"/>
-          <a:lstStyle/>
-          <a:p>
-            <a:pPr algn="ctr" indent="0" marL="0">
-              <a:buNone/>
-            </a:pPr>
-            <a:r>
-              <a:rPr lang="en-US" sz="1700" b="1" dirty="0">
-                <a:solidFill>
-                  <a:srgbClr val="FFFFFF"/>
-                </a:solidFill>
-                <a:latin typeface="Calibri" pitchFamily="34" charset="0"/>
-                <a:ea typeface="Calibri" pitchFamily="34" charset="-122"/>
-                <a:cs typeface="Calibri" pitchFamily="34" charset="-120"/>
-              </a:rPr>
-              <a:t>Метрика</a:t>
-            </a:r>
-            <a:endParaRPr lang="en-US" sz="1700" dirty="0"/>
-          </a:p>
-        </p:txBody>
-      </p:sp>
-      <p:sp>
-        <p:nvSpPr>
-          <p:cNvPr id="18" name="Text 16"/>
-          <p:cNvSpPr/>
-          <p:nvPr/>
-        </p:nvSpPr>
-        <p:spPr>
-          <a:xfrm>
-            <a:off x="6415888" y="4069080"/>
-            <a:ext cx="2202104" cy="914400"/>
-          </a:xfrm>
-          <a:prstGeom prst="rect">
-            <a:avLst/>
-          </a:prstGeom>
-          <a:noFill/>
-          <a:ln/>
-        </p:spPr>
-        <p:txBody>
-          <a:bodyPr wrap="square" rtlCol="0" anchor="t"/>
-          <a:lstStyle/>
-          <a:p>
-            <a:pPr algn="ctr" indent="0" marL="0">
-              <a:lnSpc>
-                <a:spcPct val="110000"/>
-              </a:lnSpc>
-              <a:buNone/>
-            </a:pPr>
-            <a:r>
-              <a:rPr lang="en-US" sz="1300" dirty="0">
-                <a:solidFill>
-                  <a:srgbClr val="D9D4F2"/>
-                </a:solidFill>
-                <a:latin typeface="Calibri" pitchFamily="34" charset="0"/>
-                <a:ea typeface="Calibri" pitchFamily="34" charset="-122"/>
-                <a:cs typeface="Calibri" pitchFamily="34" charset="-120"/>
-              </a:rPr>
-              <a:t>успех можно</a:t>
-            </a:r>
-            <a:endParaRPr lang="en-US" sz="1300" dirty="0"/>
-          </a:p>
-          <a:p>
-            <a:pPr algn="ctr" indent="0" marL="0">
-              <a:lnSpc>
-                <a:spcPct val="110000"/>
-              </a:lnSpc>
-              <a:buNone/>
-            </a:pPr>
-            <a:r>
-              <a:rPr lang="en-US" sz="1300" dirty="0">
-                <a:solidFill>
-                  <a:srgbClr val="D9D4F2"/>
-                </a:solidFill>
-                <a:latin typeface="Calibri" pitchFamily="34" charset="0"/>
-                <a:ea typeface="Calibri" pitchFamily="34" charset="-122"/>
-                <a:cs typeface="Calibri" pitchFamily="34" charset="-120"/>
-              </a:rPr>
-              <a:t>измерить</a:t>
-            </a:r>
-            <a:endParaRPr lang="en-US" sz="1300" dirty="0"/>
-          </a:p>
-        </p:txBody>
-      </p:sp>
-      <p:sp>
-        <p:nvSpPr>
-          <p:cNvPr id="19" name="Shape 17"/>
-          <p:cNvSpPr/>
-          <p:nvPr/>
-        </p:nvSpPr>
-        <p:spPr>
-          <a:xfrm>
-            <a:off x="9120911" y="2286000"/>
-            <a:ext cx="2476424" cy="2743200"/>
+              <a:rPr lang="en-US" sz="1400" dirty="0">
+                <a:solidFill>
+                  <a:srgbClr val="9E96C8"/>
+                </a:solidFill>
+                <a:latin typeface="Calibri" pitchFamily="34" charset="0"/>
+                <a:ea typeface="Calibri" pitchFamily="34" charset="-122"/>
+                <a:cs typeface="Calibri" pitchFamily="34" charset="-120"/>
+              </a:rPr>
+              <a:t>фильмов / игр</a:t>
+            </a:r>
+            <a:endParaRPr lang="en-US" sz="1400" dirty="0"/>
+          </a:p>
+        </p:txBody>
+      </p:sp>
+      <p:sp>
+        <p:nvSpPr>
+          <p:cNvPr id="19" name="Shape 14"/>
+          <p:cNvSpPr/>
+          <p:nvPr/>
+        </p:nvSpPr>
+        <p:spPr>
+          <a:xfrm>
+            <a:off x="9226296" y="1828800"/>
+            <a:ext cx="2606040" cy="3108960"/>
           </a:xfrm>
           <a:prstGeom prst="roundRect">
             <a:avLst>
-              <a:gd name="adj" fmla="val 4431"/>
+              <a:gd name="adj" fmla="val 4211"/>
             </a:avLst>
           </a:prstGeom>
           <a:solidFill>
@@ -2934,34 +2544,97 @@
       </p:sp>
       <p:sp>
         <p:nvSpPr>
-          <p:cNvPr id="20" name="Shape 18"/>
-          <p:cNvSpPr/>
-          <p:nvPr/>
-        </p:nvSpPr>
-        <p:spPr>
-          <a:xfrm>
-            <a:off x="9993363" y="2606040"/>
-            <a:ext cx="731520" cy="731520"/>
+          <p:cNvPr id="20" name="Shape 15"/>
+          <p:cNvSpPr/>
+          <p:nvPr/>
+        </p:nvSpPr>
+        <p:spPr>
+          <a:xfrm>
+            <a:off x="9980676" y="2148840"/>
+            <a:ext cx="1097280" cy="1097280"/>
           </a:xfrm>
           <a:prstGeom prst="ellipse">
             <a:avLst/>
           </a:prstGeom>
           <a:solidFill>
-            <a:srgbClr val="2DD4BF"/>
-          </a:solidFill>
-          <a:ln/>
-        </p:spPr>
-      </p:sp>
-      <p:sp>
-        <p:nvSpPr>
-          <p:cNvPr id="21" name="Text 19"/>
-          <p:cNvSpPr/>
-          <p:nvPr/>
-        </p:nvSpPr>
-        <p:spPr>
-          <a:xfrm>
-            <a:off x="9993363" y="2606040"/>
-            <a:ext cx="731520" cy="731520"/>
+            <a:srgbClr val="2C2552"/>
+          </a:solidFill>
+          <a:ln/>
+        </p:spPr>
+      </p:sp>
+      <p:pic>
+        <p:nvPicPr>
+          <p:cNvPr id="21" name="Image 3" descr="preencoded.png">    </p:cNvPr>
+          <p:cNvPicPr>
+            <a:picLocks noChangeAspect="1"/>
+          </p:cNvPicPr>
+          <p:nvPr/>
+        </p:nvPicPr>
+        <p:blipFill>
+          <a:blip r:embed="rId4"/>
+          <a:stretch>
+            <a:fillRect/>
+          </a:stretch>
+        </p:blipFill>
+        <p:spPr>
+          <a:xfrm>
+            <a:off x="10181844" y="2350008"/>
+            <a:ext cx="694944" cy="694944"/>
+          </a:xfrm>
+          <a:prstGeom prst="rect">
+            <a:avLst/>
+          </a:prstGeom>
+        </p:spPr>
+      </p:pic>
+      <p:sp>
+        <p:nvSpPr>
+          <p:cNvPr id="22" name="Text 16"/>
+          <p:cNvSpPr/>
+          <p:nvPr/>
+        </p:nvSpPr>
+        <p:spPr>
+          <a:xfrm>
+            <a:off x="9363456" y="3520440"/>
+            <a:ext cx="2331720" cy="731520"/>
+          </a:xfrm>
+          <a:prstGeom prst="rect">
+            <a:avLst/>
+          </a:prstGeom>
+          <a:noFill/>
+          <a:ln/>
+        </p:spPr>
+        <p:txBody>
+          <a:bodyPr wrap="square" rtlCol="0" anchor="t"/>
+          <a:lstStyle/>
+          <a:p>
+            <a:pPr algn="ctr" indent="0" marL="0">
+              <a:buNone/>
+            </a:pPr>
+            <a:r>
+              <a:rPr lang="en-US" sz="1800" b="1" dirty="0">
+                <a:solidFill>
+                  <a:srgbClr val="FFFFFF"/>
+                </a:solidFill>
+                <a:latin typeface="Calibri" pitchFamily="34" charset="0"/>
+                <a:ea typeface="Calibri" pitchFamily="34" charset="-122"/>
+                <a:cs typeface="Calibri" pitchFamily="34" charset="-120"/>
+              </a:rPr>
+              <a:t>Игровая статистика</a:t>
+            </a:r>
+            <a:endParaRPr lang="en-US" sz="1800" dirty="0"/>
+          </a:p>
+        </p:txBody>
+      </p:sp>
+      <p:sp>
+        <p:nvSpPr>
+          <p:cNvPr id="23" name="Text 17"/>
+          <p:cNvSpPr/>
+          <p:nvPr/>
+        </p:nvSpPr>
+        <p:spPr>
+          <a:xfrm>
+            <a:off x="9363456" y="4251960"/>
+            <a:ext cx="2331720" cy="457200"/>
           </a:xfrm>
           <a:prstGeom prst="rect">
             <a:avLst/>
@@ -2977,147 +2650,7 @@
               <a:buNone/>
             </a:pPr>
             <a:r>
-              <a:rPr lang="en-US" sz="2400" b="1" dirty="0">
-                <a:solidFill>
-                  <a:srgbClr val="17132E"/>
-                </a:solidFill>
-                <a:latin typeface="Calibri" pitchFamily="34" charset="0"/>
-                <a:ea typeface="Calibri" pitchFamily="34" charset="-122"/>
-                <a:cs typeface="Calibri" pitchFamily="34" charset="-120"/>
-              </a:rPr>
-              <a:t>4</a:t>
-            </a:r>
-            <a:endParaRPr lang="en-US" sz="2400" dirty="0"/>
-          </a:p>
-        </p:txBody>
-      </p:sp>
-      <p:sp>
-        <p:nvSpPr>
-          <p:cNvPr id="22" name="Text 20"/>
-          <p:cNvSpPr/>
-          <p:nvPr/>
-        </p:nvSpPr>
-        <p:spPr>
-          <a:xfrm>
-            <a:off x="9212351" y="3566160"/>
-            <a:ext cx="2293544" cy="457200"/>
-          </a:xfrm>
-          <a:prstGeom prst="rect">
-            <a:avLst/>
-          </a:prstGeom>
-          <a:noFill/>
-          <a:ln/>
-        </p:spPr>
-        <p:txBody>
-          <a:bodyPr wrap="square" rtlCol="0" anchor="t"/>
-          <a:lstStyle/>
-          <a:p>
-            <a:pPr algn="ctr" indent="0" marL="0">
-              <a:buNone/>
-            </a:pPr>
-            <a:r>
-              <a:rPr lang="en-US" sz="1700" b="1" dirty="0">
-                <a:solidFill>
-                  <a:srgbClr val="FFFFFF"/>
-                </a:solidFill>
-                <a:latin typeface="Calibri" pitchFamily="34" charset="0"/>
-                <a:ea typeface="Calibri" pitchFamily="34" charset="-122"/>
-                <a:cs typeface="Calibri" pitchFamily="34" charset="-120"/>
-              </a:rPr>
-              <a:t>Время</a:t>
-            </a:r>
-            <a:endParaRPr lang="en-US" sz="1700" dirty="0"/>
-          </a:p>
-        </p:txBody>
-      </p:sp>
-      <p:sp>
-        <p:nvSpPr>
-          <p:cNvPr id="23" name="Text 21"/>
-          <p:cNvSpPr/>
-          <p:nvPr/>
-        </p:nvSpPr>
-        <p:spPr>
-          <a:xfrm>
-            <a:off x="9258071" y="4069080"/>
-            <a:ext cx="2202104" cy="914400"/>
-          </a:xfrm>
-          <a:prstGeom prst="rect">
-            <a:avLst/>
-          </a:prstGeom>
-          <a:noFill/>
-          <a:ln/>
-        </p:spPr>
-        <p:txBody>
-          <a:bodyPr wrap="square" rtlCol="0" anchor="t"/>
-          <a:lstStyle/>
-          <a:p>
-            <a:pPr algn="ctr" indent="0" marL="0">
-              <a:lnSpc>
-                <a:spcPct val="110000"/>
-              </a:lnSpc>
-              <a:buNone/>
-            </a:pPr>
-            <a:r>
-              <a:rPr lang="en-US" sz="1300" dirty="0">
-                <a:solidFill>
-                  <a:srgbClr val="D9D4F2"/>
-                </a:solidFill>
-                <a:latin typeface="Calibri" pitchFamily="34" charset="0"/>
-                <a:ea typeface="Calibri" pitchFamily="34" charset="-122"/>
-                <a:cs typeface="Calibri" pitchFamily="34" charset="-120"/>
-              </a:rPr>
-              <a:t>успеваем за</a:t>
-            </a:r>
-            <a:endParaRPr lang="en-US" sz="1300" dirty="0"/>
-          </a:p>
-          <a:p>
-            <a:pPr algn="ctr" indent="0" marL="0">
-              <a:lnSpc>
-                <a:spcPct val="110000"/>
-              </a:lnSpc>
-              <a:buNone/>
-            </a:pPr>
-            <a:r>
-              <a:rPr lang="en-US" sz="1300" dirty="0">
-                <a:solidFill>
-                  <a:srgbClr val="D9D4F2"/>
-                </a:solidFill>
-                <a:latin typeface="Calibri" pitchFamily="34" charset="0"/>
-                <a:ea typeface="Calibri" pitchFamily="34" charset="-122"/>
-                <a:cs typeface="Calibri" pitchFamily="34" charset="-120"/>
-              </a:rPr>
-              <a:t>оставшиеся уроки</a:t>
-            </a:r>
-            <a:endParaRPr lang="en-US" sz="1300" dirty="0"/>
-          </a:p>
-        </p:txBody>
-      </p:sp>
-      <p:sp>
-        <p:nvSpPr>
-          <p:cNvPr id="24" name="Text 22"/>
-          <p:cNvSpPr/>
-          <p:nvPr/>
-        </p:nvSpPr>
-        <p:spPr>
-          <a:xfrm>
-            <a:off x="594360" y="5303520"/>
-            <a:ext cx="11002975" cy="457200"/>
-          </a:xfrm>
-          <a:prstGeom prst="rect">
-            <a:avLst/>
-          </a:prstGeom>
-          <a:noFill/>
-          <a:ln/>
-        </p:spPr>
-        <p:txBody>
-          <a:bodyPr wrap="square" rtlCol="0" anchor="t"/>
-          <a:lstStyle/>
-          <a:p>
-            <a:pPr algn="ctr" indent="0" marL="0">
-              <a:buNone/>
-            </a:pPr>
-            <a:r>
-              <a:rPr lang="en-US" sz="1600" i="1" dirty="0">
+              <a:rPr lang="en-US" sz="1400" dirty="0">
                 <a:solidFill>
                   <a:srgbClr val="9E96C8"/>
                 </a:solidFill>
@@ -3125,31 +2658,70 @@
                 <a:ea typeface="Calibri" pitchFamily="34" charset="-122"/>
                 <a:cs typeface="Calibri" pitchFamily="34" charset="-120"/>
               </a:rPr>
-              <a:t>Питч идеи — 2 минуты: задача, что предсказываешь, метрика, источник данных.</a:t>
-            </a:r>
-            <a:endParaRPr lang="en-US" sz="1600" dirty="0"/>
-          </a:p>
-        </p:txBody>
-      </p:sp>
-      <p:sp>
-        <p:nvSpPr>
-          <p:cNvPr id="25" name="Text 23"/>
-          <p:cNvSpPr/>
-          <p:nvPr/>
-        </p:nvSpPr>
-        <p:spPr>
-          <a:xfrm>
-            <a:off x="10271455" y="6355080"/>
-            <a:ext cx="1371600" cy="274320"/>
-          </a:xfrm>
-          <a:prstGeom prst="rect">
-            <a:avLst/>
-          </a:prstGeom>
-          <a:noFill/>
-          <a:ln/>
-        </p:spPr>
-        <p:txBody>
-          <a:bodyPr wrap="square" rtlCol="0" anchor="t"/>
+              <a:t>анализ и прогноз</a:t>
+            </a:r>
+            <a:endParaRPr lang="en-US" sz="1400" dirty="0"/>
+          </a:p>
+        </p:txBody>
+      </p:sp>
+      <p:sp>
+        <p:nvSpPr>
+          <p:cNvPr id="24" name="Text 18"/>
+          <p:cNvSpPr/>
+          <p:nvPr/>
+        </p:nvSpPr>
+        <p:spPr>
+          <a:xfrm>
+            <a:off x="640080" y="6172200"/>
+            <a:ext cx="10881360" cy="457200"/>
+          </a:xfrm>
+          <a:prstGeom prst="rect">
+            <a:avLst/>
+          </a:prstGeom>
+          <a:noFill/>
+          <a:ln/>
+        </p:spPr>
+        <p:txBody>
+          <a:bodyPr wrap="square" rtlCol="0" anchor="ctr"/>
+          <a:lstStyle/>
+          <a:p>
+            <a:pPr indent="0" marL="0">
+              <a:buNone/>
+            </a:pPr>
+            <a:r>
+              <a:rPr lang="en-US" sz="1400" i="1" dirty="0">
+                <a:solidFill>
+                  <a:srgbClr val="9E96C8"/>
+                </a:solidFill>
+                <a:latin typeface="Calibri" pitchFamily="34" charset="0"/>
+                <a:ea typeface="Calibri" pitchFamily="34" charset="-122"/>
+                <a:cs typeface="Calibri" pitchFamily="34" charset="-120"/>
+              </a:rPr>
+              <a:t>Не сложное — а понятное, честное и работающее.</a:t>
+            </a:r>
+            <a:endParaRPr lang="en-US" sz="1400" dirty="0"/>
+          </a:p>
+        </p:txBody>
+      </p:sp>
+      <p:sp>
+        <p:nvSpPr>
+          <p:cNvPr id="25" name="Text 19"/>
+          <p:cNvSpPr/>
+          <p:nvPr/>
+        </p:nvSpPr>
+        <p:spPr>
+          <a:xfrm>
+            <a:off x="10698480" y="6309360"/>
+            <a:ext cx="1188720" cy="274320"/>
+          </a:xfrm>
+          <a:prstGeom prst="rect">
+            <a:avLst/>
+          </a:prstGeom>
+          <a:noFill/>
+          <a:ln/>
+        </p:spPr>
+        <p:txBody>
+          <a:bodyPr wrap="square" rtlCol="0" anchor="ctr"/>
           <a:lstStyle/>
           <a:p>
             <a:pPr algn="r" indent="0" marL="0">
@@ -3210,24 +2782,24 @@
         </p:nvSpPr>
         <p:spPr>
           <a:xfrm>
-            <a:off x="594360" y="457200"/>
-            <a:ext cx="11002975" cy="320040"/>
-          </a:xfrm>
-          <a:prstGeom prst="rect">
-            <a:avLst/>
-          </a:prstGeom>
-          <a:noFill/>
-          <a:ln/>
-        </p:spPr>
-        <p:txBody>
-          <a:bodyPr wrap="square" rtlCol="0" anchor="t"/>
+            <a:off x="640080" y="502920"/>
+            <a:ext cx="10058400" cy="365760"/>
+          </a:xfrm>
+          <a:prstGeom prst="rect">
+            <a:avLst/>
+          </a:prstGeom>
+          <a:noFill/>
+          <a:ln/>
+        </p:spPr>
+        <p:txBody>
+          <a:bodyPr wrap="square" rtlCol="0" anchor="ctr"/>
           <a:lstStyle/>
           <a:p>
             <a:pPr indent="0" marL="0">
               <a:buNone/>
             </a:pPr>
             <a:r>
-              <a:rPr lang="en-US" sz="1300" b="1" spc="200" kern="0" dirty="0">
+              <a:rPr lang="en-US" sz="1300" b="1" spc="300" kern="0" dirty="0">
                 <a:solidFill>
                   <a:srgbClr val="27D3EE"/>
                 </a:solidFill>
@@ -3235,7 +2807,7 @@
                 <a:ea typeface="Calibri" pitchFamily="34" charset="-122"/>
                 <a:cs typeface="Calibri" pitchFamily="34" charset="-120"/>
               </a:rPr>
-              <a:t>ПРАКТИКА</a:t>
+              <a:t>КАК ВЫБРАТЬ</a:t>
             </a:r>
             <a:endParaRPr lang="en-US" sz="1300" dirty="0"/>
           </a:p>
@@ -3249,24 +2821,24 @@
         </p:nvSpPr>
         <p:spPr>
           <a:xfrm>
-            <a:off x="594360" y="749808"/>
-            <a:ext cx="11002975" cy="822960"/>
-          </a:xfrm>
-          <a:prstGeom prst="rect">
-            <a:avLst/>
-          </a:prstGeom>
-          <a:noFill/>
-          <a:ln/>
-        </p:spPr>
-        <p:txBody>
-          <a:bodyPr wrap="square" rtlCol="0" anchor="t"/>
+            <a:off x="640080" y="868680"/>
+            <a:ext cx="10058400" cy="640080"/>
+          </a:xfrm>
+          <a:prstGeom prst="rect">
+            <a:avLst/>
+          </a:prstGeom>
+          <a:noFill/>
+          <a:ln/>
+        </p:spPr>
+        <p:txBody>
+          <a:bodyPr wrap="square" rtlCol="0" anchor="ctr"/>
           <a:lstStyle/>
           <a:p>
             <a:pPr indent="0" marL="0">
               <a:buNone/>
             </a:pPr>
             <a:r>
-              <a:rPr lang="en-US" sz="3000" b="1" dirty="0">
+              <a:rPr lang="en-US" sz="3200" b="1" dirty="0">
                 <a:solidFill>
                   <a:srgbClr val="FFFFFF"/>
                 </a:solidFill>
@@ -3274,9 +2846,9 @@
                 <a:ea typeface="Calibri" pitchFamily="34" charset="-122"/>
                 <a:cs typeface="Calibri" pitchFamily="34" charset="-120"/>
               </a:rPr>
-              <a:t>Старт проекта: 4 шага</a:t>
-            </a:r>
-            <a:endParaRPr lang="en-US" sz="3000" dirty="0"/>
+              <a:t>Признаки реализуемой задачи</a:t>
+            </a:r>
+            <a:endParaRPr lang="en-US" sz="3200" dirty="0"/>
           </a:p>
         </p:txBody>
       </p:sp>
@@ -3288,30 +2860,74 @@
         </p:nvSpPr>
         <p:spPr>
           <a:xfrm>
-            <a:off x="1051560" y="2651760"/>
-            <a:ext cx="2377440" cy="1371600"/>
+            <a:off x="640080" y="1874520"/>
+            <a:ext cx="10881360" cy="822960"/>
           </a:xfrm>
           <a:prstGeom prst="roundRect">
             <a:avLst>
-              <a:gd name="adj" fmla="val 8000"/>
+              <a:gd name="adj" fmla="val 11111"/>
             </a:avLst>
           </a:prstGeom>
           <a:solidFill>
-            <a:srgbClr val="5B4FC4"/>
-          </a:solidFill>
-          <a:ln/>
-        </p:spPr>
-      </p:sp>
-      <p:sp>
-        <p:nvSpPr>
-          <p:cNvPr id="5" name="Text 3"/>
-          <p:cNvSpPr/>
-          <p:nvPr/>
-        </p:nvSpPr>
-        <p:spPr>
-          <a:xfrm>
-            <a:off x="1051560" y="2651760"/>
-            <a:ext cx="2377440" cy="1371600"/>
+            <a:srgbClr val="241E42"/>
+          </a:solidFill>
+          <a:ln/>
+        </p:spPr>
+      </p:sp>
+      <p:sp>
+        <p:nvSpPr>
+          <p:cNvPr id="5" name="Shape 3"/>
+          <p:cNvSpPr/>
+          <p:nvPr/>
+        </p:nvSpPr>
+        <p:spPr>
+          <a:xfrm>
+            <a:off x="868680" y="2039112"/>
+            <a:ext cx="493776" cy="493776"/>
+          </a:xfrm>
+          <a:prstGeom prst="ellipse">
+            <a:avLst/>
+          </a:prstGeom>
+          <a:solidFill>
+            <a:srgbClr val="2C2552"/>
+          </a:solidFill>
+          <a:ln/>
+        </p:spPr>
+      </p:sp>
+      <p:pic>
+        <p:nvPicPr>
+          <p:cNvPr id="6" name="Image 0" descr="preencoded.png">    </p:cNvPr>
+          <p:cNvPicPr>
+            <a:picLocks noChangeAspect="1"/>
+          </p:cNvPicPr>
+          <p:nvPr/>
+        </p:nvPicPr>
+        <p:blipFill>
+          <a:blip r:embed="rId1"/>
+          <a:stretch>
+            <a:fillRect/>
+          </a:stretch>
+        </p:blipFill>
+        <p:spPr>
+          <a:xfrm>
+            <a:off x="987552" y="2157984"/>
+            <a:ext cx="256032" cy="256032"/>
+          </a:xfrm>
+          <a:prstGeom prst="rect">
+            <a:avLst/>
+          </a:prstGeom>
+        </p:spPr>
+      </p:pic>
+      <p:sp>
+        <p:nvSpPr>
+          <p:cNvPr id="7" name="Text 4"/>
+          <p:cNvSpPr/>
+          <p:nvPr/>
+        </p:nvSpPr>
+        <p:spPr>
+          <a:xfrm>
+            <a:off x="1645920" y="1965960"/>
+            <a:ext cx="3017520" cy="640080"/>
           </a:xfrm>
           <a:prstGeom prst="rect">
             <a:avLst/>
@@ -3323,11 +2939,11 @@
           <a:bodyPr wrap="square" rtlCol="0" anchor="ctr"/>
           <a:lstStyle/>
           <a:p>
-            <a:pPr algn="ctr" indent="0" marL="0">
-              <a:buNone/>
-            </a:pPr>
-            <a:r>
-              <a:rPr lang="en-US" sz="1900" b="1" dirty="0">
+            <a:pPr indent="0" marL="0">
+              <a:buNone/>
+            </a:pPr>
+            <a:r>
+              <a:rPr lang="en-US" sz="1800" b="1" dirty="0">
                 <a:solidFill>
                   <a:srgbClr val="FFFFFF"/>
                 </a:solidFill>
@@ -3335,22 +2951,22 @@
                 <a:ea typeface="Calibri" pitchFamily="34" charset="-122"/>
                 <a:cs typeface="Calibri" pitchFamily="34" charset="-120"/>
               </a:rPr>
-              <a:t>Задача</a:t>
-            </a:r>
-            <a:endParaRPr lang="en-US" sz="1900" dirty="0"/>
-          </a:p>
-        </p:txBody>
-      </p:sp>
-      <p:sp>
-        <p:nvSpPr>
-          <p:cNvPr id="6" name="Text 4"/>
-          <p:cNvSpPr/>
-          <p:nvPr/>
-        </p:nvSpPr>
-        <p:spPr>
-          <a:xfrm>
-            <a:off x="3429000" y="2651760"/>
-            <a:ext cx="365760" cy="1371600"/>
+              <a:t>1 · Задача</a:t>
+            </a:r>
+            <a:endParaRPr lang="en-US" sz="1800" dirty="0"/>
+          </a:p>
+        </p:txBody>
+      </p:sp>
+      <p:sp>
+        <p:nvSpPr>
+          <p:cNvPr id="8" name="Text 5"/>
+          <p:cNvSpPr/>
+          <p:nvPr/>
+        </p:nvSpPr>
+        <p:spPr>
+          <a:xfrm>
+            <a:off x="4572000" y="1965960"/>
+            <a:ext cx="6766560" cy="640080"/>
           </a:xfrm>
           <a:prstGeom prst="rect">
             <a:avLst/>
@@ -3362,56 +2978,100 @@
           <a:bodyPr wrap="square" rtlCol="0" anchor="ctr"/>
           <a:lstStyle/>
           <a:p>
-            <a:pPr algn="ctr" indent="0" marL="0">
-              <a:buNone/>
-            </a:pPr>
-            <a:r>
-              <a:rPr lang="en-US" sz="2600" b="1" dirty="0">
-                <a:solidFill>
-                  <a:srgbClr val="9E96C8"/>
-                </a:solidFill>
-                <a:latin typeface="Calibri" pitchFamily="34" charset="0"/>
-                <a:ea typeface="Calibri" pitchFamily="34" charset="-122"/>
-                <a:cs typeface="Calibri" pitchFamily="34" charset="-120"/>
-              </a:rPr>
-              <a:t>→</a:t>
-            </a:r>
-            <a:endParaRPr lang="en-US" sz="2600" dirty="0"/>
-          </a:p>
-        </p:txBody>
-      </p:sp>
-      <p:sp>
-        <p:nvSpPr>
-          <p:cNvPr id="7" name="Shape 5"/>
-          <p:cNvSpPr/>
-          <p:nvPr/>
-        </p:nvSpPr>
-        <p:spPr>
-          <a:xfrm>
-            <a:off x="3794760" y="2651760"/>
-            <a:ext cx="2377440" cy="1371600"/>
+            <a:pPr indent="0" marL="0">
+              <a:buNone/>
+            </a:pPr>
+            <a:r>
+              <a:rPr lang="en-US" sz="1600" dirty="0">
+                <a:solidFill>
+                  <a:srgbClr val="D9D4F2"/>
+                </a:solidFill>
+                <a:latin typeface="Calibri" pitchFamily="34" charset="0"/>
+                <a:ea typeface="Calibri" pitchFamily="34" charset="-122"/>
+                <a:cs typeface="Calibri" pitchFamily="34" charset="-120"/>
+              </a:rPr>
+              <a:t>классификация или регрессия</a:t>
+            </a:r>
+            <a:endParaRPr lang="en-US" sz="1600" dirty="0"/>
+          </a:p>
+        </p:txBody>
+      </p:sp>
+      <p:sp>
+        <p:nvSpPr>
+          <p:cNvPr id="9" name="Shape 6"/>
+          <p:cNvSpPr/>
+          <p:nvPr/>
+        </p:nvSpPr>
+        <p:spPr>
+          <a:xfrm>
+            <a:off x="640080" y="2834640"/>
+            <a:ext cx="10881360" cy="822960"/>
           </a:xfrm>
           <a:prstGeom prst="roundRect">
             <a:avLst>
-              <a:gd name="adj" fmla="val 8000"/>
+              <a:gd name="adj" fmla="val 11111"/>
             </a:avLst>
           </a:prstGeom>
           <a:solidFill>
-            <a:srgbClr val="5B4FC4"/>
-          </a:solidFill>
-          <a:ln/>
-        </p:spPr>
-      </p:sp>
-      <p:sp>
-        <p:nvSpPr>
-          <p:cNvPr id="8" name="Text 6"/>
-          <p:cNvSpPr/>
-          <p:nvPr/>
-        </p:nvSpPr>
-        <p:spPr>
-          <a:xfrm>
-            <a:off x="3794760" y="2651760"/>
-            <a:ext cx="2377440" cy="1371600"/>
+            <a:srgbClr val="241E42"/>
+          </a:solidFill>
+          <a:ln/>
+        </p:spPr>
+      </p:sp>
+      <p:sp>
+        <p:nvSpPr>
+          <p:cNvPr id="10" name="Shape 7"/>
+          <p:cNvSpPr/>
+          <p:nvPr/>
+        </p:nvSpPr>
+        <p:spPr>
+          <a:xfrm>
+            <a:off x="868680" y="2999232"/>
+            <a:ext cx="493776" cy="493776"/>
+          </a:xfrm>
+          <a:prstGeom prst="ellipse">
+            <a:avLst/>
+          </a:prstGeom>
+          <a:solidFill>
+            <a:srgbClr val="2C2552"/>
+          </a:solidFill>
+          <a:ln/>
+        </p:spPr>
+      </p:sp>
+      <p:pic>
+        <p:nvPicPr>
+          <p:cNvPr id="11" name="Image 1" descr="preencoded.png">    </p:cNvPr>
+          <p:cNvPicPr>
+            <a:picLocks noChangeAspect="1"/>
+          </p:cNvPicPr>
+          <p:nvPr/>
+        </p:nvPicPr>
+        <p:blipFill>
+          <a:blip r:embed="rId2"/>
+          <a:stretch>
+            <a:fillRect/>
+          </a:stretch>
+        </p:blipFill>
+        <p:spPr>
+          <a:xfrm>
+            <a:off x="987552" y="3118104"/>
+            <a:ext cx="256032" cy="256032"/>
+          </a:xfrm>
+          <a:prstGeom prst="rect">
+            <a:avLst/>
+          </a:prstGeom>
+        </p:spPr>
+      </p:pic>
+      <p:sp>
+        <p:nvSpPr>
+          <p:cNvPr id="12" name="Text 8"/>
+          <p:cNvSpPr/>
+          <p:nvPr/>
+        </p:nvSpPr>
+        <p:spPr>
+          <a:xfrm>
+            <a:off x="1645920" y="2926080"/>
+            <a:ext cx="3017520" cy="640080"/>
           </a:xfrm>
           <a:prstGeom prst="rect">
             <a:avLst/>
@@ -3423,11 +3083,11 @@
           <a:bodyPr wrap="square" rtlCol="0" anchor="ctr"/>
           <a:lstStyle/>
           <a:p>
-            <a:pPr algn="ctr" indent="0" marL="0">
-              <a:buNone/>
-            </a:pPr>
-            <a:r>
-              <a:rPr lang="en-US" sz="1900" b="1" dirty="0">
+            <a:pPr indent="0" marL="0">
+              <a:buNone/>
+            </a:pPr>
+            <a:r>
+              <a:rPr lang="en-US" sz="1800" b="1" dirty="0">
                 <a:solidFill>
                   <a:srgbClr val="FFFFFF"/>
                 </a:solidFill>
@@ -3435,22 +3095,22 @@
                 <a:ea typeface="Calibri" pitchFamily="34" charset="-122"/>
                 <a:cs typeface="Calibri" pitchFamily="34" charset="-120"/>
               </a:rPr>
-              <a:t>Данные</a:t>
-            </a:r>
-            <a:endParaRPr lang="en-US" sz="1900" dirty="0"/>
-          </a:p>
-        </p:txBody>
-      </p:sp>
-      <p:sp>
-        <p:nvSpPr>
-          <p:cNvPr id="9" name="Text 7"/>
-          <p:cNvSpPr/>
-          <p:nvPr/>
-        </p:nvSpPr>
-        <p:spPr>
-          <a:xfrm>
-            <a:off x="6172200" y="2651760"/>
-            <a:ext cx="365760" cy="1371600"/>
+              <a:t>2 · Данные</a:t>
+            </a:r>
+            <a:endParaRPr lang="en-US" sz="1800" dirty="0"/>
+          </a:p>
+        </p:txBody>
+      </p:sp>
+      <p:sp>
+        <p:nvSpPr>
+          <p:cNvPr id="13" name="Text 9"/>
+          <p:cNvSpPr/>
+          <p:nvPr/>
+        </p:nvSpPr>
+        <p:spPr>
+          <a:xfrm>
+            <a:off x="4572000" y="2926080"/>
+            <a:ext cx="6766560" cy="640080"/>
           </a:xfrm>
           <a:prstGeom prst="rect">
             <a:avLst/>
@@ -3462,56 +3122,100 @@
           <a:bodyPr wrap="square" rtlCol="0" anchor="ctr"/>
           <a:lstStyle/>
           <a:p>
-            <a:pPr algn="ctr" indent="0" marL="0">
-              <a:buNone/>
-            </a:pPr>
-            <a:r>
-              <a:rPr lang="en-US" sz="2600" b="1" dirty="0">
-                <a:solidFill>
-                  <a:srgbClr val="9E96C8"/>
-                </a:solidFill>
-                <a:latin typeface="Calibri" pitchFamily="34" charset="0"/>
-                <a:ea typeface="Calibri" pitchFamily="34" charset="-122"/>
-                <a:cs typeface="Calibri" pitchFamily="34" charset="-120"/>
-              </a:rPr>
-              <a:t>→</a:t>
-            </a:r>
-            <a:endParaRPr lang="en-US" sz="2600" dirty="0"/>
-          </a:p>
-        </p:txBody>
-      </p:sp>
-      <p:sp>
-        <p:nvSpPr>
-          <p:cNvPr id="10" name="Shape 8"/>
-          <p:cNvSpPr/>
-          <p:nvPr/>
-        </p:nvSpPr>
-        <p:spPr>
-          <a:xfrm>
-            <a:off x="6537960" y="2651760"/>
-            <a:ext cx="2377440" cy="1371600"/>
+            <a:pPr indent="0" marL="0">
+              <a:buNone/>
+            </a:pPr>
+            <a:r>
+              <a:rPr lang="en-US" sz="1600" dirty="0">
+                <a:solidFill>
+                  <a:srgbClr val="D9D4F2"/>
+                </a:solidFill>
+                <a:latin typeface="Calibri" pitchFamily="34" charset="0"/>
+                <a:ea typeface="Calibri" pitchFamily="34" charset="-122"/>
+                <a:cs typeface="Calibri" pitchFamily="34" charset="-120"/>
+              </a:rPr>
+              <a:t>реально достать, достаточно</a:t>
+            </a:r>
+            <a:endParaRPr lang="en-US" sz="1600" dirty="0"/>
+          </a:p>
+        </p:txBody>
+      </p:sp>
+      <p:sp>
+        <p:nvSpPr>
+          <p:cNvPr id="14" name="Shape 10"/>
+          <p:cNvSpPr/>
+          <p:nvPr/>
+        </p:nvSpPr>
+        <p:spPr>
+          <a:xfrm>
+            <a:off x="640080" y="3794760"/>
+            <a:ext cx="10881360" cy="822960"/>
           </a:xfrm>
           <a:prstGeom prst="roundRect">
             <a:avLst>
-              <a:gd name="adj" fmla="val 8000"/>
+              <a:gd name="adj" fmla="val 11111"/>
             </a:avLst>
           </a:prstGeom>
           <a:solidFill>
-            <a:srgbClr val="5B4FC4"/>
-          </a:solidFill>
-          <a:ln/>
-        </p:spPr>
-      </p:sp>
-      <p:sp>
-        <p:nvSpPr>
-          <p:cNvPr id="11" name="Text 9"/>
-          <p:cNvSpPr/>
-          <p:nvPr/>
-        </p:nvSpPr>
-        <p:spPr>
-          <a:xfrm>
-            <a:off x="6537960" y="2651760"/>
-            <a:ext cx="2377440" cy="1371600"/>
+            <a:srgbClr val="241E42"/>
+          </a:solidFill>
+          <a:ln/>
+        </p:spPr>
+      </p:sp>
+      <p:sp>
+        <p:nvSpPr>
+          <p:cNvPr id="15" name="Shape 11"/>
+          <p:cNvSpPr/>
+          <p:nvPr/>
+        </p:nvSpPr>
+        <p:spPr>
+          <a:xfrm>
+            <a:off x="868680" y="3959352"/>
+            <a:ext cx="493776" cy="493776"/>
+          </a:xfrm>
+          <a:prstGeom prst="ellipse">
+            <a:avLst/>
+          </a:prstGeom>
+          <a:solidFill>
+            <a:srgbClr val="2C2552"/>
+          </a:solidFill>
+          <a:ln/>
+        </p:spPr>
+      </p:sp>
+      <p:pic>
+        <p:nvPicPr>
+          <p:cNvPr id="16" name="Image 2" descr="preencoded.png">    </p:cNvPr>
+          <p:cNvPicPr>
+            <a:picLocks noChangeAspect="1"/>
+          </p:cNvPicPr>
+          <p:nvPr/>
+        </p:nvPicPr>
+        <p:blipFill>
+          <a:blip r:embed="rId3"/>
+          <a:stretch>
+            <a:fillRect/>
+          </a:stretch>
+        </p:blipFill>
+        <p:spPr>
+          <a:xfrm>
+            <a:off x="987552" y="4078224"/>
+            <a:ext cx="256032" cy="256032"/>
+          </a:xfrm>
+          <a:prstGeom prst="rect">
+            <a:avLst/>
+          </a:prstGeom>
+        </p:spPr>
+      </p:pic>
+      <p:sp>
+        <p:nvSpPr>
+          <p:cNvPr id="17" name="Text 12"/>
+          <p:cNvSpPr/>
+          <p:nvPr/>
+        </p:nvSpPr>
+        <p:spPr>
+          <a:xfrm>
+            <a:off x="1645920" y="3886200"/>
+            <a:ext cx="3017520" cy="640080"/>
           </a:xfrm>
           <a:prstGeom prst="rect">
             <a:avLst/>
@@ -3523,11 +3227,11 @@
           <a:bodyPr wrap="square" rtlCol="0" anchor="ctr"/>
           <a:lstStyle/>
           <a:p>
-            <a:pPr algn="ctr" indent="0" marL="0">
-              <a:buNone/>
-            </a:pPr>
-            <a:r>
-              <a:rPr lang="en-US" sz="1900" b="1" dirty="0">
+            <a:pPr indent="0" marL="0">
+              <a:buNone/>
+            </a:pPr>
+            <a:r>
+              <a:rPr lang="en-US" sz="1800" b="1" dirty="0">
                 <a:solidFill>
                   <a:srgbClr val="FFFFFF"/>
                 </a:solidFill>
@@ -3535,22 +3239,22 @@
                 <a:ea typeface="Calibri" pitchFamily="34" charset="-122"/>
                 <a:cs typeface="Calibri" pitchFamily="34" charset="-120"/>
               </a:rPr>
-              <a:t>Baseline</a:t>
-            </a:r>
-            <a:endParaRPr lang="en-US" sz="1900" dirty="0"/>
-          </a:p>
-        </p:txBody>
-      </p:sp>
-      <p:sp>
-        <p:nvSpPr>
-          <p:cNvPr id="12" name="Text 10"/>
-          <p:cNvSpPr/>
-          <p:nvPr/>
-        </p:nvSpPr>
-        <p:spPr>
-          <a:xfrm>
-            <a:off x="8915400" y="2651760"/>
-            <a:ext cx="365760" cy="1371600"/>
+              <a:t>3 · Метрика</a:t>
+            </a:r>
+            <a:endParaRPr lang="en-US" sz="1800" dirty="0"/>
+          </a:p>
+        </p:txBody>
+      </p:sp>
+      <p:sp>
+        <p:nvSpPr>
+          <p:cNvPr id="18" name="Text 13"/>
+          <p:cNvSpPr/>
+          <p:nvPr/>
+        </p:nvSpPr>
+        <p:spPr>
+          <a:xfrm>
+            <a:off x="4572000" y="3886200"/>
+            <a:ext cx="6766560" cy="640080"/>
           </a:xfrm>
           <a:prstGeom prst="rect">
             <a:avLst/>
@@ -3562,56 +3266,100 @@
           <a:bodyPr wrap="square" rtlCol="0" anchor="ctr"/>
           <a:lstStyle/>
           <a:p>
-            <a:pPr algn="ctr" indent="0" marL="0">
-              <a:buNone/>
-            </a:pPr>
-            <a:r>
-              <a:rPr lang="en-US" sz="2600" b="1" dirty="0">
-                <a:solidFill>
-                  <a:srgbClr val="9E96C8"/>
-                </a:solidFill>
-                <a:latin typeface="Calibri" pitchFamily="34" charset="0"/>
-                <a:ea typeface="Calibri" pitchFamily="34" charset="-122"/>
-                <a:cs typeface="Calibri" pitchFamily="34" charset="-120"/>
-              </a:rPr>
-              <a:t>→</a:t>
-            </a:r>
-            <a:endParaRPr lang="en-US" sz="2600" dirty="0"/>
-          </a:p>
-        </p:txBody>
-      </p:sp>
-      <p:sp>
-        <p:nvSpPr>
-          <p:cNvPr id="13" name="Shape 11"/>
-          <p:cNvSpPr/>
-          <p:nvPr/>
-        </p:nvSpPr>
-        <p:spPr>
-          <a:xfrm>
-            <a:off x="9281160" y="2651760"/>
-            <a:ext cx="2377440" cy="1371600"/>
+            <a:pPr indent="0" marL="0">
+              <a:buNone/>
+            </a:pPr>
+            <a:r>
+              <a:rPr lang="en-US" sz="1600" dirty="0">
+                <a:solidFill>
+                  <a:srgbClr val="D9D4F2"/>
+                </a:solidFill>
+                <a:latin typeface="Calibri" pitchFamily="34" charset="0"/>
+                <a:ea typeface="Calibri" pitchFamily="34" charset="-122"/>
+                <a:cs typeface="Calibri" pitchFamily="34" charset="-120"/>
+              </a:rPr>
+              <a:t>успех можно измерить</a:t>
+            </a:r>
+            <a:endParaRPr lang="en-US" sz="1600" dirty="0"/>
+          </a:p>
+        </p:txBody>
+      </p:sp>
+      <p:sp>
+        <p:nvSpPr>
+          <p:cNvPr id="19" name="Shape 14"/>
+          <p:cNvSpPr/>
+          <p:nvPr/>
+        </p:nvSpPr>
+        <p:spPr>
+          <a:xfrm>
+            <a:off x="640080" y="4754880"/>
+            <a:ext cx="10881360" cy="822960"/>
           </a:xfrm>
           <a:prstGeom prst="roundRect">
             <a:avLst>
-              <a:gd name="adj" fmla="val 8000"/>
+              <a:gd name="adj" fmla="val 11111"/>
             </a:avLst>
           </a:prstGeom>
           <a:solidFill>
-            <a:srgbClr val="27D3EE"/>
-          </a:solidFill>
-          <a:ln/>
-        </p:spPr>
-      </p:sp>
-      <p:sp>
-        <p:nvSpPr>
-          <p:cNvPr id="14" name="Text 12"/>
-          <p:cNvSpPr/>
-          <p:nvPr/>
-        </p:nvSpPr>
-        <p:spPr>
-          <a:xfrm>
-            <a:off x="9281160" y="2651760"/>
-            <a:ext cx="2377440" cy="1371600"/>
+            <a:srgbClr val="241E42"/>
+          </a:solidFill>
+          <a:ln/>
+        </p:spPr>
+      </p:sp>
+      <p:sp>
+        <p:nvSpPr>
+          <p:cNvPr id="20" name="Shape 15"/>
+          <p:cNvSpPr/>
+          <p:nvPr/>
+        </p:nvSpPr>
+        <p:spPr>
+          <a:xfrm>
+            <a:off x="868680" y="4919472"/>
+            <a:ext cx="493776" cy="493776"/>
+          </a:xfrm>
+          <a:prstGeom prst="ellipse">
+            <a:avLst/>
+          </a:prstGeom>
+          <a:solidFill>
+            <a:srgbClr val="2C2552"/>
+          </a:solidFill>
+          <a:ln/>
+        </p:spPr>
+      </p:sp>
+      <p:pic>
+        <p:nvPicPr>
+          <p:cNvPr id="21" name="Image 3" descr="preencoded.png">    </p:cNvPr>
+          <p:cNvPicPr>
+            <a:picLocks noChangeAspect="1"/>
+          </p:cNvPicPr>
+          <p:nvPr/>
+        </p:nvPicPr>
+        <p:blipFill>
+          <a:blip r:embed="rId4"/>
+          <a:stretch>
+            <a:fillRect/>
+          </a:stretch>
+        </p:blipFill>
+        <p:spPr>
+          <a:xfrm>
+            <a:off x="987552" y="5038344"/>
+            <a:ext cx="256032" cy="256032"/>
+          </a:xfrm>
+          <a:prstGeom prst="rect">
+            <a:avLst/>
+          </a:prstGeom>
+        </p:spPr>
+      </p:pic>
+      <p:sp>
+        <p:nvSpPr>
+          <p:cNvPr id="22" name="Text 16"/>
+          <p:cNvSpPr/>
+          <p:nvPr/>
+        </p:nvSpPr>
+        <p:spPr>
+          <a:xfrm>
+            <a:off x="1645920" y="4846320"/>
+            <a:ext cx="3017520" cy="640080"/>
           </a:xfrm>
           <a:prstGeom prst="rect">
             <a:avLst/>
@@ -3623,53 +3371,50 @@
           <a:bodyPr wrap="square" rtlCol="0" anchor="ctr"/>
           <a:lstStyle/>
           <a:p>
-            <a:pPr algn="ctr" indent="0" marL="0">
-              <a:buNone/>
-            </a:pPr>
-            <a:r>
-              <a:rPr lang="en-US" sz="1900" b="1" dirty="0">
-                <a:solidFill>
-                  <a:srgbClr val="17132E"/>
-                </a:solidFill>
-                <a:latin typeface="Calibri" pitchFamily="34" charset="0"/>
-                <a:ea typeface="Calibri" pitchFamily="34" charset="-122"/>
-                <a:cs typeface="Calibri" pitchFamily="34" charset="-120"/>
-              </a:rPr>
-              <a:t>Pipeline</a:t>
-            </a:r>
-            <a:endParaRPr lang="en-US" sz="1900" dirty="0"/>
-          </a:p>
-        </p:txBody>
-      </p:sp>
-      <p:sp>
-        <p:nvSpPr>
-          <p:cNvPr id="15" name="Text 13"/>
-          <p:cNvSpPr/>
-          <p:nvPr/>
-        </p:nvSpPr>
-        <p:spPr>
-          <a:xfrm>
-            <a:off x="594360" y="4480560"/>
-            <a:ext cx="11002975" cy="914400"/>
-          </a:xfrm>
-          <a:prstGeom prst="rect">
-            <a:avLst/>
-          </a:prstGeom>
-          <a:noFill/>
-          <a:ln/>
-        </p:spPr>
-        <p:txBody>
-          <a:bodyPr wrap="square" rtlCol="0" anchor="t"/>
-          <a:lstStyle/>
-          <a:p>
-            <a:pPr algn="ctr" indent="0" marL="0">
-              <a:lnSpc>
-                <a:spcPct val="120000"/>
-              </a:lnSpc>
-              <a:buNone/>
-            </a:pPr>
-            <a:r>
-              <a:rPr lang="en-US" sz="1800" dirty="0">
+            <a:pPr indent="0" marL="0">
+              <a:buNone/>
+            </a:pPr>
+            <a:r>
+              <a:rPr lang="en-US" sz="1800" b="1" dirty="0">
+                <a:solidFill>
+                  <a:srgbClr val="FFFFFF"/>
+                </a:solidFill>
+                <a:latin typeface="Calibri" pitchFamily="34" charset="0"/>
+                <a:ea typeface="Calibri" pitchFamily="34" charset="-122"/>
+                <a:cs typeface="Calibri" pitchFamily="34" charset="-120"/>
+              </a:rPr>
+              <a:t>4 · Время</a:t>
+            </a:r>
+            <a:endParaRPr lang="en-US" sz="1800" dirty="0"/>
+          </a:p>
+        </p:txBody>
+      </p:sp>
+      <p:sp>
+        <p:nvSpPr>
+          <p:cNvPr id="23" name="Text 17"/>
+          <p:cNvSpPr/>
+          <p:nvPr/>
+        </p:nvSpPr>
+        <p:spPr>
+          <a:xfrm>
+            <a:off x="4572000" y="4846320"/>
+            <a:ext cx="6766560" cy="640080"/>
+          </a:xfrm>
+          <a:prstGeom prst="rect">
+            <a:avLst/>
+          </a:prstGeom>
+          <a:noFill/>
+          <a:ln/>
+        </p:spPr>
+        <p:txBody>
+          <a:bodyPr wrap="square" rtlCol="0" anchor="ctr"/>
+          <a:lstStyle/>
+          <a:p>
+            <a:pPr indent="0" marL="0">
+              <a:buNone/>
+            </a:pPr>
+            <a:r>
+              <a:rPr lang="en-US" sz="1600" dirty="0">
                 <a:solidFill>
                   <a:srgbClr val="D9D4F2"/>
                 </a:solidFill>
@@ -3677,31 +3422,70 @@
                 <a:ea typeface="Calibri" pitchFamily="34" charset="-122"/>
                 <a:cs typeface="Calibri" pitchFamily="34" charset="-120"/>
               </a:rPr>
-              <a:t>Цель урока — не идеальная модель, а рабочая стартовая точка. Pipeline обязателен (стандарт с урока 10).</a:t>
-            </a:r>
-            <a:endParaRPr lang="en-US" sz="1800" dirty="0"/>
-          </a:p>
-        </p:txBody>
-      </p:sp>
-      <p:sp>
-        <p:nvSpPr>
-          <p:cNvPr id="16" name="Text 14"/>
-          <p:cNvSpPr/>
-          <p:nvPr/>
-        </p:nvSpPr>
-        <p:spPr>
-          <a:xfrm>
-            <a:off x="10271455" y="6355080"/>
-            <a:ext cx="1371600" cy="274320"/>
-          </a:xfrm>
-          <a:prstGeom prst="rect">
-            <a:avLst/>
-          </a:prstGeom>
-          <a:noFill/>
-          <a:ln/>
-        </p:spPr>
-        <p:txBody>
-          <a:bodyPr wrap="square" rtlCol="0" anchor="t"/>
+              <a:t>успеваем за оставшиеся уроки</a:t>
+            </a:r>
+            <a:endParaRPr lang="en-US" sz="1600" dirty="0"/>
+          </a:p>
+        </p:txBody>
+      </p:sp>
+      <p:sp>
+        <p:nvSpPr>
+          <p:cNvPr id="24" name="Text 18"/>
+          <p:cNvSpPr/>
+          <p:nvPr/>
+        </p:nvSpPr>
+        <p:spPr>
+          <a:xfrm>
+            <a:off x="640080" y="6172200"/>
+            <a:ext cx="10881360" cy="457200"/>
+          </a:xfrm>
+          <a:prstGeom prst="rect">
+            <a:avLst/>
+          </a:prstGeom>
+          <a:noFill/>
+          <a:ln/>
+        </p:spPr>
+        <p:txBody>
+          <a:bodyPr wrap="square" rtlCol="0" anchor="ctr"/>
+          <a:lstStyle/>
+          <a:p>
+            <a:pPr indent="0" marL="0">
+              <a:buNone/>
+            </a:pPr>
+            <a:r>
+              <a:rPr lang="en-US" sz="1400" i="1" dirty="0">
+                <a:solidFill>
+                  <a:srgbClr val="9E96C8"/>
+                </a:solidFill>
+                <a:latin typeface="Calibri" pitchFamily="34" charset="0"/>
+                <a:ea typeface="Calibri" pitchFamily="34" charset="-122"/>
+                <a:cs typeface="Calibri" pitchFamily="34" charset="-120"/>
+              </a:rPr>
+              <a:t>Питч идеи — 2 минуты: задача, что предсказываешь, метрика, источник данных.</a:t>
+            </a:r>
+            <a:endParaRPr lang="en-US" sz="1400" dirty="0"/>
+          </a:p>
+        </p:txBody>
+      </p:sp>
+      <p:sp>
+        <p:nvSpPr>
+          <p:cNvPr id="25" name="Text 19"/>
+          <p:cNvSpPr/>
+          <p:nvPr/>
+        </p:nvSpPr>
+        <p:spPr>
+          <a:xfrm>
+            <a:off x="10698480" y="6309360"/>
+            <a:ext cx="1188720" cy="274320"/>
+          </a:xfrm>
+          <a:prstGeom prst="rect">
+            <a:avLst/>
+          </a:prstGeom>
+          <a:noFill/>
+          <a:ln/>
+        </p:spPr>
+        <p:txBody>
+          <a:bodyPr wrap="square" rtlCol="0" anchor="ctr"/>
           <a:lstStyle/>
           <a:p>
             <a:pPr algn="r" indent="0" marL="0">
@@ -3762,32 +3546,32 @@
         </p:nvSpPr>
         <p:spPr>
           <a:xfrm>
-            <a:off x="594360" y="457200"/>
-            <a:ext cx="11002975" cy="320040"/>
-          </a:xfrm>
-          <a:prstGeom prst="rect">
-            <a:avLst/>
-          </a:prstGeom>
-          <a:noFill/>
-          <a:ln/>
-        </p:spPr>
-        <p:txBody>
-          <a:bodyPr wrap="square" rtlCol="0" anchor="t"/>
+            <a:off x="640080" y="502920"/>
+            <a:ext cx="10058400" cy="365760"/>
+          </a:xfrm>
+          <a:prstGeom prst="rect">
+            <a:avLst/>
+          </a:prstGeom>
+          <a:noFill/>
+          <a:ln/>
+        </p:spPr>
+        <p:txBody>
+          <a:bodyPr wrap="square" rtlCol="0" anchor="ctr"/>
           <a:lstStyle/>
           <a:p>
             <a:pPr indent="0" marL="0">
               <a:buNone/>
             </a:pPr>
             <a:r>
-              <a:rPr lang="en-US" sz="1300" b="1" spc="200" kern="0" dirty="0">
-                <a:solidFill>
-                  <a:srgbClr val="27D3EE"/>
-                </a:solidFill>
-                <a:latin typeface="Calibri" pitchFamily="34" charset="0"/>
-                <a:ea typeface="Calibri" pitchFamily="34" charset="-122"/>
-                <a:cs typeface="Calibri" pitchFamily="34" charset="-120"/>
-              </a:rPr>
-              <a:t>ИТОГ УРОКА</a:t>
+              <a:rPr lang="en-US" sz="1300" b="1" spc="300" kern="0" dirty="0">
+                <a:solidFill>
+                  <a:srgbClr val="2DD4BF"/>
+                </a:solidFill>
+                <a:latin typeface="Calibri" pitchFamily="34" charset="0"/>
+                <a:ea typeface="Calibri" pitchFamily="34" charset="-122"/>
+                <a:cs typeface="Calibri" pitchFamily="34" charset="-120"/>
+              </a:rPr>
+              <a:t>АНАЛОГИЯ</a:t>
             </a:r>
             <a:endParaRPr lang="en-US" sz="1300" dirty="0"/>
           </a:p>
@@ -3801,24 +3585,24 @@
         </p:nvSpPr>
         <p:spPr>
           <a:xfrm>
-            <a:off x="594360" y="749808"/>
-            <a:ext cx="11002975" cy="822960"/>
-          </a:xfrm>
-          <a:prstGeom prst="rect">
-            <a:avLst/>
-          </a:prstGeom>
-          <a:noFill/>
-          <a:ln/>
-        </p:spPr>
-        <p:txBody>
-          <a:bodyPr wrap="square" rtlCol="0" anchor="t"/>
+            <a:off x="640080" y="868680"/>
+            <a:ext cx="10515600" cy="640080"/>
+          </a:xfrm>
+          <a:prstGeom prst="rect">
+            <a:avLst/>
+          </a:prstGeom>
+          <a:noFill/>
+          <a:ln/>
+        </p:spPr>
+        <p:txBody>
+          <a:bodyPr wrap="square" rtlCol="0" anchor="ctr"/>
           <a:lstStyle/>
           <a:p>
             <a:pPr indent="0" marL="0">
               <a:buNone/>
             </a:pPr>
             <a:r>
-              <a:rPr lang="en-US" sz="3000" b="1" dirty="0">
+              <a:rPr lang="en-US" sz="3200" b="1" dirty="0">
                 <a:solidFill>
                   <a:srgbClr val="FFFFFF"/>
                 </a:solidFill>
@@ -3826,9 +3610,9 @@
                 <a:ea typeface="Calibri" pitchFamily="34" charset="-122"/>
                 <a:cs typeface="Calibri" pitchFamily="34" charset="-120"/>
               </a:rPr>
-              <a:t>Что должно быть к концу</a:t>
-            </a:r>
-            <a:endParaRPr lang="en-US" sz="3000" dirty="0"/>
+              <a:t>Проект — как постройка дома</a:t>
+            </a:r>
+            <a:endParaRPr lang="en-US" sz="3200" dirty="0"/>
           </a:p>
         </p:txBody>
       </p:sp>
@@ -3840,12 +3624,12 @@
         </p:nvSpPr>
         <p:spPr>
           <a:xfrm>
-            <a:off x="594360" y="1920240"/>
-            <a:ext cx="5577840" cy="4023360"/>
+            <a:off x="640080" y="1874520"/>
+            <a:ext cx="10881360" cy="822960"/>
           </a:xfrm>
           <a:prstGeom prst="roundRect">
             <a:avLst>
-              <a:gd name="adj" fmla="val 2727"/>
+              <a:gd name="adj" fmla="val 11111"/>
             </a:avLst>
           </a:prstGeom>
           <a:solidFill>
@@ -3856,32 +3640,1545 @@
       </p:sp>
       <p:sp>
         <p:nvSpPr>
-          <p:cNvPr id="5" name="Text 3"/>
-          <p:cNvSpPr/>
-          <p:nvPr/>
-        </p:nvSpPr>
-        <p:spPr>
-          <a:xfrm>
-            <a:off x="960120" y="2148840"/>
-            <a:ext cx="4572000" cy="457200"/>
-          </a:xfrm>
-          <a:prstGeom prst="rect">
-            <a:avLst/>
-          </a:prstGeom>
-          <a:noFill/>
-          <a:ln/>
-        </p:spPr>
-        <p:txBody>
-          <a:bodyPr wrap="square" rtlCol="0" anchor="t"/>
+          <p:cNvPr id="5" name="Shape 3"/>
+          <p:cNvSpPr/>
+          <p:nvPr/>
+        </p:nvSpPr>
+        <p:spPr>
+          <a:xfrm>
+            <a:off x="868680" y="2039112"/>
+            <a:ext cx="493776" cy="493776"/>
+          </a:xfrm>
+          <a:prstGeom prst="ellipse">
+            <a:avLst/>
+          </a:prstGeom>
+          <a:solidFill>
+            <a:srgbClr val="2C2552"/>
+          </a:solidFill>
+          <a:ln/>
+        </p:spPr>
+      </p:sp>
+      <p:pic>
+        <p:nvPicPr>
+          <p:cNvPr id="6" name="Image 0" descr="preencoded.png">    </p:cNvPr>
+          <p:cNvPicPr>
+            <a:picLocks noChangeAspect="1"/>
+          </p:cNvPicPr>
+          <p:nvPr/>
+        </p:nvPicPr>
+        <p:blipFill>
+          <a:blip r:embed="rId1"/>
+          <a:stretch>
+            <a:fillRect/>
+          </a:stretch>
+        </p:blipFill>
+        <p:spPr>
+          <a:xfrm>
+            <a:off x="987552" y="2157984"/>
+            <a:ext cx="256032" cy="256032"/>
+          </a:xfrm>
+          <a:prstGeom prst="rect">
+            <a:avLst/>
+          </a:prstGeom>
+        </p:spPr>
+      </p:pic>
+      <p:sp>
+        <p:nvSpPr>
+          <p:cNvPr id="7" name="Text 4"/>
+          <p:cNvSpPr/>
+          <p:nvPr/>
+        </p:nvSpPr>
+        <p:spPr>
+          <a:xfrm>
+            <a:off x="1645920" y="1965960"/>
+            <a:ext cx="2377440" cy="640080"/>
+          </a:xfrm>
+          <a:prstGeom prst="rect">
+            <a:avLst/>
+          </a:prstGeom>
+          <a:noFill/>
+          <a:ln/>
+        </p:spPr>
+        <p:txBody>
+          <a:bodyPr wrap="square" rtlCol="0" anchor="ctr"/>
           <a:lstStyle/>
           <a:p>
             <a:pPr indent="0" marL="0">
               <a:buNone/>
             </a:pPr>
             <a:r>
+              <a:rPr lang="en-US" sz="1800" b="1" dirty="0">
+                <a:solidFill>
+                  <a:srgbClr val="2DD4BF"/>
+                </a:solidFill>
+                <a:latin typeface="Calibri" pitchFamily="34" charset="0"/>
+                <a:ea typeface="Calibri" pitchFamily="34" charset="-122"/>
+                <a:cs typeface="Calibri" pitchFamily="34" charset="-120"/>
+              </a:rPr>
+              <a:t>Задача</a:t>
+            </a:r>
+            <a:endParaRPr lang="en-US" sz="1800" dirty="0"/>
+          </a:p>
+        </p:txBody>
+      </p:sp>
+      <p:sp>
+        <p:nvSpPr>
+          <p:cNvPr id="8" name="Text 5"/>
+          <p:cNvSpPr/>
+          <p:nvPr/>
+        </p:nvSpPr>
+        <p:spPr>
+          <a:xfrm>
+            <a:off x="4023360" y="1965960"/>
+            <a:ext cx="7315200" cy="640080"/>
+          </a:xfrm>
+          <a:prstGeom prst="rect">
+            <a:avLst/>
+          </a:prstGeom>
+          <a:noFill/>
+          <a:ln/>
+        </p:spPr>
+        <p:txBody>
+          <a:bodyPr wrap="square" rtlCol="0" anchor="ctr"/>
+          <a:lstStyle/>
+          <a:p>
+            <a:pPr indent="0" marL="0">
+              <a:buNone/>
+            </a:pPr>
+            <a:r>
+              <a:rPr lang="en-US" sz="1600" dirty="0">
+                <a:solidFill>
+                  <a:srgbClr val="D9D4F2"/>
+                </a:solidFill>
+                <a:latin typeface="Calibri" pitchFamily="34" charset="0"/>
+                <a:ea typeface="Calibri" pitchFamily="34" charset="-122"/>
+                <a:cs typeface="Calibri" pitchFamily="34" charset="-120"/>
+              </a:rPr>
+              <a:t>чертёж дома — что и зачем строим</a:t>
+            </a:r>
+            <a:endParaRPr lang="en-US" sz="1600" dirty="0"/>
+          </a:p>
+        </p:txBody>
+      </p:sp>
+      <p:sp>
+        <p:nvSpPr>
+          <p:cNvPr id="9" name="Shape 6"/>
+          <p:cNvSpPr/>
+          <p:nvPr/>
+        </p:nvSpPr>
+        <p:spPr>
+          <a:xfrm>
+            <a:off x="640080" y="2834640"/>
+            <a:ext cx="10881360" cy="822960"/>
+          </a:xfrm>
+          <a:prstGeom prst="roundRect">
+            <a:avLst>
+              <a:gd name="adj" fmla="val 11111"/>
+            </a:avLst>
+          </a:prstGeom>
+          <a:solidFill>
+            <a:srgbClr val="241E42"/>
+          </a:solidFill>
+          <a:ln/>
+        </p:spPr>
+      </p:sp>
+      <p:sp>
+        <p:nvSpPr>
+          <p:cNvPr id="10" name="Shape 7"/>
+          <p:cNvSpPr/>
+          <p:nvPr/>
+        </p:nvSpPr>
+        <p:spPr>
+          <a:xfrm>
+            <a:off x="868680" y="2999232"/>
+            <a:ext cx="493776" cy="493776"/>
+          </a:xfrm>
+          <a:prstGeom prst="ellipse">
+            <a:avLst/>
+          </a:prstGeom>
+          <a:solidFill>
+            <a:srgbClr val="2C2552"/>
+          </a:solidFill>
+          <a:ln/>
+        </p:spPr>
+      </p:sp>
+      <p:pic>
+        <p:nvPicPr>
+          <p:cNvPr id="11" name="Image 1" descr="preencoded.png">    </p:cNvPr>
+          <p:cNvPicPr>
+            <a:picLocks noChangeAspect="1"/>
+          </p:cNvPicPr>
+          <p:nvPr/>
+        </p:nvPicPr>
+        <p:blipFill>
+          <a:blip r:embed="rId2"/>
+          <a:stretch>
+            <a:fillRect/>
+          </a:stretch>
+        </p:blipFill>
+        <p:spPr>
+          <a:xfrm>
+            <a:off x="987552" y="3118104"/>
+            <a:ext cx="256032" cy="256032"/>
+          </a:xfrm>
+          <a:prstGeom prst="rect">
+            <a:avLst/>
+          </a:prstGeom>
+        </p:spPr>
+      </p:pic>
+      <p:sp>
+        <p:nvSpPr>
+          <p:cNvPr id="12" name="Text 8"/>
+          <p:cNvSpPr/>
+          <p:nvPr/>
+        </p:nvSpPr>
+        <p:spPr>
+          <a:xfrm>
+            <a:off x="1645920" y="2926080"/>
+            <a:ext cx="2377440" cy="640080"/>
+          </a:xfrm>
+          <a:prstGeom prst="rect">
+            <a:avLst/>
+          </a:prstGeom>
+          <a:noFill/>
+          <a:ln/>
+        </p:spPr>
+        <p:txBody>
+          <a:bodyPr wrap="square" rtlCol="0" anchor="ctr"/>
+          <a:lstStyle/>
+          <a:p>
+            <a:pPr indent="0" marL="0">
+              <a:buNone/>
+            </a:pPr>
+            <a:r>
+              <a:rPr lang="en-US" sz="1800" b="1" dirty="0">
+                <a:solidFill>
+                  <a:srgbClr val="2DD4BF"/>
+                </a:solidFill>
+                <a:latin typeface="Calibri" pitchFamily="34" charset="0"/>
+                <a:ea typeface="Calibri" pitchFamily="34" charset="-122"/>
+                <a:cs typeface="Calibri" pitchFamily="34" charset="-120"/>
+              </a:rPr>
+              <a:t>Данные</a:t>
+            </a:r>
+            <a:endParaRPr lang="en-US" sz="1800" dirty="0"/>
+          </a:p>
+        </p:txBody>
+      </p:sp>
+      <p:sp>
+        <p:nvSpPr>
+          <p:cNvPr id="13" name="Text 9"/>
+          <p:cNvSpPr/>
+          <p:nvPr/>
+        </p:nvSpPr>
+        <p:spPr>
+          <a:xfrm>
+            <a:off x="4023360" y="2926080"/>
+            <a:ext cx="7315200" cy="640080"/>
+          </a:xfrm>
+          <a:prstGeom prst="rect">
+            <a:avLst/>
+          </a:prstGeom>
+          <a:noFill/>
+          <a:ln/>
+        </p:spPr>
+        <p:txBody>
+          <a:bodyPr wrap="square" rtlCol="0" anchor="ctr"/>
+          <a:lstStyle/>
+          <a:p>
+            <a:pPr indent="0" marL="0">
+              <a:buNone/>
+            </a:pPr>
+            <a:r>
+              <a:rPr lang="en-US" sz="1600" dirty="0">
+                <a:solidFill>
+                  <a:srgbClr val="D9D4F2"/>
+                </a:solidFill>
+                <a:latin typeface="Calibri" pitchFamily="34" charset="0"/>
+                <a:ea typeface="Calibri" pitchFamily="34" charset="-122"/>
+                <a:cs typeface="Calibri" pitchFamily="34" charset="-120"/>
+              </a:rPr>
+              <a:t>материалы — без них не построить</a:t>
+            </a:r>
+            <a:endParaRPr lang="en-US" sz="1600" dirty="0"/>
+          </a:p>
+        </p:txBody>
+      </p:sp>
+      <p:sp>
+        <p:nvSpPr>
+          <p:cNvPr id="14" name="Shape 10"/>
+          <p:cNvSpPr/>
+          <p:nvPr/>
+        </p:nvSpPr>
+        <p:spPr>
+          <a:xfrm>
+            <a:off x="640080" y="3794760"/>
+            <a:ext cx="10881360" cy="822960"/>
+          </a:xfrm>
+          <a:prstGeom prst="roundRect">
+            <a:avLst>
+              <a:gd name="adj" fmla="val 11111"/>
+            </a:avLst>
+          </a:prstGeom>
+          <a:solidFill>
+            <a:srgbClr val="241E42"/>
+          </a:solidFill>
+          <a:ln/>
+        </p:spPr>
+      </p:sp>
+      <p:sp>
+        <p:nvSpPr>
+          <p:cNvPr id="15" name="Shape 11"/>
+          <p:cNvSpPr/>
+          <p:nvPr/>
+        </p:nvSpPr>
+        <p:spPr>
+          <a:xfrm>
+            <a:off x="868680" y="3959352"/>
+            <a:ext cx="493776" cy="493776"/>
+          </a:xfrm>
+          <a:prstGeom prst="ellipse">
+            <a:avLst/>
+          </a:prstGeom>
+          <a:solidFill>
+            <a:srgbClr val="2C2552"/>
+          </a:solidFill>
+          <a:ln/>
+        </p:spPr>
+      </p:sp>
+      <p:pic>
+        <p:nvPicPr>
+          <p:cNvPr id="16" name="Image 2" descr="preencoded.png">    </p:cNvPr>
+          <p:cNvPicPr>
+            <a:picLocks noChangeAspect="1"/>
+          </p:cNvPicPr>
+          <p:nvPr/>
+        </p:nvPicPr>
+        <p:blipFill>
+          <a:blip r:embed="rId3"/>
+          <a:stretch>
+            <a:fillRect/>
+          </a:stretch>
+        </p:blipFill>
+        <p:spPr>
+          <a:xfrm>
+            <a:off x="987552" y="4078224"/>
+            <a:ext cx="256032" cy="256032"/>
+          </a:xfrm>
+          <a:prstGeom prst="rect">
+            <a:avLst/>
+          </a:prstGeom>
+        </p:spPr>
+      </p:pic>
+      <p:sp>
+        <p:nvSpPr>
+          <p:cNvPr id="17" name="Text 12"/>
+          <p:cNvSpPr/>
+          <p:nvPr/>
+        </p:nvSpPr>
+        <p:spPr>
+          <a:xfrm>
+            <a:off x="1645920" y="3886200"/>
+            <a:ext cx="2377440" cy="640080"/>
+          </a:xfrm>
+          <a:prstGeom prst="rect">
+            <a:avLst/>
+          </a:prstGeom>
+          <a:noFill/>
+          <a:ln/>
+        </p:spPr>
+        <p:txBody>
+          <a:bodyPr wrap="square" rtlCol="0" anchor="ctr"/>
+          <a:lstStyle/>
+          <a:p>
+            <a:pPr indent="0" marL="0">
+              <a:buNone/>
+            </a:pPr>
+            <a:r>
+              <a:rPr lang="en-US" sz="1800" b="1" dirty="0">
+                <a:solidFill>
+                  <a:srgbClr val="2DD4BF"/>
+                </a:solidFill>
+                <a:latin typeface="Calibri" pitchFamily="34" charset="0"/>
+                <a:ea typeface="Calibri" pitchFamily="34" charset="-122"/>
+                <a:cs typeface="Calibri" pitchFamily="34" charset="-120"/>
+              </a:rPr>
+              <a:t>Baseline</a:t>
+            </a:r>
+            <a:endParaRPr lang="en-US" sz="1800" dirty="0"/>
+          </a:p>
+        </p:txBody>
+      </p:sp>
+      <p:sp>
+        <p:nvSpPr>
+          <p:cNvPr id="18" name="Text 13"/>
+          <p:cNvSpPr/>
+          <p:nvPr/>
+        </p:nvSpPr>
+        <p:spPr>
+          <a:xfrm>
+            <a:off x="4023360" y="3886200"/>
+            <a:ext cx="7315200" cy="640080"/>
+          </a:xfrm>
+          <a:prstGeom prst="rect">
+            <a:avLst/>
+          </a:prstGeom>
+          <a:noFill/>
+          <a:ln/>
+        </p:spPr>
+        <p:txBody>
+          <a:bodyPr wrap="square" rtlCol="0" anchor="ctr"/>
+          <a:lstStyle/>
+          <a:p>
+            <a:pPr indent="0" marL="0">
+              <a:buNone/>
+            </a:pPr>
+            <a:r>
+              <a:rPr lang="en-US" sz="1600" dirty="0">
+                <a:solidFill>
+                  <a:srgbClr val="D9D4F2"/>
+                </a:solidFill>
+                <a:latin typeface="Calibri" pitchFamily="34" charset="0"/>
+                <a:ea typeface="Calibri" pitchFamily="34" charset="-122"/>
+                <a:cs typeface="Calibri" pitchFamily="34" charset="-120"/>
+              </a:rPr>
+              <a:t>отметка на стене — её нужно перерасти</a:t>
+            </a:r>
+            <a:endParaRPr lang="en-US" sz="1600" dirty="0"/>
+          </a:p>
+        </p:txBody>
+      </p:sp>
+      <p:sp>
+        <p:nvSpPr>
+          <p:cNvPr id="19" name="Shape 14"/>
+          <p:cNvSpPr/>
+          <p:nvPr/>
+        </p:nvSpPr>
+        <p:spPr>
+          <a:xfrm>
+            <a:off x="640080" y="4754880"/>
+            <a:ext cx="10881360" cy="822960"/>
+          </a:xfrm>
+          <a:prstGeom prst="roundRect">
+            <a:avLst>
+              <a:gd name="adj" fmla="val 11111"/>
+            </a:avLst>
+          </a:prstGeom>
+          <a:solidFill>
+            <a:srgbClr val="241E42"/>
+          </a:solidFill>
+          <a:ln/>
+        </p:spPr>
+      </p:sp>
+      <p:sp>
+        <p:nvSpPr>
+          <p:cNvPr id="20" name="Shape 15"/>
+          <p:cNvSpPr/>
+          <p:nvPr/>
+        </p:nvSpPr>
+        <p:spPr>
+          <a:xfrm>
+            <a:off x="868680" y="4919472"/>
+            <a:ext cx="493776" cy="493776"/>
+          </a:xfrm>
+          <a:prstGeom prst="ellipse">
+            <a:avLst/>
+          </a:prstGeom>
+          <a:solidFill>
+            <a:srgbClr val="2C2552"/>
+          </a:solidFill>
+          <a:ln/>
+        </p:spPr>
+      </p:sp>
+      <p:pic>
+        <p:nvPicPr>
+          <p:cNvPr id="21" name="Image 3" descr="preencoded.png">    </p:cNvPr>
+          <p:cNvPicPr>
+            <a:picLocks noChangeAspect="1"/>
+          </p:cNvPicPr>
+          <p:nvPr/>
+        </p:nvPicPr>
+        <p:blipFill>
+          <a:blip r:embed="rId4"/>
+          <a:stretch>
+            <a:fillRect/>
+          </a:stretch>
+        </p:blipFill>
+        <p:spPr>
+          <a:xfrm>
+            <a:off x="987552" y="5038344"/>
+            <a:ext cx="256032" cy="256032"/>
+          </a:xfrm>
+          <a:prstGeom prst="rect">
+            <a:avLst/>
+          </a:prstGeom>
+        </p:spPr>
+      </p:pic>
+      <p:sp>
+        <p:nvSpPr>
+          <p:cNvPr id="22" name="Text 16"/>
+          <p:cNvSpPr/>
+          <p:nvPr/>
+        </p:nvSpPr>
+        <p:spPr>
+          <a:xfrm>
+            <a:off x="1645920" y="4846320"/>
+            <a:ext cx="2377440" cy="640080"/>
+          </a:xfrm>
+          <a:prstGeom prst="rect">
+            <a:avLst/>
+          </a:prstGeom>
+          <a:noFill/>
+          <a:ln/>
+        </p:spPr>
+        <p:txBody>
+          <a:bodyPr wrap="square" rtlCol="0" anchor="ctr"/>
+          <a:lstStyle/>
+          <a:p>
+            <a:pPr indent="0" marL="0">
+              <a:buNone/>
+            </a:pPr>
+            <a:r>
+              <a:rPr lang="en-US" sz="1800" b="1" dirty="0">
+                <a:solidFill>
+                  <a:srgbClr val="2DD4BF"/>
+                </a:solidFill>
+                <a:latin typeface="Calibri" pitchFamily="34" charset="0"/>
+                <a:ea typeface="Calibri" pitchFamily="34" charset="-122"/>
+                <a:cs typeface="Calibri" pitchFamily="34" charset="-120"/>
+              </a:rPr>
+              <a:t>Pipeline</a:t>
+            </a:r>
+            <a:endParaRPr lang="en-US" sz="1800" dirty="0"/>
+          </a:p>
+        </p:txBody>
+      </p:sp>
+      <p:sp>
+        <p:nvSpPr>
+          <p:cNvPr id="23" name="Text 17"/>
+          <p:cNvSpPr/>
+          <p:nvPr/>
+        </p:nvSpPr>
+        <p:spPr>
+          <a:xfrm>
+            <a:off x="4023360" y="4846320"/>
+            <a:ext cx="7315200" cy="640080"/>
+          </a:xfrm>
+          <a:prstGeom prst="rect">
+            <a:avLst/>
+          </a:prstGeom>
+          <a:noFill/>
+          <a:ln/>
+        </p:spPr>
+        <p:txBody>
+          <a:bodyPr wrap="square" rtlCol="0" anchor="ctr"/>
+          <a:lstStyle/>
+          <a:p>
+            <a:pPr indent="0" marL="0">
+              <a:buNone/>
+            </a:pPr>
+            <a:r>
+              <a:rPr lang="en-US" sz="1600" dirty="0">
+                <a:solidFill>
+                  <a:srgbClr val="D9D4F2"/>
+                </a:solidFill>
+                <a:latin typeface="Calibri" pitchFamily="34" charset="0"/>
+                <a:ea typeface="Calibri" pitchFamily="34" charset="-122"/>
+                <a:cs typeface="Calibri" pitchFamily="34" charset="-120"/>
+              </a:rPr>
+              <a:t>каркас и сборка — всё держится вместе</a:t>
+            </a:r>
+            <a:endParaRPr lang="en-US" sz="1600" dirty="0"/>
+          </a:p>
+        </p:txBody>
+      </p:sp>
+      <p:sp>
+        <p:nvSpPr>
+          <p:cNvPr id="24" name="Text 18"/>
+          <p:cNvSpPr/>
+          <p:nvPr/>
+        </p:nvSpPr>
+        <p:spPr>
+          <a:xfrm>
+            <a:off x="640080" y="6172200"/>
+            <a:ext cx="10881360" cy="457200"/>
+          </a:xfrm>
+          <a:prstGeom prst="rect">
+            <a:avLst/>
+          </a:prstGeom>
+          <a:noFill/>
+          <a:ln/>
+        </p:spPr>
+        <p:txBody>
+          <a:bodyPr wrap="square" rtlCol="0" anchor="ctr"/>
+          <a:lstStyle/>
+          <a:p>
+            <a:pPr indent="0" marL="0">
+              <a:buNone/>
+            </a:pPr>
+            <a:r>
+              <a:rPr lang="en-US" sz="1400" i="1" dirty="0">
+                <a:solidFill>
+                  <a:srgbClr val="9E96C8"/>
+                </a:solidFill>
+                <a:latin typeface="Calibri" pitchFamily="34" charset="0"/>
+                <a:ea typeface="Calibri" pitchFamily="34" charset="-122"/>
+                <a:cs typeface="Calibri" pitchFamily="34" charset="-120"/>
+              </a:rPr>
+              <a:t>Нельзя строить дом без чертежа и материалов — модель тоже. А baseline показывает, что модель реально что-то умеет.</a:t>
+            </a:r>
+            <a:endParaRPr lang="en-US" sz="1400" dirty="0"/>
+          </a:p>
+        </p:txBody>
+      </p:sp>
+      <p:sp>
+        <p:nvSpPr>
+          <p:cNvPr id="25" name="Text 19"/>
+          <p:cNvSpPr/>
+          <p:nvPr/>
+        </p:nvSpPr>
+        <p:spPr>
+          <a:xfrm>
+            <a:off x="10698480" y="6309360"/>
+            <a:ext cx="1188720" cy="274320"/>
+          </a:xfrm>
+          <a:prstGeom prst="rect">
+            <a:avLst/>
+          </a:prstGeom>
+          <a:noFill/>
+          <a:ln/>
+        </p:spPr>
+        <p:txBody>
+          <a:bodyPr wrap="square" rtlCol="0" anchor="ctr"/>
+          <a:lstStyle/>
+          <a:p>
+            <a:pPr algn="r" indent="0" marL="0">
+              <a:buNone/>
+            </a:pPr>
+            <a:r>
+              <a:rPr lang="en-US" sz="1100" dirty="0">
+                <a:solidFill>
+                  <a:srgbClr val="9E96C8"/>
+                </a:solidFill>
+                <a:latin typeface="Calibri" pitchFamily="34" charset="0"/>
+                <a:ea typeface="Calibri" pitchFamily="34" charset="-122"/>
+                <a:cs typeface="Calibri" pitchFamily="34" charset="-120"/>
+              </a:rPr>
+              <a:t>Урок 21</a:t>
+            </a:r>
+            <a:endParaRPr lang="en-US" sz="1100" dirty="0"/>
+          </a:p>
+        </p:txBody>
+      </p:sp>
+    </p:spTree>
+  </p:cSld>
+  <p:clrMapOvr>
+    <a:masterClrMapping/>
+  </p:clrMapOvr>
+</p:sld>
+</file>
+
+<file path=ppt/slides/slide6.xml><?xml version="1.0" encoding="utf-8"?>
+<p:sld xmlns:a="http://schemas.openxmlformats.org/drawingml/2006/main" xmlns:r="http://schemas.openxmlformats.org/officeDocument/2006/relationships" xmlns:p="http://schemas.openxmlformats.org/presentationml/2006/main">
+  <p:cSld name="Slide 6">
+    <p:bg>
+      <p:bgPr>
+        <a:solidFill>
+          <a:srgbClr val="17132E"/>
+        </a:solidFill>
+      </p:bgPr>
+    </p:bg>
+    <p:spTree>
+      <p:nvGrpSpPr>
+        <p:cNvPr id="1" name=""/>
+        <p:cNvGrpSpPr/>
+        <p:nvPr/>
+      </p:nvGrpSpPr>
+      <p:grpSpPr>
+        <a:xfrm>
+          <a:off x="0" y="0"/>
+          <a:ext cx="0" cy="0"/>
+          <a:chOff x="0" y="0"/>
+          <a:chExt cx="0" cy="0"/>
+        </a:xfrm>
+      </p:grpSpPr>
+      <p:sp>
+        <p:nvSpPr>
+          <p:cNvPr id="2" name="Text 0"/>
+          <p:cNvSpPr/>
+          <p:nvPr/>
+        </p:nvSpPr>
+        <p:spPr>
+          <a:xfrm>
+            <a:off x="640080" y="502920"/>
+            <a:ext cx="10058400" cy="365760"/>
+          </a:xfrm>
+          <a:prstGeom prst="rect">
+            <a:avLst/>
+          </a:prstGeom>
+          <a:noFill/>
+          <a:ln/>
+        </p:spPr>
+        <p:txBody>
+          <a:bodyPr wrap="square" rtlCol="0" anchor="ctr"/>
+          <a:lstStyle/>
+          <a:p>
+            <a:pPr indent="0" marL="0">
+              <a:buNone/>
+            </a:pPr>
+            <a:r>
+              <a:rPr lang="en-US" sz="1300" b="1" spc="300" kern="0" dirty="0">
+                <a:solidFill>
+                  <a:srgbClr val="27D3EE"/>
+                </a:solidFill>
+                <a:latin typeface="Calibri" pitchFamily="34" charset="0"/>
+                <a:ea typeface="Calibri" pitchFamily="34" charset="-122"/>
+                <a:cs typeface="Calibri" pitchFamily="34" charset="-120"/>
+              </a:rPr>
+              <a:t>ПРАКТИКА</a:t>
+            </a:r>
+            <a:endParaRPr lang="en-US" sz="1300" dirty="0"/>
+          </a:p>
+        </p:txBody>
+      </p:sp>
+      <p:sp>
+        <p:nvSpPr>
+          <p:cNvPr id="3" name="Text 1"/>
+          <p:cNvSpPr/>
+          <p:nvPr/>
+        </p:nvSpPr>
+        <p:spPr>
+          <a:xfrm>
+            <a:off x="640080" y="868680"/>
+            <a:ext cx="10058400" cy="640080"/>
+          </a:xfrm>
+          <a:prstGeom prst="rect">
+            <a:avLst/>
+          </a:prstGeom>
+          <a:noFill/>
+          <a:ln/>
+        </p:spPr>
+        <p:txBody>
+          <a:bodyPr wrap="square" rtlCol="0" anchor="ctr"/>
+          <a:lstStyle/>
+          <a:p>
+            <a:pPr indent="0" marL="0">
+              <a:buNone/>
+            </a:pPr>
+            <a:r>
+              <a:rPr lang="en-US" sz="3200" b="1" dirty="0">
+                <a:solidFill>
+                  <a:srgbClr val="FFFFFF"/>
+                </a:solidFill>
+                <a:latin typeface="Calibri" pitchFamily="34" charset="0"/>
+                <a:ea typeface="Calibri" pitchFamily="34" charset="-122"/>
+                <a:cs typeface="Calibri" pitchFamily="34" charset="-120"/>
+              </a:rPr>
+              <a:t>Старт проекта: 4 шага</a:t>
+            </a:r>
+            <a:endParaRPr lang="en-US" sz="3200" dirty="0"/>
+          </a:p>
+        </p:txBody>
+      </p:sp>
+      <p:sp>
+        <p:nvSpPr>
+          <p:cNvPr id="4" name="Shape 2"/>
+          <p:cNvSpPr/>
+          <p:nvPr/>
+        </p:nvSpPr>
+        <p:spPr>
+          <a:xfrm>
+            <a:off x="640080" y="2468880"/>
+            <a:ext cx="2331720" cy="2011680"/>
+          </a:xfrm>
+          <a:prstGeom prst="roundRect">
+            <a:avLst>
+              <a:gd name="adj" fmla="val 5455"/>
+            </a:avLst>
+          </a:prstGeom>
+          <a:solidFill>
+            <a:srgbClr val="241E42"/>
+          </a:solidFill>
+          <a:ln/>
+        </p:spPr>
+      </p:sp>
+      <p:sp>
+        <p:nvSpPr>
+          <p:cNvPr id="5" name="Shape 3"/>
+          <p:cNvSpPr/>
+          <p:nvPr/>
+        </p:nvSpPr>
+        <p:spPr>
+          <a:xfrm>
+            <a:off x="1303020" y="2788920"/>
+            <a:ext cx="1005840" cy="1005840"/>
+          </a:xfrm>
+          <a:prstGeom prst="ellipse">
+            <a:avLst/>
+          </a:prstGeom>
+          <a:solidFill>
+            <a:srgbClr val="2C2552"/>
+          </a:solidFill>
+          <a:ln/>
+        </p:spPr>
+      </p:sp>
+      <p:pic>
+        <p:nvPicPr>
+          <p:cNvPr id="6" name="Image 0" descr="preencoded.png">    </p:cNvPr>
+          <p:cNvPicPr>
+            <a:picLocks noChangeAspect="1"/>
+          </p:cNvPicPr>
+          <p:nvPr/>
+        </p:nvPicPr>
+        <p:blipFill>
+          <a:blip r:embed="rId1"/>
+          <a:stretch>
+            <a:fillRect/>
+          </a:stretch>
+        </p:blipFill>
+        <p:spPr>
+          <a:xfrm>
+            <a:off x="1504188" y="2990088"/>
+            <a:ext cx="603504" cy="603504"/>
+          </a:xfrm>
+          <a:prstGeom prst="rect">
+            <a:avLst/>
+          </a:prstGeom>
+        </p:spPr>
+      </p:pic>
+      <p:sp>
+        <p:nvSpPr>
+          <p:cNvPr id="7" name="Text 4"/>
+          <p:cNvSpPr/>
+          <p:nvPr/>
+        </p:nvSpPr>
+        <p:spPr>
+          <a:xfrm>
+            <a:off x="640080" y="3886200"/>
+            <a:ext cx="2331720" cy="457200"/>
+          </a:xfrm>
+          <a:prstGeom prst="rect">
+            <a:avLst/>
+          </a:prstGeom>
+          <a:noFill/>
+          <a:ln/>
+        </p:spPr>
+        <p:txBody>
+          <a:bodyPr wrap="square" rtlCol="0" anchor="ctr"/>
+          <a:lstStyle/>
+          <a:p>
+            <a:pPr algn="ctr" indent="0" marL="0">
+              <a:buNone/>
+            </a:pPr>
+            <a:r>
+              <a:rPr lang="en-US" sz="1800" b="1" dirty="0">
+                <a:solidFill>
+                  <a:srgbClr val="FFFFFF"/>
+                </a:solidFill>
+                <a:latin typeface="Calibri" pitchFamily="34" charset="0"/>
+                <a:ea typeface="Calibri" pitchFamily="34" charset="-122"/>
+                <a:cs typeface="Calibri" pitchFamily="34" charset="-120"/>
+              </a:rPr>
+              <a:t>Задача</a:t>
+            </a:r>
+            <a:endParaRPr lang="en-US" sz="1800" dirty="0"/>
+          </a:p>
+        </p:txBody>
+      </p:sp>
+      <p:sp>
+        <p:nvSpPr>
+          <p:cNvPr id="8" name="Text 5"/>
+          <p:cNvSpPr/>
+          <p:nvPr/>
+        </p:nvSpPr>
+        <p:spPr>
+          <a:xfrm>
+            <a:off x="2990088" y="3108960"/>
+            <a:ext cx="420624" cy="640080"/>
+          </a:xfrm>
+          <a:prstGeom prst="rect">
+            <a:avLst/>
+          </a:prstGeom>
+          <a:noFill/>
+          <a:ln/>
+        </p:spPr>
+        <p:txBody>
+          <a:bodyPr wrap="square" rtlCol="0" anchor="ctr"/>
+          <a:lstStyle/>
+          <a:p>
+            <a:pPr algn="ctr" indent="0" marL="0">
+              <a:buNone/>
+            </a:pPr>
+            <a:r>
+              <a:rPr lang="en-US" sz="3000" b="1" dirty="0">
+                <a:solidFill>
+                  <a:srgbClr val="9E96C8"/>
+                </a:solidFill>
+                <a:latin typeface="Calibri" pitchFamily="34" charset="0"/>
+                <a:ea typeface="Calibri" pitchFamily="34" charset="-122"/>
+                <a:cs typeface="Calibri" pitchFamily="34" charset="-120"/>
+              </a:rPr>
+              <a:t>→</a:t>
+            </a:r>
+            <a:endParaRPr lang="en-US" sz="3000" dirty="0"/>
+          </a:p>
+        </p:txBody>
+      </p:sp>
+      <p:sp>
+        <p:nvSpPr>
+          <p:cNvPr id="9" name="Shape 6"/>
+          <p:cNvSpPr/>
+          <p:nvPr/>
+        </p:nvSpPr>
+        <p:spPr>
+          <a:xfrm>
+            <a:off x="3429000" y="2468880"/>
+            <a:ext cx="2331720" cy="2011680"/>
+          </a:xfrm>
+          <a:prstGeom prst="roundRect">
+            <a:avLst>
+              <a:gd name="adj" fmla="val 5455"/>
+            </a:avLst>
+          </a:prstGeom>
+          <a:solidFill>
+            <a:srgbClr val="241E42"/>
+          </a:solidFill>
+          <a:ln/>
+        </p:spPr>
+      </p:sp>
+      <p:sp>
+        <p:nvSpPr>
+          <p:cNvPr id="10" name="Shape 7"/>
+          <p:cNvSpPr/>
+          <p:nvPr/>
+        </p:nvSpPr>
+        <p:spPr>
+          <a:xfrm>
+            <a:off x="4091940" y="2788920"/>
+            <a:ext cx="1005840" cy="1005840"/>
+          </a:xfrm>
+          <a:prstGeom prst="ellipse">
+            <a:avLst/>
+          </a:prstGeom>
+          <a:solidFill>
+            <a:srgbClr val="2C2552"/>
+          </a:solidFill>
+          <a:ln/>
+        </p:spPr>
+      </p:sp>
+      <p:pic>
+        <p:nvPicPr>
+          <p:cNvPr id="11" name="Image 1" descr="preencoded.png">    </p:cNvPr>
+          <p:cNvPicPr>
+            <a:picLocks noChangeAspect="1"/>
+          </p:cNvPicPr>
+          <p:nvPr/>
+        </p:nvPicPr>
+        <p:blipFill>
+          <a:blip r:embed="rId2"/>
+          <a:stretch>
+            <a:fillRect/>
+          </a:stretch>
+        </p:blipFill>
+        <p:spPr>
+          <a:xfrm>
+            <a:off x="4293108" y="2990088"/>
+            <a:ext cx="603504" cy="603504"/>
+          </a:xfrm>
+          <a:prstGeom prst="rect">
+            <a:avLst/>
+          </a:prstGeom>
+        </p:spPr>
+      </p:pic>
+      <p:sp>
+        <p:nvSpPr>
+          <p:cNvPr id="12" name="Text 8"/>
+          <p:cNvSpPr/>
+          <p:nvPr/>
+        </p:nvSpPr>
+        <p:spPr>
+          <a:xfrm>
+            <a:off x="3429000" y="3886200"/>
+            <a:ext cx="2331720" cy="457200"/>
+          </a:xfrm>
+          <a:prstGeom prst="rect">
+            <a:avLst/>
+          </a:prstGeom>
+          <a:noFill/>
+          <a:ln/>
+        </p:spPr>
+        <p:txBody>
+          <a:bodyPr wrap="square" rtlCol="0" anchor="ctr"/>
+          <a:lstStyle/>
+          <a:p>
+            <a:pPr algn="ctr" indent="0" marL="0">
+              <a:buNone/>
+            </a:pPr>
+            <a:r>
+              <a:rPr lang="en-US" sz="1800" b="1" dirty="0">
+                <a:solidFill>
+                  <a:srgbClr val="FFFFFF"/>
+                </a:solidFill>
+                <a:latin typeface="Calibri" pitchFamily="34" charset="0"/>
+                <a:ea typeface="Calibri" pitchFamily="34" charset="-122"/>
+                <a:cs typeface="Calibri" pitchFamily="34" charset="-120"/>
+              </a:rPr>
+              <a:t>Данные</a:t>
+            </a:r>
+            <a:endParaRPr lang="en-US" sz="1800" dirty="0"/>
+          </a:p>
+        </p:txBody>
+      </p:sp>
+      <p:sp>
+        <p:nvSpPr>
+          <p:cNvPr id="13" name="Text 9"/>
+          <p:cNvSpPr/>
+          <p:nvPr/>
+        </p:nvSpPr>
+        <p:spPr>
+          <a:xfrm>
+            <a:off x="5779008" y="3108960"/>
+            <a:ext cx="420624" cy="640080"/>
+          </a:xfrm>
+          <a:prstGeom prst="rect">
+            <a:avLst/>
+          </a:prstGeom>
+          <a:noFill/>
+          <a:ln/>
+        </p:spPr>
+        <p:txBody>
+          <a:bodyPr wrap="square" rtlCol="0" anchor="ctr"/>
+          <a:lstStyle/>
+          <a:p>
+            <a:pPr algn="ctr" indent="0" marL="0">
+              <a:buNone/>
+            </a:pPr>
+            <a:r>
+              <a:rPr lang="en-US" sz="3000" b="1" dirty="0">
+                <a:solidFill>
+                  <a:srgbClr val="9E96C8"/>
+                </a:solidFill>
+                <a:latin typeface="Calibri" pitchFamily="34" charset="0"/>
+                <a:ea typeface="Calibri" pitchFamily="34" charset="-122"/>
+                <a:cs typeface="Calibri" pitchFamily="34" charset="-120"/>
+              </a:rPr>
+              <a:t>→</a:t>
+            </a:r>
+            <a:endParaRPr lang="en-US" sz="3000" dirty="0"/>
+          </a:p>
+        </p:txBody>
+      </p:sp>
+      <p:sp>
+        <p:nvSpPr>
+          <p:cNvPr id="14" name="Shape 10"/>
+          <p:cNvSpPr/>
+          <p:nvPr/>
+        </p:nvSpPr>
+        <p:spPr>
+          <a:xfrm>
+            <a:off x="6217920" y="2468880"/>
+            <a:ext cx="2331720" cy="2011680"/>
+          </a:xfrm>
+          <a:prstGeom prst="roundRect">
+            <a:avLst>
+              <a:gd name="adj" fmla="val 5455"/>
+            </a:avLst>
+          </a:prstGeom>
+          <a:solidFill>
+            <a:srgbClr val="241E42"/>
+          </a:solidFill>
+          <a:ln/>
+        </p:spPr>
+      </p:sp>
+      <p:sp>
+        <p:nvSpPr>
+          <p:cNvPr id="15" name="Shape 11"/>
+          <p:cNvSpPr/>
+          <p:nvPr/>
+        </p:nvSpPr>
+        <p:spPr>
+          <a:xfrm>
+            <a:off x="6880860" y="2788920"/>
+            <a:ext cx="1005840" cy="1005840"/>
+          </a:xfrm>
+          <a:prstGeom prst="ellipse">
+            <a:avLst/>
+          </a:prstGeom>
+          <a:solidFill>
+            <a:srgbClr val="2C2552"/>
+          </a:solidFill>
+          <a:ln/>
+        </p:spPr>
+      </p:sp>
+      <p:pic>
+        <p:nvPicPr>
+          <p:cNvPr id="16" name="Image 2" descr="preencoded.png">    </p:cNvPr>
+          <p:cNvPicPr>
+            <a:picLocks noChangeAspect="1"/>
+          </p:cNvPicPr>
+          <p:nvPr/>
+        </p:nvPicPr>
+        <p:blipFill>
+          <a:blip r:embed="rId3"/>
+          <a:stretch>
+            <a:fillRect/>
+          </a:stretch>
+        </p:blipFill>
+        <p:spPr>
+          <a:xfrm>
+            <a:off x="7082028" y="2990088"/>
+            <a:ext cx="603504" cy="603504"/>
+          </a:xfrm>
+          <a:prstGeom prst="rect">
+            <a:avLst/>
+          </a:prstGeom>
+        </p:spPr>
+      </p:pic>
+      <p:sp>
+        <p:nvSpPr>
+          <p:cNvPr id="17" name="Text 12"/>
+          <p:cNvSpPr/>
+          <p:nvPr/>
+        </p:nvSpPr>
+        <p:spPr>
+          <a:xfrm>
+            <a:off x="6217920" y="3886200"/>
+            <a:ext cx="2331720" cy="457200"/>
+          </a:xfrm>
+          <a:prstGeom prst="rect">
+            <a:avLst/>
+          </a:prstGeom>
+          <a:noFill/>
+          <a:ln/>
+        </p:spPr>
+        <p:txBody>
+          <a:bodyPr wrap="square" rtlCol="0" anchor="ctr"/>
+          <a:lstStyle/>
+          <a:p>
+            <a:pPr algn="ctr" indent="0" marL="0">
+              <a:buNone/>
+            </a:pPr>
+            <a:r>
+              <a:rPr lang="en-US" sz="1800" b="1" dirty="0">
+                <a:solidFill>
+                  <a:srgbClr val="FFFFFF"/>
+                </a:solidFill>
+                <a:latin typeface="Calibri" pitchFamily="34" charset="0"/>
+                <a:ea typeface="Calibri" pitchFamily="34" charset="-122"/>
+                <a:cs typeface="Calibri" pitchFamily="34" charset="-120"/>
+              </a:rPr>
+              <a:t>Baseline</a:t>
+            </a:r>
+            <a:endParaRPr lang="en-US" sz="1800" dirty="0"/>
+          </a:p>
+        </p:txBody>
+      </p:sp>
+      <p:sp>
+        <p:nvSpPr>
+          <p:cNvPr id="18" name="Text 13"/>
+          <p:cNvSpPr/>
+          <p:nvPr/>
+        </p:nvSpPr>
+        <p:spPr>
+          <a:xfrm>
+            <a:off x="8567928" y="3108960"/>
+            <a:ext cx="420624" cy="640080"/>
+          </a:xfrm>
+          <a:prstGeom prst="rect">
+            <a:avLst/>
+          </a:prstGeom>
+          <a:noFill/>
+          <a:ln/>
+        </p:spPr>
+        <p:txBody>
+          <a:bodyPr wrap="square" rtlCol="0" anchor="ctr"/>
+          <a:lstStyle/>
+          <a:p>
+            <a:pPr algn="ctr" indent="0" marL="0">
+              <a:buNone/>
+            </a:pPr>
+            <a:r>
+              <a:rPr lang="en-US" sz="3000" b="1" dirty="0">
+                <a:solidFill>
+                  <a:srgbClr val="9E96C8"/>
+                </a:solidFill>
+                <a:latin typeface="Calibri" pitchFamily="34" charset="0"/>
+                <a:ea typeface="Calibri" pitchFamily="34" charset="-122"/>
+                <a:cs typeface="Calibri" pitchFamily="34" charset="-120"/>
+              </a:rPr>
+              <a:t>→</a:t>
+            </a:r>
+            <a:endParaRPr lang="en-US" sz="3000" dirty="0"/>
+          </a:p>
+        </p:txBody>
+      </p:sp>
+      <p:sp>
+        <p:nvSpPr>
+          <p:cNvPr id="19" name="Shape 14"/>
+          <p:cNvSpPr/>
+          <p:nvPr/>
+        </p:nvSpPr>
+        <p:spPr>
+          <a:xfrm>
+            <a:off x="9006840" y="2468880"/>
+            <a:ext cx="2331720" cy="2011680"/>
+          </a:xfrm>
+          <a:prstGeom prst="roundRect">
+            <a:avLst>
+              <a:gd name="adj" fmla="val 5455"/>
+            </a:avLst>
+          </a:prstGeom>
+          <a:solidFill>
+            <a:srgbClr val="241E42"/>
+          </a:solidFill>
+          <a:ln/>
+        </p:spPr>
+      </p:sp>
+      <p:sp>
+        <p:nvSpPr>
+          <p:cNvPr id="20" name="Shape 15"/>
+          <p:cNvSpPr/>
+          <p:nvPr/>
+        </p:nvSpPr>
+        <p:spPr>
+          <a:xfrm>
+            <a:off x="9669780" y="2788920"/>
+            <a:ext cx="1005840" cy="1005840"/>
+          </a:xfrm>
+          <a:prstGeom prst="ellipse">
+            <a:avLst/>
+          </a:prstGeom>
+          <a:solidFill>
+            <a:srgbClr val="2C2552"/>
+          </a:solidFill>
+          <a:ln/>
+        </p:spPr>
+      </p:sp>
+      <p:pic>
+        <p:nvPicPr>
+          <p:cNvPr id="21" name="Image 3" descr="preencoded.png">    </p:cNvPr>
+          <p:cNvPicPr>
+            <a:picLocks noChangeAspect="1"/>
+          </p:cNvPicPr>
+          <p:nvPr/>
+        </p:nvPicPr>
+        <p:blipFill>
+          <a:blip r:embed="rId4"/>
+          <a:stretch>
+            <a:fillRect/>
+          </a:stretch>
+        </p:blipFill>
+        <p:spPr>
+          <a:xfrm>
+            <a:off x="9870948" y="2990088"/>
+            <a:ext cx="603504" cy="603504"/>
+          </a:xfrm>
+          <a:prstGeom prst="rect">
+            <a:avLst/>
+          </a:prstGeom>
+        </p:spPr>
+      </p:pic>
+      <p:sp>
+        <p:nvSpPr>
+          <p:cNvPr id="22" name="Text 16"/>
+          <p:cNvSpPr/>
+          <p:nvPr/>
+        </p:nvSpPr>
+        <p:spPr>
+          <a:xfrm>
+            <a:off x="9006840" y="3886200"/>
+            <a:ext cx="2331720" cy="457200"/>
+          </a:xfrm>
+          <a:prstGeom prst="rect">
+            <a:avLst/>
+          </a:prstGeom>
+          <a:noFill/>
+          <a:ln/>
+        </p:spPr>
+        <p:txBody>
+          <a:bodyPr wrap="square" rtlCol="0" anchor="ctr"/>
+          <a:lstStyle/>
+          <a:p>
+            <a:pPr algn="ctr" indent="0" marL="0">
+              <a:buNone/>
+            </a:pPr>
+            <a:r>
+              <a:rPr lang="en-US" sz="1800" b="1" dirty="0">
+                <a:solidFill>
+                  <a:srgbClr val="FFFFFF"/>
+                </a:solidFill>
+                <a:latin typeface="Calibri" pitchFamily="34" charset="0"/>
+                <a:ea typeface="Calibri" pitchFamily="34" charset="-122"/>
+                <a:cs typeface="Calibri" pitchFamily="34" charset="-120"/>
+              </a:rPr>
+              <a:t>Pipeline</a:t>
+            </a:r>
+            <a:endParaRPr lang="en-US" sz="1800" dirty="0"/>
+          </a:p>
+        </p:txBody>
+      </p:sp>
+      <p:sp>
+        <p:nvSpPr>
+          <p:cNvPr id="23" name="Text 17"/>
+          <p:cNvSpPr/>
+          <p:nvPr/>
+        </p:nvSpPr>
+        <p:spPr>
+          <a:xfrm>
+            <a:off x="640080" y="6172200"/>
+            <a:ext cx="10881360" cy="457200"/>
+          </a:xfrm>
+          <a:prstGeom prst="rect">
+            <a:avLst/>
+          </a:prstGeom>
+          <a:noFill/>
+          <a:ln/>
+        </p:spPr>
+        <p:txBody>
+          <a:bodyPr wrap="square" rtlCol="0" anchor="ctr"/>
+          <a:lstStyle/>
+          <a:p>
+            <a:pPr indent="0" marL="0">
+              <a:buNone/>
+            </a:pPr>
+            <a:r>
+              <a:rPr lang="en-US" sz="1400" i="1" dirty="0">
+                <a:solidFill>
+                  <a:srgbClr val="9E96C8"/>
+                </a:solidFill>
+                <a:latin typeface="Calibri" pitchFamily="34" charset="0"/>
+                <a:ea typeface="Calibri" pitchFamily="34" charset="-122"/>
+                <a:cs typeface="Calibri" pitchFamily="34" charset="-120"/>
+              </a:rPr>
+              <a:t>Цель — не идеальная модель, а рабочая точка. Pipeline обязателен (стандарт с урока 10).</a:t>
+            </a:r>
+            <a:endParaRPr lang="en-US" sz="1400" dirty="0"/>
+          </a:p>
+        </p:txBody>
+      </p:sp>
+      <p:sp>
+        <p:nvSpPr>
+          <p:cNvPr id="24" name="Text 18"/>
+          <p:cNvSpPr/>
+          <p:nvPr/>
+        </p:nvSpPr>
+        <p:spPr>
+          <a:xfrm>
+            <a:off x="10698480" y="6309360"/>
+            <a:ext cx="1188720" cy="274320"/>
+          </a:xfrm>
+          <a:prstGeom prst="rect">
+            <a:avLst/>
+          </a:prstGeom>
+          <a:noFill/>
+          <a:ln/>
+        </p:spPr>
+        <p:txBody>
+          <a:bodyPr wrap="square" rtlCol="0" anchor="ctr"/>
+          <a:lstStyle/>
+          <a:p>
+            <a:pPr algn="r" indent="0" marL="0">
+              <a:buNone/>
+            </a:pPr>
+            <a:r>
+              <a:rPr lang="en-US" sz="1100" dirty="0">
+                <a:solidFill>
+                  <a:srgbClr val="9E96C8"/>
+                </a:solidFill>
+                <a:latin typeface="Calibri" pitchFamily="34" charset="0"/>
+                <a:ea typeface="Calibri" pitchFamily="34" charset="-122"/>
+                <a:cs typeface="Calibri" pitchFamily="34" charset="-120"/>
+              </a:rPr>
+              <a:t>Урок 21</a:t>
+            </a:r>
+            <a:endParaRPr lang="en-US" sz="1100" dirty="0"/>
+          </a:p>
+        </p:txBody>
+      </p:sp>
+    </p:spTree>
+  </p:cSld>
+  <p:clrMapOvr>
+    <a:masterClrMapping/>
+  </p:clrMapOvr>
+</p:sld>
+</file>
+
+<file path=ppt/slides/slide7.xml><?xml version="1.0" encoding="utf-8"?>
+<p:sld xmlns:a="http://schemas.openxmlformats.org/drawingml/2006/main" xmlns:r="http://schemas.openxmlformats.org/officeDocument/2006/relationships" xmlns:p="http://schemas.openxmlformats.org/presentationml/2006/main">
+  <p:cSld name="Slide 7">
+    <p:bg>
+      <p:bgPr>
+        <a:solidFill>
+          <a:srgbClr val="17132E"/>
+        </a:solidFill>
+      </p:bgPr>
+    </p:bg>
+    <p:spTree>
+      <p:nvGrpSpPr>
+        <p:cNvPr id="1" name=""/>
+        <p:cNvGrpSpPr/>
+        <p:nvPr/>
+      </p:nvGrpSpPr>
+      <p:grpSpPr>
+        <a:xfrm>
+          <a:off x="0" y="0"/>
+          <a:ext cx="0" cy="0"/>
+          <a:chOff x="0" y="0"/>
+          <a:chExt cx="0" cy="0"/>
+        </a:xfrm>
+      </p:grpSpPr>
+      <p:sp>
+        <p:nvSpPr>
+          <p:cNvPr id="2" name="Text 0"/>
+          <p:cNvSpPr/>
+          <p:nvPr/>
+        </p:nvSpPr>
+        <p:spPr>
+          <a:xfrm>
+            <a:off x="640080" y="502920"/>
+            <a:ext cx="10058400" cy="365760"/>
+          </a:xfrm>
+          <a:prstGeom prst="rect">
+            <a:avLst/>
+          </a:prstGeom>
+          <a:noFill/>
+          <a:ln/>
+        </p:spPr>
+        <p:txBody>
+          <a:bodyPr wrap="square" rtlCol="0" anchor="ctr"/>
+          <a:lstStyle/>
+          <a:p>
+            <a:pPr indent="0" marL="0">
+              <a:buNone/>
+            </a:pPr>
+            <a:r>
+              <a:rPr lang="en-US" sz="1300" b="1" spc="300" kern="0" dirty="0">
+                <a:solidFill>
+                  <a:srgbClr val="6EE7B7"/>
+                </a:solidFill>
+                <a:latin typeface="Calibri" pitchFamily="34" charset="0"/>
+                <a:ea typeface="Calibri" pitchFamily="34" charset="-122"/>
+                <a:cs typeface="Calibri" pitchFamily="34" charset="-120"/>
+              </a:rPr>
+              <a:t>ИТОГ УРОКА</a:t>
+            </a:r>
+            <a:endParaRPr lang="en-US" sz="1300" dirty="0"/>
+          </a:p>
+        </p:txBody>
+      </p:sp>
+      <p:sp>
+        <p:nvSpPr>
+          <p:cNvPr id="3" name="Text 1"/>
+          <p:cNvSpPr/>
+          <p:nvPr/>
+        </p:nvSpPr>
+        <p:spPr>
+          <a:xfrm>
+            <a:off x="640080" y="868680"/>
+            <a:ext cx="10058400" cy="640080"/>
+          </a:xfrm>
+          <a:prstGeom prst="rect">
+            <a:avLst/>
+          </a:prstGeom>
+          <a:noFill/>
+          <a:ln/>
+        </p:spPr>
+        <p:txBody>
+          <a:bodyPr wrap="square" rtlCol="0" anchor="ctr"/>
+          <a:lstStyle/>
+          <a:p>
+            <a:pPr indent="0" marL="0">
+              <a:buNone/>
+            </a:pPr>
+            <a:r>
+              <a:rPr lang="en-US" sz="3200" b="1" dirty="0">
+                <a:solidFill>
+                  <a:srgbClr val="FFFFFF"/>
+                </a:solidFill>
+                <a:latin typeface="Calibri" pitchFamily="34" charset="0"/>
+                <a:ea typeface="Calibri" pitchFamily="34" charset="-122"/>
+                <a:cs typeface="Calibri" pitchFamily="34" charset="-120"/>
+              </a:rPr>
+              <a:t>Что должно быть к концу</a:t>
+            </a:r>
+            <a:endParaRPr lang="en-US" sz="3200" dirty="0"/>
+          </a:p>
+        </p:txBody>
+      </p:sp>
+      <p:sp>
+        <p:nvSpPr>
+          <p:cNvPr id="4" name="Shape 2"/>
+          <p:cNvSpPr/>
+          <p:nvPr/>
+        </p:nvSpPr>
+        <p:spPr>
+          <a:xfrm>
+            <a:off x="640080" y="1783080"/>
+            <a:ext cx="5349240" cy="3108960"/>
+          </a:xfrm>
+          <a:prstGeom prst="roundRect">
+            <a:avLst>
+              <a:gd name="adj" fmla="val 3529"/>
+            </a:avLst>
+          </a:prstGeom>
+          <a:solidFill>
+            <a:srgbClr val="241E42"/>
+          </a:solidFill>
+          <a:ln/>
+        </p:spPr>
+      </p:sp>
+      <p:pic>
+        <p:nvPicPr>
+          <p:cNvPr id="5" name="Image 0" descr="preencoded.png">    </p:cNvPr>
+          <p:cNvPicPr>
+            <a:picLocks noChangeAspect="1"/>
+          </p:cNvPicPr>
+          <p:nvPr/>
+        </p:nvPicPr>
+        <p:blipFill>
+          <a:blip r:embed="rId1"/>
+          <a:stretch>
+            <a:fillRect/>
+          </a:stretch>
+        </p:blipFill>
+        <p:spPr>
+          <a:xfrm>
+            <a:off x="914400" y="2011680"/>
+            <a:ext cx="457200" cy="457200"/>
+          </a:xfrm>
+          <a:prstGeom prst="rect">
+            <a:avLst/>
+          </a:prstGeom>
+        </p:spPr>
+      </p:pic>
+      <p:sp>
+        <p:nvSpPr>
+          <p:cNvPr id="6" name="Text 3"/>
+          <p:cNvSpPr/>
+          <p:nvPr/>
+        </p:nvSpPr>
+        <p:spPr>
+          <a:xfrm>
+            <a:off x="1508760" y="2011680"/>
+            <a:ext cx="4206240" cy="457200"/>
+          </a:xfrm>
+          <a:prstGeom prst="rect">
+            <a:avLst/>
+          </a:prstGeom>
+          <a:noFill/>
+          <a:ln/>
+        </p:spPr>
+        <p:txBody>
+          <a:bodyPr wrap="square" rtlCol="0" anchor="ctr"/>
+          <a:lstStyle/>
+          <a:p>
+            <a:pPr indent="0" marL="0">
+              <a:buNone/>
+            </a:pPr>
+            <a:r>
               <a:rPr lang="en-US" sz="2000" b="1" dirty="0">
                 <a:solidFill>
-                  <a:srgbClr val="27D3EE"/>
+                  <a:srgbClr val="FFFFFF"/>
                 </a:solidFill>
                 <a:latin typeface="Calibri" pitchFamily="34" charset="0"/>
                 <a:ea typeface="Calibri" pitchFamily="34" charset="-122"/>
@@ -3895,34 +5192,37 @@
       </p:sp>
       <p:sp>
         <p:nvSpPr>
-          <p:cNvPr id="6" name="Text 4"/>
-          <p:cNvSpPr/>
-          <p:nvPr/>
-        </p:nvSpPr>
-        <p:spPr>
-          <a:xfrm>
-            <a:off x="1005840" y="2743200"/>
-            <a:ext cx="4937760" cy="2926080"/>
-          </a:xfrm>
-          <a:prstGeom prst="rect">
-            <a:avLst/>
-          </a:prstGeom>
-          <a:noFill/>
-          <a:ln/>
-        </p:spPr>
-        <p:txBody>
-          <a:bodyPr wrap="square" rtlCol="0" anchor="t"/>
+          <p:cNvPr id="7" name="Text 4"/>
+          <p:cNvSpPr/>
+          <p:nvPr/>
+        </p:nvSpPr>
+        <p:spPr>
+          <a:xfrm>
+            <a:off x="960120" y="2743200"/>
+            <a:ext cx="4754880" cy="2011680"/>
+          </a:xfrm>
+          <a:prstGeom prst="rect">
+            <a:avLst/>
+          </a:prstGeom>
+          <a:noFill/>
+          <a:ln/>
+        </p:spPr>
+        <p:txBody>
+          <a:bodyPr wrap="square" rtlCol="0" anchor="ctr"/>
           <a:lstStyle/>
           <a:p>
             <a:pPr marL="342900" indent="-342900">
               <a:lnSpc>
-                <a:spcPct val="135000"/>
+                <a:spcPct val="105000"/>
               </a:lnSpc>
+              <a:spcAft>
+                <a:spcPts val="1000"/>
+              </a:spcAft>
               <a:buSzPct val="100000"/>
               <a:buChar char="•"/>
             </a:pPr>
             <a:r>
-              <a:rPr lang="en-US" sz="1700" dirty="0">
+              <a:rPr lang="en-US" sz="1600" dirty="0">
                 <a:solidFill>
                   <a:srgbClr val="D9D4F2"/>
                 </a:solidFill>
@@ -3930,21 +5230,23 @@
                 <a:ea typeface="Calibri" pitchFamily="34" charset="-122"/>
                 <a:cs typeface="Calibri" pitchFamily="34" charset="-120"/>
               </a:rPr>
-              <a:t>Чёткая, реализуемая задача + метрика
-</a:t>
-            </a:r>
-            <a:endParaRPr lang="en-US" sz="1700" dirty="0"/>
+              <a:t>Чёткая, реализуемая задача + метрика</a:t>
+            </a:r>
+            <a:endParaRPr lang="en-US" sz="1600" dirty="0"/>
           </a:p>
           <a:p>
             <a:pPr marL="342900" indent="-342900">
               <a:lnSpc>
-                <a:spcPct val="135000"/>
+                <a:spcPct val="105000"/>
               </a:lnSpc>
+              <a:spcAft>
+                <a:spcPts val="1000"/>
+              </a:spcAft>
               <a:buSzPct val="100000"/>
               <a:buChar char="•"/>
             </a:pPr>
             <a:r>
-              <a:rPr lang="en-US" sz="1700" dirty="0">
+              <a:rPr lang="en-US" sz="1600" dirty="0">
                 <a:solidFill>
                   <a:srgbClr val="D9D4F2"/>
                 </a:solidFill>
@@ -3952,21 +5254,23 @@
                 <a:ea typeface="Calibri" pitchFamily="34" charset="-122"/>
                 <a:cs typeface="Calibri" pitchFamily="34" charset="-120"/>
               </a:rPr>
-              <a:t>Данные загружены и разделены
-</a:t>
-            </a:r>
-            <a:endParaRPr lang="en-US" sz="1700" dirty="0"/>
+              <a:t>Данные загружены и разделены</a:t>
+            </a:r>
+            <a:endParaRPr lang="en-US" sz="1600" dirty="0"/>
           </a:p>
           <a:p>
             <a:pPr marL="342900" indent="-342900">
               <a:lnSpc>
-                <a:spcPct val="135000"/>
+                <a:spcPct val="105000"/>
               </a:lnSpc>
+              <a:spcAft>
+                <a:spcPts val="1000"/>
+              </a:spcAft>
               <a:buSzPct val="100000"/>
               <a:buChar char="•"/>
             </a:pPr>
             <a:r>
-              <a:rPr lang="en-US" sz="1700" dirty="0">
+              <a:rPr lang="en-US" sz="1600" dirty="0">
                 <a:solidFill>
                   <a:srgbClr val="D9D4F2"/>
                 </a:solidFill>
@@ -3974,23 +5278,25 @@
                 <a:ea typeface="Calibri" pitchFamily="34" charset="-122"/>
                 <a:cs typeface="Calibri" pitchFamily="34" charset="-120"/>
               </a:rPr>
-              <a:t>Есть baseline
-</a:t>
-            </a:r>
-            <a:endParaRPr lang="en-US" sz="1700" dirty="0"/>
+              <a:t>Есть baseline</a:t>
+            </a:r>
+            <a:endParaRPr lang="en-US" sz="1600" dirty="0"/>
           </a:p>
           <a:p>
             <a:pPr marL="342900" indent="-342900">
               <a:lnSpc>
-                <a:spcPct val="135000"/>
+                <a:spcPct val="105000"/>
               </a:lnSpc>
+              <a:spcAft>
+                <a:spcPts val="1000"/>
+              </a:spcAft>
               <a:buSzPct val="100000"/>
               <a:buChar char="•"/>
             </a:pPr>
             <a:r>
-              <a:rPr lang="en-US" sz="1700" b="1" dirty="0">
-                <a:solidFill>
-                  <a:srgbClr val="2DD4BF"/>
+              <a:rPr lang="en-US" sz="1600" dirty="0">
+                <a:solidFill>
+                  <a:srgbClr val="D9D4F2"/>
                 </a:solidFill>
                 <a:latin typeface="Calibri" pitchFamily="34" charset="0"/>
                 <a:ea typeface="Calibri" pitchFamily="34" charset="-122"/>
@@ -3998,51 +5304,75 @@
               </a:rPr>
               <a:t>Первичная модель в Pipeline</a:t>
             </a:r>
-            <a:endParaRPr lang="en-US" sz="1700" dirty="0"/>
-          </a:p>
-        </p:txBody>
-      </p:sp>
-      <p:sp>
-        <p:nvSpPr>
-          <p:cNvPr id="7" name="Shape 5"/>
-          <p:cNvSpPr/>
-          <p:nvPr/>
-        </p:nvSpPr>
-        <p:spPr>
-          <a:xfrm>
-            <a:off x="6446520" y="1920240"/>
-            <a:ext cx="5150815" cy="4023360"/>
+            <a:endParaRPr lang="en-US" sz="1600" dirty="0"/>
+          </a:p>
+        </p:txBody>
+      </p:sp>
+      <p:sp>
+        <p:nvSpPr>
+          <p:cNvPr id="8" name="Shape 5"/>
+          <p:cNvSpPr/>
+          <p:nvPr/>
+        </p:nvSpPr>
+        <p:spPr>
+          <a:xfrm>
+            <a:off x="6172200" y="1783080"/>
+            <a:ext cx="5349240" cy="3108960"/>
           </a:xfrm>
           <a:prstGeom prst="roundRect">
             <a:avLst>
-              <a:gd name="adj" fmla="val 2727"/>
+              <a:gd name="adj" fmla="val 3529"/>
             </a:avLst>
           </a:prstGeom>
           <a:solidFill>
-            <a:srgbClr val="2C2552"/>
-          </a:solidFill>
-          <a:ln/>
-        </p:spPr>
-      </p:sp>
-      <p:sp>
-        <p:nvSpPr>
-          <p:cNvPr id="8" name="Text 6"/>
-          <p:cNvSpPr/>
-          <p:nvPr/>
-        </p:nvSpPr>
-        <p:spPr>
-          <a:xfrm>
-            <a:off x="6812280" y="2148840"/>
-            <a:ext cx="4572000" cy="457200"/>
-          </a:xfrm>
-          <a:prstGeom prst="rect">
-            <a:avLst/>
-          </a:prstGeom>
-          <a:noFill/>
-          <a:ln/>
-        </p:spPr>
-        <p:txBody>
-          <a:bodyPr wrap="square" rtlCol="0" anchor="t"/>
+            <a:srgbClr val="241E42"/>
+          </a:solidFill>
+          <a:ln/>
+        </p:spPr>
+      </p:sp>
+      <p:pic>
+        <p:nvPicPr>
+          <p:cNvPr id="9" name="Image 1" descr="preencoded.png">    </p:cNvPr>
+          <p:cNvPicPr>
+            <a:picLocks noChangeAspect="1"/>
+          </p:cNvPicPr>
+          <p:nvPr/>
+        </p:nvPicPr>
+        <p:blipFill>
+          <a:blip r:embed="rId2"/>
+          <a:stretch>
+            <a:fillRect/>
+          </a:stretch>
+        </p:blipFill>
+        <p:spPr>
+          <a:xfrm>
+            <a:off x="6446520" y="2011680"/>
+            <a:ext cx="457200" cy="457200"/>
+          </a:xfrm>
+          <a:prstGeom prst="rect">
+            <a:avLst/>
+          </a:prstGeom>
+        </p:spPr>
+      </p:pic>
+      <p:sp>
+        <p:nvSpPr>
+          <p:cNvPr id="10" name="Text 6"/>
+          <p:cNvSpPr/>
+          <p:nvPr/>
+        </p:nvSpPr>
+        <p:spPr>
+          <a:xfrm>
+            <a:off x="7040880" y="2011680"/>
+            <a:ext cx="4206240" cy="457200"/>
+          </a:xfrm>
+          <a:prstGeom prst="rect">
+            <a:avLst/>
+          </a:prstGeom>
+          <a:noFill/>
+          <a:ln/>
+        </p:spPr>
+        <p:txBody>
+          <a:bodyPr wrap="square" rtlCol="0" anchor="ctr"/>
           <a:lstStyle/>
           <a:p>
             <a:pPr indent="0" marL="0">
@@ -4051,7 +5381,7 @@
             <a:r>
               <a:rPr lang="en-US" sz="2000" b="1" dirty="0">
                 <a:solidFill>
-                  <a:srgbClr val="2DD4BF"/>
+                  <a:srgbClr val="FFFFFF"/>
                 </a:solidFill>
                 <a:latin typeface="Calibri" pitchFamily="34" charset="0"/>
                 <a:ea typeface="Calibri" pitchFamily="34" charset="-122"/>
@@ -4065,34 +5395,37 @@
       </p:sp>
       <p:sp>
         <p:nvSpPr>
-          <p:cNvPr id="9" name="Text 7"/>
-          <p:cNvSpPr/>
-          <p:nvPr/>
-        </p:nvSpPr>
-        <p:spPr>
-          <a:xfrm>
-            <a:off x="6858000" y="2743200"/>
-            <a:ext cx="4510735" cy="2926080"/>
-          </a:xfrm>
-          <a:prstGeom prst="rect">
-            <a:avLst/>
-          </a:prstGeom>
-          <a:noFill/>
-          <a:ln/>
-        </p:spPr>
-        <p:txBody>
-          <a:bodyPr wrap="square" rtlCol="0" anchor="t"/>
+          <p:cNvPr id="11" name="Text 7"/>
+          <p:cNvSpPr/>
+          <p:nvPr/>
+        </p:nvSpPr>
+        <p:spPr>
+          <a:xfrm>
+            <a:off x="6492240" y="2743200"/>
+            <a:ext cx="4754880" cy="2011680"/>
+          </a:xfrm>
+          <a:prstGeom prst="rect">
+            <a:avLst/>
+          </a:prstGeom>
+          <a:noFill/>
+          <a:ln/>
+        </p:spPr>
+        <p:txBody>
+          <a:bodyPr wrap="square" rtlCol="0" anchor="ctr"/>
           <a:lstStyle/>
           <a:p>
             <a:pPr marL="342900" indent="-342900">
               <a:lnSpc>
-                <a:spcPct val="135000"/>
+                <a:spcPct val="105000"/>
               </a:lnSpc>
+              <a:spcAft>
+                <a:spcPts val="1000"/>
+              </a:spcAft>
               <a:buSzPct val="100000"/>
               <a:buChar char="•"/>
             </a:pPr>
             <a:r>
-              <a:rPr lang="en-US" sz="1700" dirty="0">
+              <a:rPr lang="en-US" sz="1600" dirty="0">
                 <a:solidFill>
                   <a:srgbClr val="D9D4F2"/>
                 </a:solidFill>
@@ -4100,21 +5433,23 @@
                 <a:ea typeface="Calibri" pitchFamily="34" charset="-122"/>
                 <a:cs typeface="Calibri" pitchFamily="34" charset="-120"/>
               </a:rPr>
-              <a:t>Дособрать данные, проверить качество
-</a:t>
-            </a:r>
-            <a:endParaRPr lang="en-US" sz="1700" dirty="0"/>
+              <a:t>Дособрать данные, проверить качество</a:t>
+            </a:r>
+            <a:endParaRPr lang="en-US" sz="1600" dirty="0"/>
           </a:p>
           <a:p>
             <a:pPr marL="342900" indent="-342900">
               <a:lnSpc>
-                <a:spcPct val="135000"/>
+                <a:spcPct val="105000"/>
               </a:lnSpc>
+              <a:spcAft>
+                <a:spcPts val="1000"/>
+              </a:spcAft>
               <a:buSzPct val="100000"/>
               <a:buChar char="•"/>
             </a:pPr>
             <a:r>
-              <a:rPr lang="en-US" sz="1700" dirty="0">
+              <a:rPr lang="en-US" sz="1600" dirty="0">
                 <a:solidFill>
                   <a:srgbClr val="D9D4F2"/>
                 </a:solidFill>
@@ -4122,21 +5457,23 @@
                 <a:ea typeface="Calibri" pitchFamily="34" charset="-122"/>
                 <a:cs typeface="Calibri" pitchFamily="34" charset="-120"/>
               </a:rPr>
-              <a:t>Довести первичную модель (чистый ноутбук)
-</a:t>
-            </a:r>
-            <a:endParaRPr lang="en-US" sz="1700" dirty="0"/>
+              <a:t>Довести первичную модель (чистый ноутбук)</a:t>
+            </a:r>
+            <a:endParaRPr lang="en-US" sz="1600" dirty="0"/>
           </a:p>
           <a:p>
             <a:pPr marL="342900" indent="-342900">
               <a:lnSpc>
-                <a:spcPct val="135000"/>
+                <a:spcPct val="105000"/>
               </a:lnSpc>
+              <a:spcAft>
+                <a:spcPts val="1000"/>
+              </a:spcAft>
               <a:buSzPct val="100000"/>
               <a:buChar char="•"/>
             </a:pPr>
             <a:r>
-              <a:rPr lang="en-US" sz="1700" dirty="0">
+              <a:rPr lang="en-US" sz="1600" dirty="0">
                 <a:solidFill>
                   <a:srgbClr val="D9D4F2"/>
                 </a:solidFill>
@@ -4146,68 +5483,114 @@
               </a:rPr>
               <a:t>Записать идею интерфейса: вход → ответ</a:t>
             </a:r>
+            <a:endParaRPr lang="en-US" sz="1600" dirty="0"/>
+          </a:p>
+        </p:txBody>
+      </p:sp>
+      <p:sp>
+        <p:nvSpPr>
+          <p:cNvPr id="12" name="Shape 8"/>
+          <p:cNvSpPr/>
+          <p:nvPr/>
+        </p:nvSpPr>
+        <p:spPr>
+          <a:xfrm>
+            <a:off x="640080" y="5120640"/>
+            <a:ext cx="10881360" cy="868680"/>
+          </a:xfrm>
+          <a:prstGeom prst="roundRect">
+            <a:avLst>
+              <a:gd name="adj" fmla="val 12632"/>
+            </a:avLst>
+          </a:prstGeom>
+          <a:solidFill>
+            <a:srgbClr val="5B4FC4"/>
+          </a:solidFill>
+          <a:ln/>
+        </p:spPr>
+      </p:sp>
+      <p:pic>
+        <p:nvPicPr>
+          <p:cNvPr id="13" name="Image 2" descr="preencoded.png">    </p:cNvPr>
+          <p:cNvPicPr>
+            <a:picLocks noChangeAspect="1"/>
+          </p:cNvPicPr>
+          <p:nvPr/>
+        </p:nvPicPr>
+        <p:blipFill>
+          <a:blip r:embed="rId3"/>
+          <a:stretch>
+            <a:fillRect/>
+          </a:stretch>
+        </p:blipFill>
+        <p:spPr>
+          <a:xfrm>
+            <a:off x="914400" y="5321808"/>
+            <a:ext cx="457200" cy="457200"/>
+          </a:xfrm>
+          <a:prstGeom prst="rect">
+            <a:avLst/>
+          </a:prstGeom>
+        </p:spPr>
+      </p:pic>
+      <p:sp>
+        <p:nvSpPr>
+          <p:cNvPr id="14" name="Text 9"/>
+          <p:cNvSpPr/>
+          <p:nvPr/>
+        </p:nvSpPr>
+        <p:spPr>
+          <a:xfrm>
+            <a:off x="1554480" y="5120640"/>
+            <a:ext cx="9784080" cy="868680"/>
+          </a:xfrm>
+          <a:prstGeom prst="rect">
+            <a:avLst/>
+          </a:prstGeom>
+          <a:noFill/>
+          <a:ln/>
+        </p:spPr>
+        <p:txBody>
+          <a:bodyPr wrap="square" rtlCol="0" anchor="ctr"/>
+          <a:lstStyle/>
+          <a:p>
+            <a:pPr indent="0" marL="0">
+              <a:buNone/>
+            </a:pPr>
+            <a:r>
+              <a:rPr lang="en-US" sz="1700" b="1" dirty="0">
+                <a:solidFill>
+                  <a:srgbClr val="FFFFFF"/>
+                </a:solidFill>
+                <a:latin typeface="Calibri" pitchFamily="34" charset="0"/>
+                <a:ea typeface="Calibri" pitchFamily="34" charset="-122"/>
+                <a:cs typeface="Calibri" pitchFamily="34" charset="-120"/>
+              </a:rPr>
+              <a:t>Дальше — урок 22: улучшаем модель и делаем сайт. Финал — Demo Day для родителей.</a:t>
+            </a:r>
             <a:endParaRPr lang="en-US" sz="1700" dirty="0"/>
           </a:p>
         </p:txBody>
       </p:sp>
       <p:sp>
         <p:nvSpPr>
-          <p:cNvPr id="10" name="Text 8"/>
-          <p:cNvSpPr/>
-          <p:nvPr/>
-        </p:nvSpPr>
-        <p:spPr>
-          <a:xfrm>
-            <a:off x="6858000" y="5394960"/>
-            <a:ext cx="4572000" cy="457200"/>
-          </a:xfrm>
-          <a:prstGeom prst="rect">
-            <a:avLst/>
-          </a:prstGeom>
-          <a:noFill/>
-          <a:ln/>
-        </p:spPr>
-        <p:txBody>
-          <a:bodyPr wrap="square" rtlCol="0" anchor="t"/>
-          <a:lstStyle/>
-          <a:p>
-            <a:pPr indent="0" marL="0">
-              <a:buNone/>
-            </a:pPr>
-            <a:r>
-              <a:rPr lang="en-US" sz="1400" i="1" dirty="0">
-                <a:solidFill>
-                  <a:srgbClr val="9E96C8"/>
-                </a:solidFill>
-                <a:latin typeface="Calibri" pitchFamily="34" charset="0"/>
-                <a:ea typeface="Calibri" pitchFamily="34" charset="-122"/>
-                <a:cs typeface="Calibri" pitchFamily="34" charset="-120"/>
-              </a:rPr>
-              <a:t>Дальше — урок 22: улучшаем модель и делаем сайт.</a:t>
-            </a:r>
-            <a:endParaRPr lang="en-US" sz="1400" dirty="0"/>
-          </a:p>
-        </p:txBody>
-      </p:sp>
-      <p:sp>
-        <p:nvSpPr>
-          <p:cNvPr id="11" name="Text 9"/>
-          <p:cNvSpPr/>
-          <p:nvPr/>
-        </p:nvSpPr>
-        <p:spPr>
-          <a:xfrm>
-            <a:off x="10271455" y="6355080"/>
-            <a:ext cx="1371600" cy="274320"/>
-          </a:xfrm>
-          <a:prstGeom prst="rect">
-            <a:avLst/>
-          </a:prstGeom>
-          <a:noFill/>
-          <a:ln/>
-        </p:spPr>
-        <p:txBody>
-          <a:bodyPr wrap="square" rtlCol="0" anchor="t"/>
+          <p:cNvPr id="15" name="Text 10"/>
+          <p:cNvSpPr/>
+          <p:nvPr/>
+        </p:nvSpPr>
+        <p:spPr>
+          <a:xfrm>
+            <a:off x="10698480" y="6309360"/>
+            <a:ext cx="1188720" cy="274320"/>
+          </a:xfrm>
+          <a:prstGeom prst="rect">
+            <a:avLst/>
+          </a:prstGeom>
+          <a:noFill/>
+          <a:ln/>
+        </p:spPr>
+        <p:txBody>
+          <a:bodyPr wrap="square" rtlCol="0" anchor="ctr"/>
           <a:lstStyle/>
           <a:p>
             <a:pPr algn="r" indent="0" marL="0">
